--- a/projeto_fp_tp10.pptx
+++ b/projeto_fp_tp10.pptx
@@ -2,7 +2,7 @@
 <file path=ppt/presentation.xml><?xml version="1.0" encoding="utf-8"?>
 <p:presentation xmlns:a="http://schemas.openxmlformats.org/drawingml/2006/main" xmlns:r="http://schemas.openxmlformats.org/officeDocument/2006/relationships" xmlns:p="http://schemas.openxmlformats.org/presentationml/2006/main" saveSubsetFonts="1">
   <p:sldMasterIdLst>
-    <p:sldMasterId id="2147483648" r:id="rId1"/>
+    <p:sldMasterId id="2147483689" r:id="rId1"/>
   </p:sldMasterIdLst>
   <p:sldIdLst>
     <p:sldId id="256" r:id="rId2"/>
@@ -107,6 +107,583 @@
 </p:presentation>
 </file>
 
+<file path=ppt/revisionInfo.xml><?xml version="1.0" encoding="utf-8"?>
+<p1510:revInfo xmlns:a="http://schemas.openxmlformats.org/drawingml/2006/main" xmlns:r="http://schemas.openxmlformats.org/officeDocument/2006/relationships" xmlns:p1510="http://schemas.microsoft.com/office/powerpoint/2015/10/main">
+  <p1510:revLst>
+    <p1510:client id="{49293244-A155-4740-A274-1AB9773F4798}" v="28" dt="2026-04-28T19:29:07.362"/>
+  </p1510:revLst>
+</p1510:revInfo>
+</file>
+
+<file path=ppt/changesInfos/changesInfo1.xml><?xml version="1.0" encoding="utf-8"?>
+<pc:chgInfo xmlns:a="http://schemas.openxmlformats.org/drawingml/2006/main" xmlns:r="http://schemas.openxmlformats.org/officeDocument/2006/relationships" xmlns:ac="http://schemas.microsoft.com/office/drawing/2013/main/command" xmlns:pc="http://schemas.microsoft.com/office/powerpoint/2013/main/command">
+  <pc:docChgLst>
+    <pc:chgData name="Gabriela Carneiro" userId="038eca41cd8564ab" providerId="LiveId" clId="{D03F746D-BE5D-4789-93E6-42C6E52F57A2}"/>
+    <pc:docChg chg="undo custSel modSld addMainMaster delMainMaster">
+      <pc:chgData name="Gabriela Carneiro" userId="038eca41cd8564ab" providerId="LiveId" clId="{D03F746D-BE5D-4789-93E6-42C6E52F57A2}" dt="2026-04-28T19:29:07.359" v="234" actId="1076"/>
+      <pc:docMkLst>
+        <pc:docMk/>
+      </pc:docMkLst>
+      <pc:sldChg chg="addSp delSp modSp mod setBg modClrScheme addAnim delAnim delDesignElem chgLayout">
+        <pc:chgData name="Gabriela Carneiro" userId="038eca41cd8564ab" providerId="LiveId" clId="{D03F746D-BE5D-4789-93E6-42C6E52F57A2}" dt="2026-04-28T19:29:07.359" v="234" actId="1076"/>
+        <pc:sldMkLst>
+          <pc:docMk/>
+          <pc:sldMk cId="334472207" sldId="256"/>
+        </pc:sldMkLst>
+        <pc:spChg chg="mod">
+          <ac:chgData name="Gabriela Carneiro" userId="038eca41cd8564ab" providerId="LiveId" clId="{D03F746D-BE5D-4789-93E6-42C6E52F57A2}" dt="2026-04-28T19:28:59.700" v="233" actId="1076"/>
+          <ac:spMkLst>
+            <pc:docMk/>
+            <pc:sldMk cId="334472207" sldId="256"/>
+            <ac:spMk id="2" creationId="{75ECC06D-CF47-DEAA-143E-F7562C4F7A12}"/>
+          </ac:spMkLst>
+        </pc:spChg>
+        <pc:spChg chg="mod">
+          <ac:chgData name="Gabriela Carneiro" userId="038eca41cd8564ab" providerId="LiveId" clId="{D03F746D-BE5D-4789-93E6-42C6E52F57A2}" dt="2026-04-28T19:28:56.790" v="232" actId="1076"/>
+          <ac:spMkLst>
+            <pc:docMk/>
+            <pc:sldMk cId="334472207" sldId="256"/>
+            <ac:spMk id="3" creationId="{A8F6453E-3446-8960-C5F4-299D511766F6}"/>
+          </ac:spMkLst>
+        </pc:spChg>
+        <pc:spChg chg="add del">
+          <ac:chgData name="Gabriela Carneiro" userId="038eca41cd8564ab" providerId="LiveId" clId="{D03F746D-BE5D-4789-93E6-42C6E52F57A2}" dt="2026-04-28T19:13:52.677" v="42" actId="22"/>
+          <ac:spMkLst>
+            <pc:docMk/>
+            <pc:sldMk cId="334472207" sldId="256"/>
+            <ac:spMk id="5" creationId="{58DAEC2A-5BF5-7BED-4E44-45EBC9E4B3D0}"/>
+          </ac:spMkLst>
+        </pc:spChg>
+        <pc:spChg chg="add del">
+          <ac:chgData name="Gabriela Carneiro" userId="038eca41cd8564ab" providerId="LiveId" clId="{D03F746D-BE5D-4789-93E6-42C6E52F57A2}" dt="2026-04-28T19:23:38.771" v="70" actId="22"/>
+          <ac:spMkLst>
+            <pc:docMk/>
+            <pc:sldMk cId="334472207" sldId="256"/>
+            <ac:spMk id="8" creationId="{3C806525-1F3B-D3C1-D491-4319E90E9558}"/>
+          </ac:spMkLst>
+        </pc:spChg>
+        <pc:spChg chg="add mod">
+          <ac:chgData name="Gabriela Carneiro" userId="038eca41cd8564ab" providerId="LiveId" clId="{D03F746D-BE5D-4789-93E6-42C6E52F57A2}" dt="2026-04-28T19:24:32.657" v="226" actId="20577"/>
+          <ac:spMkLst>
+            <pc:docMk/>
+            <pc:sldMk cId="334472207" sldId="256"/>
+            <ac:spMk id="10" creationId="{0B83327B-5780-CA19-0F3B-A91E31244EFE}"/>
+          </ac:spMkLst>
+        </pc:spChg>
+        <pc:spChg chg="add del">
+          <ac:chgData name="Gabriela Carneiro" userId="038eca41cd8564ab" providerId="LiveId" clId="{D03F746D-BE5D-4789-93E6-42C6E52F57A2}" dt="2026-04-28T18:54:33.043" v="7" actId="26606"/>
+          <ac:spMkLst>
+            <pc:docMk/>
+            <pc:sldMk cId="334472207" sldId="256"/>
+            <ac:spMk id="1031" creationId="{19F9BF86-FE94-4517-B97D-026C7515E589}"/>
+          </ac:spMkLst>
+        </pc:spChg>
+        <pc:spChg chg="add del">
+          <ac:chgData name="Gabriela Carneiro" userId="038eca41cd8564ab" providerId="LiveId" clId="{D03F746D-BE5D-4789-93E6-42C6E52F57A2}" dt="2026-04-28T18:54:34.593" v="9" actId="26606"/>
+          <ac:spMkLst>
+            <pc:docMk/>
+            <pc:sldMk cId="334472207" sldId="256"/>
+            <ac:spMk id="1035" creationId="{33E93247-6229-44AB-A550-739E971E690B}"/>
+          </ac:spMkLst>
+        </pc:spChg>
+        <pc:spChg chg="add del">
+          <ac:chgData name="Gabriela Carneiro" userId="038eca41cd8564ab" providerId="LiveId" clId="{D03F746D-BE5D-4789-93E6-42C6E52F57A2}" dt="2026-04-28T19:14:02.978" v="43" actId="26606"/>
+          <ac:spMkLst>
+            <pc:docMk/>
+            <pc:sldMk cId="334472207" sldId="256"/>
+            <ac:spMk id="1038" creationId="{19F9BF86-FE94-4517-B97D-026C7515E589}"/>
+          </ac:spMkLst>
+        </pc:spChg>
+        <pc:spChg chg="add del">
+          <ac:chgData name="Gabriela Carneiro" userId="038eca41cd8564ab" providerId="LiveId" clId="{D03F746D-BE5D-4789-93E6-42C6E52F57A2}" dt="2026-04-28T19:28:39.910" v="229"/>
+          <ac:spMkLst>
+            <pc:docMk/>
+            <pc:sldMk cId="334472207" sldId="256"/>
+            <ac:spMk id="1044" creationId="{19F9BF86-FE94-4517-B97D-026C7515E589}"/>
+          </ac:spMkLst>
+        </pc:spChg>
+        <pc:picChg chg="add del mod">
+          <ac:chgData name="Gabriela Carneiro" userId="038eca41cd8564ab" providerId="LiveId" clId="{D03F746D-BE5D-4789-93E6-42C6E52F57A2}" dt="2026-04-28T19:23:28.086" v="67" actId="478"/>
+          <ac:picMkLst>
+            <pc:docMk/>
+            <pc:sldMk cId="334472207" sldId="256"/>
+            <ac:picMk id="6" creationId="{E9EA455F-004B-8977-4D38-DFA54E3384C7}"/>
+          </ac:picMkLst>
+        </pc:picChg>
+        <pc:picChg chg="add del mod">
+          <ac:chgData name="Gabriela Carneiro" userId="038eca41cd8564ab" providerId="LiveId" clId="{D03F746D-BE5D-4789-93E6-42C6E52F57A2}" dt="2026-04-28T19:28:00.762" v="227" actId="478"/>
+          <ac:picMkLst>
+            <pc:docMk/>
+            <pc:sldMk cId="334472207" sldId="256"/>
+            <ac:picMk id="1026" creationId="{09A4D76B-D106-AD11-D556-99D64ED585DE}"/>
+          </ac:picMkLst>
+        </pc:picChg>
+        <pc:picChg chg="add mod">
+          <ac:chgData name="Gabriela Carneiro" userId="038eca41cd8564ab" providerId="LiveId" clId="{D03F746D-BE5D-4789-93E6-42C6E52F57A2}" dt="2026-04-28T19:29:07.359" v="234" actId="1076"/>
+          <ac:picMkLst>
+            <pc:docMk/>
+            <pc:sldMk cId="334472207" sldId="256"/>
+            <ac:picMk id="1028" creationId="{639F4097-F9F9-7805-5185-50A8AE3A89A3}"/>
+          </ac:picMkLst>
+        </pc:picChg>
+        <pc:cxnChg chg="add del">
+          <ac:chgData name="Gabriela Carneiro" userId="038eca41cd8564ab" providerId="LiveId" clId="{D03F746D-BE5D-4789-93E6-42C6E52F57A2}" dt="2026-04-28T18:54:33.043" v="7" actId="26606"/>
+          <ac:cxnSpMkLst>
+            <pc:docMk/>
+            <pc:sldMk cId="334472207" sldId="256"/>
+            <ac:cxnSpMk id="1033" creationId="{6CA391F1-4B2C-521B-F6A5-52C74B30349D}"/>
+          </ac:cxnSpMkLst>
+        </pc:cxnChg>
+        <pc:cxnChg chg="add del">
+          <ac:chgData name="Gabriela Carneiro" userId="038eca41cd8564ab" providerId="LiveId" clId="{D03F746D-BE5D-4789-93E6-42C6E52F57A2}" dt="2026-04-28T18:54:34.593" v="9" actId="26606"/>
+          <ac:cxnSpMkLst>
+            <pc:docMk/>
+            <pc:sldMk cId="334472207" sldId="256"/>
+            <ac:cxnSpMk id="1036" creationId="{EE2E603F-4A95-4FE8-BB06-211DFD75DBEF}"/>
+          </ac:cxnSpMkLst>
+        </pc:cxnChg>
+        <pc:cxnChg chg="add del">
+          <ac:chgData name="Gabriela Carneiro" userId="038eca41cd8564ab" providerId="LiveId" clId="{D03F746D-BE5D-4789-93E6-42C6E52F57A2}" dt="2026-04-28T19:14:02.978" v="43" actId="26606"/>
+          <ac:cxnSpMkLst>
+            <pc:docMk/>
+            <pc:sldMk cId="334472207" sldId="256"/>
+            <ac:cxnSpMk id="1039" creationId="{6CA391F1-4B2C-521B-F6A5-52C74B30349D}"/>
+          </ac:cxnSpMkLst>
+        </pc:cxnChg>
+        <pc:cxnChg chg="add del">
+          <ac:chgData name="Gabriela Carneiro" userId="038eca41cd8564ab" providerId="LiveId" clId="{D03F746D-BE5D-4789-93E6-42C6E52F57A2}" dt="2026-04-28T19:28:39.910" v="229"/>
+          <ac:cxnSpMkLst>
+            <pc:docMk/>
+            <pc:sldMk cId="334472207" sldId="256"/>
+            <ac:cxnSpMk id="1046" creationId="{59D7B6BE-A4E0-4483-BEC5-493AC3E5D2AD}"/>
+          </ac:cxnSpMkLst>
+        </pc:cxnChg>
+      </pc:sldChg>
+      <pc:sldMasterChg chg="add del addSldLayout delSldLayout">
+        <pc:chgData name="Gabriela Carneiro" userId="038eca41cd8564ab" providerId="LiveId" clId="{D03F746D-BE5D-4789-93E6-42C6E52F57A2}" dt="2026-04-28T18:54:34.652" v="10" actId="26606"/>
+        <pc:sldMasterMkLst>
+          <pc:docMk/>
+          <pc:sldMasterMk cId="4021644389" sldId="2147483660"/>
+        </pc:sldMasterMkLst>
+        <pc:sldLayoutChg chg="add del">
+          <pc:chgData name="Gabriela Carneiro" userId="038eca41cd8564ab" providerId="LiveId" clId="{D03F746D-BE5D-4789-93E6-42C6E52F57A2}" dt="2026-04-28T18:54:34.652" v="10" actId="26606"/>
+          <pc:sldLayoutMkLst>
+            <pc:docMk/>
+            <pc:sldMasterMk cId="4021644389" sldId="2147483660"/>
+            <pc:sldLayoutMk cId="548514467" sldId="2147483661"/>
+          </pc:sldLayoutMkLst>
+        </pc:sldLayoutChg>
+        <pc:sldLayoutChg chg="add del">
+          <pc:chgData name="Gabriela Carneiro" userId="038eca41cd8564ab" providerId="LiveId" clId="{D03F746D-BE5D-4789-93E6-42C6E52F57A2}" dt="2026-04-28T18:54:34.652" v="10" actId="26606"/>
+          <pc:sldLayoutMkLst>
+            <pc:docMk/>
+            <pc:sldMasterMk cId="4021644389" sldId="2147483660"/>
+            <pc:sldLayoutMk cId="1313703108" sldId="2147483662"/>
+          </pc:sldLayoutMkLst>
+        </pc:sldLayoutChg>
+        <pc:sldLayoutChg chg="add del">
+          <pc:chgData name="Gabriela Carneiro" userId="038eca41cd8564ab" providerId="LiveId" clId="{D03F746D-BE5D-4789-93E6-42C6E52F57A2}" dt="2026-04-28T18:54:34.652" v="10" actId="26606"/>
+          <pc:sldLayoutMkLst>
+            <pc:docMk/>
+            <pc:sldMasterMk cId="4021644389" sldId="2147483660"/>
+            <pc:sldLayoutMk cId="2857819802" sldId="2147483663"/>
+          </pc:sldLayoutMkLst>
+        </pc:sldLayoutChg>
+        <pc:sldLayoutChg chg="add del">
+          <pc:chgData name="Gabriela Carneiro" userId="038eca41cd8564ab" providerId="LiveId" clId="{D03F746D-BE5D-4789-93E6-42C6E52F57A2}" dt="2026-04-28T18:54:34.652" v="10" actId="26606"/>
+          <pc:sldLayoutMkLst>
+            <pc:docMk/>
+            <pc:sldMasterMk cId="4021644389" sldId="2147483660"/>
+            <pc:sldLayoutMk cId="1311470768" sldId="2147483664"/>
+          </pc:sldLayoutMkLst>
+        </pc:sldLayoutChg>
+        <pc:sldLayoutChg chg="add del">
+          <pc:chgData name="Gabriela Carneiro" userId="038eca41cd8564ab" providerId="LiveId" clId="{D03F746D-BE5D-4789-93E6-42C6E52F57A2}" dt="2026-04-28T18:54:34.652" v="10" actId="26606"/>
+          <pc:sldLayoutMkLst>
+            <pc:docMk/>
+            <pc:sldMasterMk cId="4021644389" sldId="2147483660"/>
+            <pc:sldLayoutMk cId="2803742040" sldId="2147483665"/>
+          </pc:sldLayoutMkLst>
+        </pc:sldLayoutChg>
+        <pc:sldLayoutChg chg="add del">
+          <pc:chgData name="Gabriela Carneiro" userId="038eca41cd8564ab" providerId="LiveId" clId="{D03F746D-BE5D-4789-93E6-42C6E52F57A2}" dt="2026-04-28T18:54:34.652" v="10" actId="26606"/>
+          <pc:sldLayoutMkLst>
+            <pc:docMk/>
+            <pc:sldMasterMk cId="4021644389" sldId="2147483660"/>
+            <pc:sldLayoutMk cId="2547086471" sldId="2147483666"/>
+          </pc:sldLayoutMkLst>
+        </pc:sldLayoutChg>
+        <pc:sldLayoutChg chg="add del">
+          <pc:chgData name="Gabriela Carneiro" userId="038eca41cd8564ab" providerId="LiveId" clId="{D03F746D-BE5D-4789-93E6-42C6E52F57A2}" dt="2026-04-28T18:54:34.652" v="10" actId="26606"/>
+          <pc:sldLayoutMkLst>
+            <pc:docMk/>
+            <pc:sldMasterMk cId="4021644389" sldId="2147483660"/>
+            <pc:sldLayoutMk cId="4287985583" sldId="2147483667"/>
+          </pc:sldLayoutMkLst>
+        </pc:sldLayoutChg>
+        <pc:sldLayoutChg chg="add del">
+          <pc:chgData name="Gabriela Carneiro" userId="038eca41cd8564ab" providerId="LiveId" clId="{D03F746D-BE5D-4789-93E6-42C6E52F57A2}" dt="2026-04-28T18:54:34.652" v="10" actId="26606"/>
+          <pc:sldLayoutMkLst>
+            <pc:docMk/>
+            <pc:sldMasterMk cId="4021644389" sldId="2147483660"/>
+            <pc:sldLayoutMk cId="1680416906" sldId="2147483668"/>
+          </pc:sldLayoutMkLst>
+        </pc:sldLayoutChg>
+        <pc:sldLayoutChg chg="add del">
+          <pc:chgData name="Gabriela Carneiro" userId="038eca41cd8564ab" providerId="LiveId" clId="{D03F746D-BE5D-4789-93E6-42C6E52F57A2}" dt="2026-04-28T18:54:34.652" v="10" actId="26606"/>
+          <pc:sldLayoutMkLst>
+            <pc:docMk/>
+            <pc:sldMasterMk cId="4021644389" sldId="2147483660"/>
+            <pc:sldLayoutMk cId="3861050607" sldId="2147483669"/>
+          </pc:sldLayoutMkLst>
+        </pc:sldLayoutChg>
+        <pc:sldLayoutChg chg="add del">
+          <pc:chgData name="Gabriela Carneiro" userId="038eca41cd8564ab" providerId="LiveId" clId="{D03F746D-BE5D-4789-93E6-42C6E52F57A2}" dt="2026-04-28T18:54:34.652" v="10" actId="26606"/>
+          <pc:sldLayoutMkLst>
+            <pc:docMk/>
+            <pc:sldMasterMk cId="4021644389" sldId="2147483660"/>
+            <pc:sldLayoutMk cId="1054779706" sldId="2147483670"/>
+          </pc:sldLayoutMkLst>
+        </pc:sldLayoutChg>
+        <pc:sldLayoutChg chg="add del">
+          <pc:chgData name="Gabriela Carneiro" userId="038eca41cd8564ab" providerId="LiveId" clId="{D03F746D-BE5D-4789-93E6-42C6E52F57A2}" dt="2026-04-28T18:54:34.652" v="10" actId="26606"/>
+          <pc:sldLayoutMkLst>
+            <pc:docMk/>
+            <pc:sldMasterMk cId="4021644389" sldId="2147483660"/>
+            <pc:sldLayoutMk cId="3597112691" sldId="2147483671"/>
+          </pc:sldLayoutMkLst>
+        </pc:sldLayoutChg>
+        <pc:sldLayoutChg chg="add del">
+          <pc:chgData name="Gabriela Carneiro" userId="038eca41cd8564ab" providerId="LiveId" clId="{D03F746D-BE5D-4789-93E6-42C6E52F57A2}" dt="2026-04-28T18:54:34.652" v="10" actId="26606"/>
+          <pc:sldLayoutMkLst>
+            <pc:docMk/>
+            <pc:sldMasterMk cId="4021644389" sldId="2147483660"/>
+            <pc:sldLayoutMk cId="698965006" sldId="2147483672"/>
+          </pc:sldLayoutMkLst>
+        </pc:sldLayoutChg>
+        <pc:sldLayoutChg chg="add del">
+          <pc:chgData name="Gabriela Carneiro" userId="038eca41cd8564ab" providerId="LiveId" clId="{D03F746D-BE5D-4789-93E6-42C6E52F57A2}" dt="2026-04-28T18:54:34.652" v="10" actId="26606"/>
+          <pc:sldLayoutMkLst>
+            <pc:docMk/>
+            <pc:sldMasterMk cId="4021644389" sldId="2147483660"/>
+            <pc:sldLayoutMk cId="1537016960" sldId="2147483673"/>
+          </pc:sldLayoutMkLst>
+        </pc:sldLayoutChg>
+        <pc:sldLayoutChg chg="add del">
+          <pc:chgData name="Gabriela Carneiro" userId="038eca41cd8564ab" providerId="LiveId" clId="{D03F746D-BE5D-4789-93E6-42C6E52F57A2}" dt="2026-04-28T18:54:34.652" v="10" actId="26606"/>
+          <pc:sldLayoutMkLst>
+            <pc:docMk/>
+            <pc:sldMasterMk cId="4021644389" sldId="2147483660"/>
+            <pc:sldLayoutMk cId="981951518" sldId="2147483674"/>
+          </pc:sldLayoutMkLst>
+        </pc:sldLayoutChg>
+        <pc:sldLayoutChg chg="add del">
+          <pc:chgData name="Gabriela Carneiro" userId="038eca41cd8564ab" providerId="LiveId" clId="{D03F746D-BE5D-4789-93E6-42C6E52F57A2}" dt="2026-04-28T18:54:34.652" v="10" actId="26606"/>
+          <pc:sldLayoutMkLst>
+            <pc:docMk/>
+            <pc:sldMasterMk cId="4021644389" sldId="2147483660"/>
+            <pc:sldLayoutMk cId="160206595" sldId="2147483675"/>
+          </pc:sldLayoutMkLst>
+        </pc:sldLayoutChg>
+        <pc:sldLayoutChg chg="add del">
+          <pc:chgData name="Gabriela Carneiro" userId="038eca41cd8564ab" providerId="LiveId" clId="{D03F746D-BE5D-4789-93E6-42C6E52F57A2}" dt="2026-04-28T18:54:34.652" v="10" actId="26606"/>
+          <pc:sldLayoutMkLst>
+            <pc:docMk/>
+            <pc:sldMasterMk cId="4021644389" sldId="2147483660"/>
+            <pc:sldLayoutMk cId="1620018748" sldId="2147483676"/>
+          </pc:sldLayoutMkLst>
+        </pc:sldLayoutChg>
+      </pc:sldMasterChg>
+      <pc:sldMasterChg chg="add del replId addSldLayout delSldLayout">
+        <pc:chgData name="Gabriela Carneiro" userId="038eca41cd8564ab" providerId="LiveId" clId="{D03F746D-BE5D-4789-93E6-42C6E52F57A2}" dt="2026-04-28T18:54:33.043" v="7" actId="26606"/>
+        <pc:sldMasterMkLst>
+          <pc:docMk/>
+          <pc:sldMasterMk cId="1706574332" sldId="2147483677"/>
+        </pc:sldMasterMkLst>
+        <pc:sldLayoutChg chg="add del replId">
+          <pc:chgData name="Gabriela Carneiro" userId="038eca41cd8564ab" providerId="LiveId" clId="{D03F746D-BE5D-4789-93E6-42C6E52F57A2}" dt="2026-04-28T18:54:33.043" v="7" actId="26606"/>
+          <pc:sldLayoutMkLst>
+            <pc:docMk/>
+            <pc:sldMasterMk cId="1706574332" sldId="2147483677"/>
+            <pc:sldLayoutMk cId="4169075916" sldId="2147483678"/>
+          </pc:sldLayoutMkLst>
+        </pc:sldLayoutChg>
+        <pc:sldLayoutChg chg="add del replId">
+          <pc:chgData name="Gabriela Carneiro" userId="038eca41cd8564ab" providerId="LiveId" clId="{D03F746D-BE5D-4789-93E6-42C6E52F57A2}" dt="2026-04-28T18:54:33.043" v="7" actId="26606"/>
+          <pc:sldLayoutMkLst>
+            <pc:docMk/>
+            <pc:sldMasterMk cId="1706574332" sldId="2147483677"/>
+            <pc:sldLayoutMk cId="3971105433" sldId="2147483679"/>
+          </pc:sldLayoutMkLst>
+        </pc:sldLayoutChg>
+        <pc:sldLayoutChg chg="add del replId">
+          <pc:chgData name="Gabriela Carneiro" userId="038eca41cd8564ab" providerId="LiveId" clId="{D03F746D-BE5D-4789-93E6-42C6E52F57A2}" dt="2026-04-28T18:54:33.043" v="7" actId="26606"/>
+          <pc:sldLayoutMkLst>
+            <pc:docMk/>
+            <pc:sldMasterMk cId="1706574332" sldId="2147483677"/>
+            <pc:sldLayoutMk cId="2809624590" sldId="2147483680"/>
+          </pc:sldLayoutMkLst>
+        </pc:sldLayoutChg>
+        <pc:sldLayoutChg chg="add del replId">
+          <pc:chgData name="Gabriela Carneiro" userId="038eca41cd8564ab" providerId="LiveId" clId="{D03F746D-BE5D-4789-93E6-42C6E52F57A2}" dt="2026-04-28T18:54:33.043" v="7" actId="26606"/>
+          <pc:sldLayoutMkLst>
+            <pc:docMk/>
+            <pc:sldMasterMk cId="1706574332" sldId="2147483677"/>
+            <pc:sldLayoutMk cId="46483895" sldId="2147483681"/>
+          </pc:sldLayoutMkLst>
+        </pc:sldLayoutChg>
+        <pc:sldLayoutChg chg="add del replId">
+          <pc:chgData name="Gabriela Carneiro" userId="038eca41cd8564ab" providerId="LiveId" clId="{D03F746D-BE5D-4789-93E6-42C6E52F57A2}" dt="2026-04-28T18:54:33.043" v="7" actId="26606"/>
+          <pc:sldLayoutMkLst>
+            <pc:docMk/>
+            <pc:sldMasterMk cId="1706574332" sldId="2147483677"/>
+            <pc:sldLayoutMk cId="1032196476" sldId="2147483682"/>
+          </pc:sldLayoutMkLst>
+        </pc:sldLayoutChg>
+        <pc:sldLayoutChg chg="add del replId">
+          <pc:chgData name="Gabriela Carneiro" userId="038eca41cd8564ab" providerId="LiveId" clId="{D03F746D-BE5D-4789-93E6-42C6E52F57A2}" dt="2026-04-28T18:54:33.043" v="7" actId="26606"/>
+          <pc:sldLayoutMkLst>
+            <pc:docMk/>
+            <pc:sldMasterMk cId="1706574332" sldId="2147483677"/>
+            <pc:sldLayoutMk cId="1147285346" sldId="2147483683"/>
+          </pc:sldLayoutMkLst>
+        </pc:sldLayoutChg>
+        <pc:sldLayoutChg chg="add del replId">
+          <pc:chgData name="Gabriela Carneiro" userId="038eca41cd8564ab" providerId="LiveId" clId="{D03F746D-BE5D-4789-93E6-42C6E52F57A2}" dt="2026-04-28T18:54:33.043" v="7" actId="26606"/>
+          <pc:sldLayoutMkLst>
+            <pc:docMk/>
+            <pc:sldMasterMk cId="1706574332" sldId="2147483677"/>
+            <pc:sldLayoutMk cId="356839949" sldId="2147483684"/>
+          </pc:sldLayoutMkLst>
+        </pc:sldLayoutChg>
+        <pc:sldLayoutChg chg="add del replId">
+          <pc:chgData name="Gabriela Carneiro" userId="038eca41cd8564ab" providerId="LiveId" clId="{D03F746D-BE5D-4789-93E6-42C6E52F57A2}" dt="2026-04-28T18:54:33.043" v="7" actId="26606"/>
+          <pc:sldLayoutMkLst>
+            <pc:docMk/>
+            <pc:sldMasterMk cId="1706574332" sldId="2147483677"/>
+            <pc:sldLayoutMk cId="2141797413" sldId="2147483685"/>
+          </pc:sldLayoutMkLst>
+        </pc:sldLayoutChg>
+        <pc:sldLayoutChg chg="add del replId">
+          <pc:chgData name="Gabriela Carneiro" userId="038eca41cd8564ab" providerId="LiveId" clId="{D03F746D-BE5D-4789-93E6-42C6E52F57A2}" dt="2026-04-28T18:54:33.043" v="7" actId="26606"/>
+          <pc:sldLayoutMkLst>
+            <pc:docMk/>
+            <pc:sldMasterMk cId="1706574332" sldId="2147483677"/>
+            <pc:sldLayoutMk cId="3203792654" sldId="2147483686"/>
+          </pc:sldLayoutMkLst>
+        </pc:sldLayoutChg>
+        <pc:sldLayoutChg chg="add del replId">
+          <pc:chgData name="Gabriela Carneiro" userId="038eca41cd8564ab" providerId="LiveId" clId="{D03F746D-BE5D-4789-93E6-42C6E52F57A2}" dt="2026-04-28T18:54:33.043" v="7" actId="26606"/>
+          <pc:sldLayoutMkLst>
+            <pc:docMk/>
+            <pc:sldMasterMk cId="1706574332" sldId="2147483677"/>
+            <pc:sldLayoutMk cId="4255237317" sldId="2147483687"/>
+          </pc:sldLayoutMkLst>
+        </pc:sldLayoutChg>
+        <pc:sldLayoutChg chg="add del replId">
+          <pc:chgData name="Gabriela Carneiro" userId="038eca41cd8564ab" providerId="LiveId" clId="{D03F746D-BE5D-4789-93E6-42C6E52F57A2}" dt="2026-04-28T18:54:33.043" v="7" actId="26606"/>
+          <pc:sldLayoutMkLst>
+            <pc:docMk/>
+            <pc:sldMasterMk cId="1706574332" sldId="2147483677"/>
+            <pc:sldLayoutMk cId="1776009374" sldId="2147483688"/>
+          </pc:sldLayoutMkLst>
+        </pc:sldLayoutChg>
+      </pc:sldMasterChg>
+      <pc:sldMasterChg chg="add replId addSldLayout">
+        <pc:chgData name="Gabriela Carneiro" userId="038eca41cd8564ab" providerId="LiveId" clId="{D03F746D-BE5D-4789-93E6-42C6E52F57A2}" dt="2026-04-28T18:54:34.652" v="10" actId="26606"/>
+        <pc:sldMasterMkLst>
+          <pc:docMk/>
+          <pc:sldMasterMk cId="1706574332" sldId="2147483677"/>
+        </pc:sldMasterMkLst>
+        <pc:sldLayoutChg chg="add replId">
+          <pc:chgData name="Gabriela Carneiro" userId="038eca41cd8564ab" providerId="LiveId" clId="{D03F746D-BE5D-4789-93E6-42C6E52F57A2}" dt="2026-04-28T18:54:34.652" v="10" actId="26606"/>
+          <pc:sldLayoutMkLst>
+            <pc:docMk/>
+            <pc:sldMasterMk cId="1706574332" sldId="2147483677"/>
+            <pc:sldLayoutMk cId="4169075916" sldId="2147483678"/>
+          </pc:sldLayoutMkLst>
+        </pc:sldLayoutChg>
+        <pc:sldLayoutChg chg="add replId">
+          <pc:chgData name="Gabriela Carneiro" userId="038eca41cd8564ab" providerId="LiveId" clId="{D03F746D-BE5D-4789-93E6-42C6E52F57A2}" dt="2026-04-28T18:54:34.652" v="10" actId="26606"/>
+          <pc:sldLayoutMkLst>
+            <pc:docMk/>
+            <pc:sldMasterMk cId="1706574332" sldId="2147483677"/>
+            <pc:sldLayoutMk cId="3971105433" sldId="2147483679"/>
+          </pc:sldLayoutMkLst>
+        </pc:sldLayoutChg>
+        <pc:sldLayoutChg chg="add replId">
+          <pc:chgData name="Gabriela Carneiro" userId="038eca41cd8564ab" providerId="LiveId" clId="{D03F746D-BE5D-4789-93E6-42C6E52F57A2}" dt="2026-04-28T18:54:34.652" v="10" actId="26606"/>
+          <pc:sldLayoutMkLst>
+            <pc:docMk/>
+            <pc:sldMasterMk cId="1706574332" sldId="2147483677"/>
+            <pc:sldLayoutMk cId="2809624590" sldId="2147483680"/>
+          </pc:sldLayoutMkLst>
+        </pc:sldLayoutChg>
+        <pc:sldLayoutChg chg="add replId">
+          <pc:chgData name="Gabriela Carneiro" userId="038eca41cd8564ab" providerId="LiveId" clId="{D03F746D-BE5D-4789-93E6-42C6E52F57A2}" dt="2026-04-28T18:54:34.652" v="10" actId="26606"/>
+          <pc:sldLayoutMkLst>
+            <pc:docMk/>
+            <pc:sldMasterMk cId="1706574332" sldId="2147483677"/>
+            <pc:sldLayoutMk cId="46483895" sldId="2147483681"/>
+          </pc:sldLayoutMkLst>
+        </pc:sldLayoutChg>
+        <pc:sldLayoutChg chg="add replId">
+          <pc:chgData name="Gabriela Carneiro" userId="038eca41cd8564ab" providerId="LiveId" clId="{D03F746D-BE5D-4789-93E6-42C6E52F57A2}" dt="2026-04-28T18:54:34.652" v="10" actId="26606"/>
+          <pc:sldLayoutMkLst>
+            <pc:docMk/>
+            <pc:sldMasterMk cId="1706574332" sldId="2147483677"/>
+            <pc:sldLayoutMk cId="1032196476" sldId="2147483682"/>
+          </pc:sldLayoutMkLst>
+        </pc:sldLayoutChg>
+        <pc:sldLayoutChg chg="add replId">
+          <pc:chgData name="Gabriela Carneiro" userId="038eca41cd8564ab" providerId="LiveId" clId="{D03F746D-BE5D-4789-93E6-42C6E52F57A2}" dt="2026-04-28T18:54:34.652" v="10" actId="26606"/>
+          <pc:sldLayoutMkLst>
+            <pc:docMk/>
+            <pc:sldMasterMk cId="1706574332" sldId="2147483677"/>
+            <pc:sldLayoutMk cId="1147285346" sldId="2147483683"/>
+          </pc:sldLayoutMkLst>
+        </pc:sldLayoutChg>
+        <pc:sldLayoutChg chg="add replId">
+          <pc:chgData name="Gabriela Carneiro" userId="038eca41cd8564ab" providerId="LiveId" clId="{D03F746D-BE5D-4789-93E6-42C6E52F57A2}" dt="2026-04-28T18:54:34.652" v="10" actId="26606"/>
+          <pc:sldLayoutMkLst>
+            <pc:docMk/>
+            <pc:sldMasterMk cId="1706574332" sldId="2147483677"/>
+            <pc:sldLayoutMk cId="356839949" sldId="2147483684"/>
+          </pc:sldLayoutMkLst>
+        </pc:sldLayoutChg>
+        <pc:sldLayoutChg chg="add replId">
+          <pc:chgData name="Gabriela Carneiro" userId="038eca41cd8564ab" providerId="LiveId" clId="{D03F746D-BE5D-4789-93E6-42C6E52F57A2}" dt="2026-04-28T18:54:34.652" v="10" actId="26606"/>
+          <pc:sldLayoutMkLst>
+            <pc:docMk/>
+            <pc:sldMasterMk cId="1706574332" sldId="2147483677"/>
+            <pc:sldLayoutMk cId="2141797413" sldId="2147483685"/>
+          </pc:sldLayoutMkLst>
+        </pc:sldLayoutChg>
+        <pc:sldLayoutChg chg="add replId">
+          <pc:chgData name="Gabriela Carneiro" userId="038eca41cd8564ab" providerId="LiveId" clId="{D03F746D-BE5D-4789-93E6-42C6E52F57A2}" dt="2026-04-28T18:54:34.652" v="10" actId="26606"/>
+          <pc:sldLayoutMkLst>
+            <pc:docMk/>
+            <pc:sldMasterMk cId="1706574332" sldId="2147483677"/>
+            <pc:sldLayoutMk cId="3203792654" sldId="2147483686"/>
+          </pc:sldLayoutMkLst>
+        </pc:sldLayoutChg>
+        <pc:sldLayoutChg chg="add replId">
+          <pc:chgData name="Gabriela Carneiro" userId="038eca41cd8564ab" providerId="LiveId" clId="{D03F746D-BE5D-4789-93E6-42C6E52F57A2}" dt="2026-04-28T18:54:34.652" v="10" actId="26606"/>
+          <pc:sldLayoutMkLst>
+            <pc:docMk/>
+            <pc:sldMasterMk cId="1706574332" sldId="2147483677"/>
+            <pc:sldLayoutMk cId="4255237317" sldId="2147483687"/>
+          </pc:sldLayoutMkLst>
+        </pc:sldLayoutChg>
+        <pc:sldLayoutChg chg="add replId">
+          <pc:chgData name="Gabriela Carneiro" userId="038eca41cd8564ab" providerId="LiveId" clId="{D03F746D-BE5D-4789-93E6-42C6E52F57A2}" dt="2026-04-28T18:54:34.652" v="10" actId="26606"/>
+          <pc:sldLayoutMkLst>
+            <pc:docMk/>
+            <pc:sldMasterMk cId="1706574332" sldId="2147483677"/>
+            <pc:sldLayoutMk cId="1776009374" sldId="2147483688"/>
+          </pc:sldLayoutMkLst>
+        </pc:sldLayoutChg>
+      </pc:sldMasterChg>
+      <pc:sldMasterChg chg="add del addSldLayout delSldLayout">
+        <pc:chgData name="Gabriela Carneiro" userId="038eca41cd8564ab" providerId="LiveId" clId="{D03F746D-BE5D-4789-93E6-42C6E52F57A2}" dt="2026-04-28T18:54:34.593" v="9" actId="26606"/>
+        <pc:sldMasterMkLst>
+          <pc:docMk/>
+          <pc:sldMasterMk cId="2612624701" sldId="2147483685"/>
+        </pc:sldMasterMkLst>
+        <pc:sldLayoutChg chg="add del">
+          <pc:chgData name="Gabriela Carneiro" userId="038eca41cd8564ab" providerId="LiveId" clId="{D03F746D-BE5D-4789-93E6-42C6E52F57A2}" dt="2026-04-28T18:54:34.593" v="9" actId="26606"/>
+          <pc:sldLayoutMkLst>
+            <pc:docMk/>
+            <pc:sldMasterMk cId="2612624701" sldId="2147483685"/>
+            <pc:sldLayoutMk cId="947022627" sldId="2147483677"/>
+          </pc:sldLayoutMkLst>
+        </pc:sldLayoutChg>
+        <pc:sldLayoutChg chg="add del">
+          <pc:chgData name="Gabriela Carneiro" userId="038eca41cd8564ab" providerId="LiveId" clId="{D03F746D-BE5D-4789-93E6-42C6E52F57A2}" dt="2026-04-28T18:54:34.593" v="9" actId="26606"/>
+          <pc:sldLayoutMkLst>
+            <pc:docMk/>
+            <pc:sldMasterMk cId="2612624701" sldId="2147483685"/>
+            <pc:sldLayoutMk cId="4227451452" sldId="2147483678"/>
+          </pc:sldLayoutMkLst>
+        </pc:sldLayoutChg>
+        <pc:sldLayoutChg chg="add del">
+          <pc:chgData name="Gabriela Carneiro" userId="038eca41cd8564ab" providerId="LiveId" clId="{D03F746D-BE5D-4789-93E6-42C6E52F57A2}" dt="2026-04-28T18:54:34.593" v="9" actId="26606"/>
+          <pc:sldLayoutMkLst>
+            <pc:docMk/>
+            <pc:sldMasterMk cId="2612624701" sldId="2147483685"/>
+            <pc:sldLayoutMk cId="4137083926" sldId="2147483679"/>
+          </pc:sldLayoutMkLst>
+        </pc:sldLayoutChg>
+        <pc:sldLayoutChg chg="add del">
+          <pc:chgData name="Gabriela Carneiro" userId="038eca41cd8564ab" providerId="LiveId" clId="{D03F746D-BE5D-4789-93E6-42C6E52F57A2}" dt="2026-04-28T18:54:34.593" v="9" actId="26606"/>
+          <pc:sldLayoutMkLst>
+            <pc:docMk/>
+            <pc:sldMasterMk cId="2612624701" sldId="2147483685"/>
+            <pc:sldLayoutMk cId="2429139238" sldId="2147483680"/>
+          </pc:sldLayoutMkLst>
+        </pc:sldLayoutChg>
+        <pc:sldLayoutChg chg="add del">
+          <pc:chgData name="Gabriela Carneiro" userId="038eca41cd8564ab" providerId="LiveId" clId="{D03F746D-BE5D-4789-93E6-42C6E52F57A2}" dt="2026-04-28T18:54:34.593" v="9" actId="26606"/>
+          <pc:sldLayoutMkLst>
+            <pc:docMk/>
+            <pc:sldMasterMk cId="2612624701" sldId="2147483685"/>
+            <pc:sldLayoutMk cId="2032380608" sldId="2147483681"/>
+          </pc:sldLayoutMkLst>
+        </pc:sldLayoutChg>
+        <pc:sldLayoutChg chg="add del">
+          <pc:chgData name="Gabriela Carneiro" userId="038eca41cd8564ab" providerId="LiveId" clId="{D03F746D-BE5D-4789-93E6-42C6E52F57A2}" dt="2026-04-28T18:54:34.593" v="9" actId="26606"/>
+          <pc:sldLayoutMkLst>
+            <pc:docMk/>
+            <pc:sldMasterMk cId="2612624701" sldId="2147483685"/>
+            <pc:sldLayoutMk cId="2027858850" sldId="2147483682"/>
+          </pc:sldLayoutMkLst>
+        </pc:sldLayoutChg>
+        <pc:sldLayoutChg chg="add del">
+          <pc:chgData name="Gabriela Carneiro" userId="038eca41cd8564ab" providerId="LiveId" clId="{D03F746D-BE5D-4789-93E6-42C6E52F57A2}" dt="2026-04-28T18:54:34.593" v="9" actId="26606"/>
+          <pc:sldLayoutMkLst>
+            <pc:docMk/>
+            <pc:sldMasterMk cId="2612624701" sldId="2147483685"/>
+            <pc:sldLayoutMk cId="858544717" sldId="2147483683"/>
+          </pc:sldLayoutMkLst>
+        </pc:sldLayoutChg>
+        <pc:sldLayoutChg chg="add del">
+          <pc:chgData name="Gabriela Carneiro" userId="038eca41cd8564ab" providerId="LiveId" clId="{D03F746D-BE5D-4789-93E6-42C6E52F57A2}" dt="2026-04-28T18:54:34.593" v="9" actId="26606"/>
+          <pc:sldLayoutMkLst>
+            <pc:docMk/>
+            <pc:sldMasterMk cId="2612624701" sldId="2147483685"/>
+            <pc:sldLayoutMk cId="1956618825" sldId="2147483684"/>
+          </pc:sldLayoutMkLst>
+        </pc:sldLayoutChg>
+        <pc:sldLayoutChg chg="add del replId">
+          <pc:chgData name="Gabriela Carneiro" userId="038eca41cd8564ab" providerId="LiveId" clId="{D03F746D-BE5D-4789-93E6-42C6E52F57A2}" dt="2026-04-28T18:54:34.593" v="9" actId="26606"/>
+          <pc:sldLayoutMkLst>
+            <pc:docMk/>
+            <pc:sldMasterMk cId="2612624701" sldId="2147483685"/>
+            <pc:sldLayoutMk cId="2213592134" sldId="2147483686"/>
+          </pc:sldLayoutMkLst>
+        </pc:sldLayoutChg>
+        <pc:sldLayoutChg chg="add del replId">
+          <pc:chgData name="Gabriela Carneiro" userId="038eca41cd8564ab" providerId="LiveId" clId="{D03F746D-BE5D-4789-93E6-42C6E52F57A2}" dt="2026-04-28T18:54:34.593" v="9" actId="26606"/>
+          <pc:sldLayoutMkLst>
+            <pc:docMk/>
+            <pc:sldMasterMk cId="2612624701" sldId="2147483685"/>
+            <pc:sldLayoutMk cId="959423476" sldId="2147483687"/>
+          </pc:sldLayoutMkLst>
+        </pc:sldLayoutChg>
+        <pc:sldLayoutChg chg="add del replId">
+          <pc:chgData name="Gabriela Carneiro" userId="038eca41cd8564ab" providerId="LiveId" clId="{D03F746D-BE5D-4789-93E6-42C6E52F57A2}" dt="2026-04-28T18:54:34.593" v="9" actId="26606"/>
+          <pc:sldLayoutMkLst>
+            <pc:docMk/>
+            <pc:sldMasterMk cId="2612624701" sldId="2147483685"/>
+            <pc:sldLayoutMk cId="1594883182" sldId="2147483688"/>
+          </pc:sldLayoutMkLst>
+        </pc:sldLayoutChg>
+      </pc:sldMasterChg>
+    </pc:docChg>
+  </pc:docChgLst>
+</pc:chgInfo>
+</file>
+
 <file path=ppt/slideLayouts/slideLayout1.xml><?xml version="1.0" encoding="utf-8"?>
 <p:sldLayout xmlns:a="http://schemas.openxmlformats.org/drawingml/2006/main" xmlns:r="http://schemas.openxmlformats.org/officeDocument/2006/relationships" xmlns:p="http://schemas.openxmlformats.org/presentationml/2006/main" type="title" preserve="1">
   <p:cSld name="Diapositivo de Título">
@@ -129,7 +706,7 @@
           <p:cNvPr id="2" name="Título 1">
             <a:extLst>
               <a:ext uri="{FF2B5EF4-FFF2-40B4-BE49-F238E27FC236}">
-                <a16:creationId xmlns:a16="http://schemas.microsoft.com/office/drawing/2014/main" id="{87E57953-2B8F-BB10-7347-C403611E8DA1}"/>
+                <a16:creationId xmlns:a16="http://schemas.microsoft.com/office/drawing/2014/main" id="{E9935A74-1FA6-7377-4BBB-B65FCDBB6370}"/>
               </a:ext>
             </a:extLst>
           </p:cNvPr>
@@ -166,7 +743,7 @@
           <p:cNvPr id="3" name="Subtítulo 2">
             <a:extLst>
               <a:ext uri="{FF2B5EF4-FFF2-40B4-BE49-F238E27FC236}">
-                <a16:creationId xmlns:a16="http://schemas.microsoft.com/office/drawing/2014/main" id="{72364709-A133-FDFE-227E-E3FE791A56F6}"/>
+                <a16:creationId xmlns:a16="http://schemas.microsoft.com/office/drawing/2014/main" id="{0B73098C-681C-48ED-C740-DE47486301B2}"/>
               </a:ext>
             </a:extLst>
           </p:cNvPr>
@@ -236,7 +813,7 @@
           <p:cNvPr id="4" name="Marcador de Posição da Data 3">
             <a:extLst>
               <a:ext uri="{FF2B5EF4-FFF2-40B4-BE49-F238E27FC236}">
-                <a16:creationId xmlns:a16="http://schemas.microsoft.com/office/drawing/2014/main" id="{89A98DFC-BE5A-FD53-B712-9A9C052DB500}"/>
+                <a16:creationId xmlns:a16="http://schemas.microsoft.com/office/drawing/2014/main" id="{14A7D739-EDDF-F81D-1EBB-4AED49A047D9}"/>
               </a:ext>
             </a:extLst>
           </p:cNvPr>
@@ -252,11 +829,11 @@
           <a:bodyPr/>
           <a:lstStyle/>
           <a:p>
-            <a:fld id="{A4392FC1-78AF-49F0-9C11-9F240922D893}" type="datetimeFigureOut">
-              <a:rPr lang="pt-PT" smtClean="0"/>
-              <a:t>28/04/2026</a:t>
+            <a:fld id="{7DA38F49-B3E2-4BF0-BEC7-C30D34ABBB8D}" type="datetime1">
+              <a:rPr lang="en-US" smtClean="0"/>
+              <a:t>4/28/2026</a:t>
             </a:fld>
-            <a:endParaRPr lang="pt-PT"/>
+            <a:endParaRPr lang="en-US"/>
           </a:p>
         </p:txBody>
       </p:sp>
@@ -265,7 +842,7 @@
           <p:cNvPr id="5" name="Marcador de Posição do Rodapé 4">
             <a:extLst>
               <a:ext uri="{FF2B5EF4-FFF2-40B4-BE49-F238E27FC236}">
-                <a16:creationId xmlns:a16="http://schemas.microsoft.com/office/drawing/2014/main" id="{70520983-D9A7-15B7-9470-FB5E58F35ED0}"/>
+                <a16:creationId xmlns:a16="http://schemas.microsoft.com/office/drawing/2014/main" id="{81536BAC-E1F2-374D-26C0-D0542EEA8AC2}"/>
               </a:ext>
             </a:extLst>
           </p:cNvPr>
@@ -281,7 +858,7 @@
           <a:bodyPr/>
           <a:lstStyle/>
           <a:p>
-            <a:endParaRPr lang="pt-PT"/>
+            <a:endParaRPr lang="en-US" dirty="0"/>
           </a:p>
         </p:txBody>
       </p:sp>
@@ -290,7 +867,7 @@
           <p:cNvPr id="6" name="Marcador de Posição do Número do Diapositivo 5">
             <a:extLst>
               <a:ext uri="{FF2B5EF4-FFF2-40B4-BE49-F238E27FC236}">
-                <a16:creationId xmlns:a16="http://schemas.microsoft.com/office/drawing/2014/main" id="{8E12A46F-7C06-CC11-D399-7471A6680BCF}"/>
+                <a16:creationId xmlns:a16="http://schemas.microsoft.com/office/drawing/2014/main" id="{6FB37245-8304-931A-C8AB-FDFE6B73A58B}"/>
               </a:ext>
             </a:extLst>
           </p:cNvPr>
@@ -306,24 +883,25 @@
           <a:bodyPr/>
           <a:lstStyle/>
           <a:p>
-            <a:fld id="{E380EDD8-04CB-40D0-ACE7-096DF763EA4B}" type="slidenum">
-              <a:rPr lang="pt-PT" smtClean="0"/>
+            <a:fld id="{70C12960-6E85-460F-B6E3-5B82CB31AF3D}" type="slidenum">
+              <a:rPr lang="en-US" smtClean="0"/>
               <a:t>‹nº›</a:t>
             </a:fld>
-            <a:endParaRPr lang="pt-PT"/>
+            <a:endParaRPr lang="en-US"/>
           </a:p>
         </p:txBody>
       </p:sp>
     </p:spTree>
     <p:extLst>
       <p:ext uri="{BB962C8B-B14F-4D97-AF65-F5344CB8AC3E}">
-        <p14:creationId xmlns:p14="http://schemas.microsoft.com/office/powerpoint/2010/main" val="1057383201"/>
+        <p14:creationId xmlns:p14="http://schemas.microsoft.com/office/powerpoint/2010/main" val="372468246"/>
       </p:ext>
     </p:extLst>
   </p:cSld>
   <p:clrMapOvr>
     <a:masterClrMapping/>
   </p:clrMapOvr>
+  <p:hf sldNum="0" hdr="0" ftr="0" dt="0"/>
 </p:sldLayout>
 </file>
 
@@ -349,7 +927,7 @@
           <p:cNvPr id="2" name="Título 1">
             <a:extLst>
               <a:ext uri="{FF2B5EF4-FFF2-40B4-BE49-F238E27FC236}">
-                <a16:creationId xmlns:a16="http://schemas.microsoft.com/office/drawing/2014/main" id="{F5A1FBAE-CFE4-5DCE-03EF-B22E5A186925}"/>
+                <a16:creationId xmlns:a16="http://schemas.microsoft.com/office/drawing/2014/main" id="{CCE76194-CA9B-5D98-CBD6-FD0F48935B5C}"/>
               </a:ext>
             </a:extLst>
           </p:cNvPr>
@@ -377,7 +955,7 @@
           <p:cNvPr id="3" name="Marcador de Posição de Texto Vertical 2">
             <a:extLst>
               <a:ext uri="{FF2B5EF4-FFF2-40B4-BE49-F238E27FC236}">
-                <a16:creationId xmlns:a16="http://schemas.microsoft.com/office/drawing/2014/main" id="{C04A5D9D-5FA5-7FD6-A9DA-8D0FA6A95917}"/>
+                <a16:creationId xmlns:a16="http://schemas.microsoft.com/office/drawing/2014/main" id="{5363C5DC-EDC1-D665-11CE-BF199B6BB4D1}"/>
               </a:ext>
             </a:extLst>
           </p:cNvPr>
@@ -434,7 +1012,7 @@
           <p:cNvPr id="4" name="Marcador de Posição da Data 3">
             <a:extLst>
               <a:ext uri="{FF2B5EF4-FFF2-40B4-BE49-F238E27FC236}">
-                <a16:creationId xmlns:a16="http://schemas.microsoft.com/office/drawing/2014/main" id="{8D274280-AD6E-9183-C9FB-90760CFD6B99}"/>
+                <a16:creationId xmlns:a16="http://schemas.microsoft.com/office/drawing/2014/main" id="{65C7B060-F0C8-B14F-0D4C-F571FEB4D8DD}"/>
               </a:ext>
             </a:extLst>
           </p:cNvPr>
@@ -450,11 +1028,11 @@
           <a:bodyPr/>
           <a:lstStyle/>
           <a:p>
-            <a:fld id="{A4392FC1-78AF-49F0-9C11-9F240922D893}" type="datetimeFigureOut">
-              <a:rPr lang="pt-PT" smtClean="0"/>
-              <a:t>28/04/2026</a:t>
+            <a:fld id="{7DA38F49-B3E2-4BF0-BEC7-C30D34ABBB8D}" type="datetime1">
+              <a:rPr lang="en-US" smtClean="0"/>
+              <a:t>4/28/2026</a:t>
             </a:fld>
-            <a:endParaRPr lang="pt-PT"/>
+            <a:endParaRPr lang="en-US"/>
           </a:p>
         </p:txBody>
       </p:sp>
@@ -463,7 +1041,7 @@
           <p:cNvPr id="5" name="Marcador de Posição do Rodapé 4">
             <a:extLst>
               <a:ext uri="{FF2B5EF4-FFF2-40B4-BE49-F238E27FC236}">
-                <a16:creationId xmlns:a16="http://schemas.microsoft.com/office/drawing/2014/main" id="{F32568AC-7ABE-23D7-AED3-2422DA2BB07B}"/>
+                <a16:creationId xmlns:a16="http://schemas.microsoft.com/office/drawing/2014/main" id="{DB05A6F8-B7F2-D08B-DC02-9EA99CAB7DD5}"/>
               </a:ext>
             </a:extLst>
           </p:cNvPr>
@@ -479,7 +1057,7 @@
           <a:bodyPr/>
           <a:lstStyle/>
           <a:p>
-            <a:endParaRPr lang="pt-PT"/>
+            <a:endParaRPr lang="en-US" dirty="0"/>
           </a:p>
         </p:txBody>
       </p:sp>
@@ -488,7 +1066,7 @@
           <p:cNvPr id="6" name="Marcador de Posição do Número do Diapositivo 5">
             <a:extLst>
               <a:ext uri="{FF2B5EF4-FFF2-40B4-BE49-F238E27FC236}">
-                <a16:creationId xmlns:a16="http://schemas.microsoft.com/office/drawing/2014/main" id="{0AF00D0A-D1AA-D52C-D444-E4A01C8A245D}"/>
+                <a16:creationId xmlns:a16="http://schemas.microsoft.com/office/drawing/2014/main" id="{7B68C097-9434-5A8D-9D61-324BDC3073FA}"/>
               </a:ext>
             </a:extLst>
           </p:cNvPr>
@@ -504,24 +1082,25 @@
           <a:bodyPr/>
           <a:lstStyle/>
           <a:p>
-            <a:fld id="{E380EDD8-04CB-40D0-ACE7-096DF763EA4B}" type="slidenum">
-              <a:rPr lang="pt-PT" smtClean="0"/>
+            <a:fld id="{70C12960-6E85-460F-B6E3-5B82CB31AF3D}" type="slidenum">
+              <a:rPr lang="en-US" smtClean="0"/>
               <a:t>‹nº›</a:t>
             </a:fld>
-            <a:endParaRPr lang="pt-PT"/>
+            <a:endParaRPr lang="en-US"/>
           </a:p>
         </p:txBody>
       </p:sp>
     </p:spTree>
     <p:extLst>
       <p:ext uri="{BB962C8B-B14F-4D97-AF65-F5344CB8AC3E}">
-        <p14:creationId xmlns:p14="http://schemas.microsoft.com/office/powerpoint/2010/main" val="2461498799"/>
+        <p14:creationId xmlns:p14="http://schemas.microsoft.com/office/powerpoint/2010/main" val="221637969"/>
       </p:ext>
     </p:extLst>
   </p:cSld>
   <p:clrMapOvr>
     <a:masterClrMapping/>
   </p:clrMapOvr>
+  <p:hf sldNum="0" hdr="0" ftr="0" dt="0"/>
 </p:sldLayout>
 </file>
 
@@ -547,7 +1126,7 @@
           <p:cNvPr id="2" name="Título Vertical 1">
             <a:extLst>
               <a:ext uri="{FF2B5EF4-FFF2-40B4-BE49-F238E27FC236}">
-                <a16:creationId xmlns:a16="http://schemas.microsoft.com/office/drawing/2014/main" id="{76684850-68FE-D2E7-6CD0-8682EFF37012}"/>
+                <a16:creationId xmlns:a16="http://schemas.microsoft.com/office/drawing/2014/main" id="{C8412112-B405-820A-2385-A72388B76C07}"/>
               </a:ext>
             </a:extLst>
           </p:cNvPr>
@@ -580,7 +1159,7 @@
           <p:cNvPr id="3" name="Marcador de Posição de Texto Vertical 2">
             <a:extLst>
               <a:ext uri="{FF2B5EF4-FFF2-40B4-BE49-F238E27FC236}">
-                <a16:creationId xmlns:a16="http://schemas.microsoft.com/office/drawing/2014/main" id="{F3F06647-52A3-FEBB-0F54-C088B7EF100A}"/>
+                <a16:creationId xmlns:a16="http://schemas.microsoft.com/office/drawing/2014/main" id="{DDC378BF-43C8-F6EF-C4F5-A17533FE4F12}"/>
               </a:ext>
             </a:extLst>
           </p:cNvPr>
@@ -642,7 +1221,7 @@
           <p:cNvPr id="4" name="Marcador de Posição da Data 3">
             <a:extLst>
               <a:ext uri="{FF2B5EF4-FFF2-40B4-BE49-F238E27FC236}">
-                <a16:creationId xmlns:a16="http://schemas.microsoft.com/office/drawing/2014/main" id="{37750233-96AC-2D2E-727E-DE7F754C47DD}"/>
+                <a16:creationId xmlns:a16="http://schemas.microsoft.com/office/drawing/2014/main" id="{874E41DC-C19A-76F2-215A-C5F8738665E9}"/>
               </a:ext>
             </a:extLst>
           </p:cNvPr>
@@ -658,11 +1237,11 @@
           <a:bodyPr/>
           <a:lstStyle/>
           <a:p>
-            <a:fld id="{A4392FC1-78AF-49F0-9C11-9F240922D893}" type="datetimeFigureOut">
-              <a:rPr lang="pt-PT" smtClean="0"/>
-              <a:t>28/04/2026</a:t>
+            <a:fld id="{7DA38F49-B3E2-4BF0-BEC7-C30D34ABBB8D}" type="datetime1">
+              <a:rPr lang="en-US" smtClean="0"/>
+              <a:t>4/28/2026</a:t>
             </a:fld>
-            <a:endParaRPr lang="pt-PT"/>
+            <a:endParaRPr lang="en-US"/>
           </a:p>
         </p:txBody>
       </p:sp>
@@ -671,7 +1250,7 @@
           <p:cNvPr id="5" name="Marcador de Posição do Rodapé 4">
             <a:extLst>
               <a:ext uri="{FF2B5EF4-FFF2-40B4-BE49-F238E27FC236}">
-                <a16:creationId xmlns:a16="http://schemas.microsoft.com/office/drawing/2014/main" id="{66F233E6-5BEB-9EEB-DD3F-8F92873098F6}"/>
+                <a16:creationId xmlns:a16="http://schemas.microsoft.com/office/drawing/2014/main" id="{C021CC85-4C92-ED58-B98D-C3CBCA9A60F1}"/>
               </a:ext>
             </a:extLst>
           </p:cNvPr>
@@ -687,7 +1266,7 @@
           <a:bodyPr/>
           <a:lstStyle/>
           <a:p>
-            <a:endParaRPr lang="pt-PT"/>
+            <a:endParaRPr lang="en-US" dirty="0"/>
           </a:p>
         </p:txBody>
       </p:sp>
@@ -696,7 +1275,7 @@
           <p:cNvPr id="6" name="Marcador de Posição do Número do Diapositivo 5">
             <a:extLst>
               <a:ext uri="{FF2B5EF4-FFF2-40B4-BE49-F238E27FC236}">
-                <a16:creationId xmlns:a16="http://schemas.microsoft.com/office/drawing/2014/main" id="{A098F48F-4960-DF1E-49DE-FC9381640EEB}"/>
+                <a16:creationId xmlns:a16="http://schemas.microsoft.com/office/drawing/2014/main" id="{EA5B1F85-F587-C097-A29F-B083116502FE}"/>
               </a:ext>
             </a:extLst>
           </p:cNvPr>
@@ -712,24 +1291,25 @@
           <a:bodyPr/>
           <a:lstStyle/>
           <a:p>
-            <a:fld id="{E380EDD8-04CB-40D0-ACE7-096DF763EA4B}" type="slidenum">
-              <a:rPr lang="pt-PT" smtClean="0"/>
+            <a:fld id="{70C12960-6E85-460F-B6E3-5B82CB31AF3D}" type="slidenum">
+              <a:rPr lang="en-US" smtClean="0"/>
               <a:t>‹nº›</a:t>
             </a:fld>
-            <a:endParaRPr lang="pt-PT"/>
+            <a:endParaRPr lang="en-US"/>
           </a:p>
         </p:txBody>
       </p:sp>
     </p:spTree>
     <p:extLst>
       <p:ext uri="{BB962C8B-B14F-4D97-AF65-F5344CB8AC3E}">
-        <p14:creationId xmlns:p14="http://schemas.microsoft.com/office/powerpoint/2010/main" val="833959863"/>
+        <p14:creationId xmlns:p14="http://schemas.microsoft.com/office/powerpoint/2010/main" val="3187433760"/>
       </p:ext>
     </p:extLst>
   </p:cSld>
   <p:clrMapOvr>
     <a:masterClrMapping/>
   </p:clrMapOvr>
+  <p:hf sldNum="0" hdr="0" ftr="0" dt="0"/>
 </p:sldLayout>
 </file>
 
@@ -755,7 +1335,7 @@
           <p:cNvPr id="2" name="Título 1">
             <a:extLst>
               <a:ext uri="{FF2B5EF4-FFF2-40B4-BE49-F238E27FC236}">
-                <a16:creationId xmlns:a16="http://schemas.microsoft.com/office/drawing/2014/main" id="{35069AF9-C00D-BC43-3A92-EDC23E67016A}"/>
+                <a16:creationId xmlns:a16="http://schemas.microsoft.com/office/drawing/2014/main" id="{E8F07B2B-F4EC-C09F-470E-F79990417A42}"/>
               </a:ext>
             </a:extLst>
           </p:cNvPr>
@@ -783,7 +1363,7 @@
           <p:cNvPr id="3" name="Marcador de Posição de Conteúdo 2">
             <a:extLst>
               <a:ext uri="{FF2B5EF4-FFF2-40B4-BE49-F238E27FC236}">
-                <a16:creationId xmlns:a16="http://schemas.microsoft.com/office/drawing/2014/main" id="{A24CD779-3060-5292-C825-D992F78519A3}"/>
+                <a16:creationId xmlns:a16="http://schemas.microsoft.com/office/drawing/2014/main" id="{9D6FAFF4-616D-C0EC-F7BF-037B61621220}"/>
               </a:ext>
             </a:extLst>
           </p:cNvPr>
@@ -840,7 +1420,7 @@
           <p:cNvPr id="4" name="Marcador de Posição da Data 3">
             <a:extLst>
               <a:ext uri="{FF2B5EF4-FFF2-40B4-BE49-F238E27FC236}">
-                <a16:creationId xmlns:a16="http://schemas.microsoft.com/office/drawing/2014/main" id="{EEE90A74-AE6A-40A2-952E-3FAD9760AD00}"/>
+                <a16:creationId xmlns:a16="http://schemas.microsoft.com/office/drawing/2014/main" id="{3DB8CF6A-F415-94E6-350F-256E1A8BD21B}"/>
               </a:ext>
             </a:extLst>
           </p:cNvPr>
@@ -856,11 +1436,11 @@
           <a:bodyPr/>
           <a:lstStyle/>
           <a:p>
-            <a:fld id="{A4392FC1-78AF-49F0-9C11-9F240922D893}" type="datetimeFigureOut">
-              <a:rPr lang="pt-PT" smtClean="0"/>
-              <a:t>28/04/2026</a:t>
+            <a:fld id="{7DA38F49-B3E2-4BF0-BEC7-C30D34ABBB8D}" type="datetime1">
+              <a:rPr lang="en-US" smtClean="0"/>
+              <a:t>4/28/2026</a:t>
             </a:fld>
-            <a:endParaRPr lang="pt-PT"/>
+            <a:endParaRPr lang="en-US"/>
           </a:p>
         </p:txBody>
       </p:sp>
@@ -869,7 +1449,7 @@
           <p:cNvPr id="5" name="Marcador de Posição do Rodapé 4">
             <a:extLst>
               <a:ext uri="{FF2B5EF4-FFF2-40B4-BE49-F238E27FC236}">
-                <a16:creationId xmlns:a16="http://schemas.microsoft.com/office/drawing/2014/main" id="{0B93BA8B-6FCF-2FDA-519C-96800F44F472}"/>
+                <a16:creationId xmlns:a16="http://schemas.microsoft.com/office/drawing/2014/main" id="{7F83A628-4AB8-C77A-2A96-1CCDF3A88B21}"/>
               </a:ext>
             </a:extLst>
           </p:cNvPr>
@@ -885,7 +1465,7 @@
           <a:bodyPr/>
           <a:lstStyle/>
           <a:p>
-            <a:endParaRPr lang="pt-PT"/>
+            <a:endParaRPr lang="en-US" dirty="0"/>
           </a:p>
         </p:txBody>
       </p:sp>
@@ -894,7 +1474,7 @@
           <p:cNvPr id="6" name="Marcador de Posição do Número do Diapositivo 5">
             <a:extLst>
               <a:ext uri="{FF2B5EF4-FFF2-40B4-BE49-F238E27FC236}">
-                <a16:creationId xmlns:a16="http://schemas.microsoft.com/office/drawing/2014/main" id="{E6A38C84-CF86-0A1D-3E20-71A76CEB3EA6}"/>
+                <a16:creationId xmlns:a16="http://schemas.microsoft.com/office/drawing/2014/main" id="{77BFF8E4-6F5B-6824-1FAB-0C9CFA7D7B9E}"/>
               </a:ext>
             </a:extLst>
           </p:cNvPr>
@@ -910,24 +1490,25 @@
           <a:bodyPr/>
           <a:lstStyle/>
           <a:p>
-            <a:fld id="{E380EDD8-04CB-40D0-ACE7-096DF763EA4B}" type="slidenum">
-              <a:rPr lang="pt-PT" smtClean="0"/>
+            <a:fld id="{70C12960-6E85-460F-B6E3-5B82CB31AF3D}" type="slidenum">
+              <a:rPr lang="en-US" smtClean="0"/>
               <a:t>‹nº›</a:t>
             </a:fld>
-            <a:endParaRPr lang="pt-PT"/>
+            <a:endParaRPr lang="en-US"/>
           </a:p>
         </p:txBody>
       </p:sp>
     </p:spTree>
     <p:extLst>
       <p:ext uri="{BB962C8B-B14F-4D97-AF65-F5344CB8AC3E}">
-        <p14:creationId xmlns:p14="http://schemas.microsoft.com/office/powerpoint/2010/main" val="2414503881"/>
+        <p14:creationId xmlns:p14="http://schemas.microsoft.com/office/powerpoint/2010/main" val="1361487108"/>
       </p:ext>
     </p:extLst>
   </p:cSld>
   <p:clrMapOvr>
     <a:masterClrMapping/>
   </p:clrMapOvr>
+  <p:hf sldNum="0" hdr="0" ftr="0" dt="0"/>
 </p:sldLayout>
 </file>
 
@@ -953,7 +1534,7 @@
           <p:cNvPr id="2" name="Título 1">
             <a:extLst>
               <a:ext uri="{FF2B5EF4-FFF2-40B4-BE49-F238E27FC236}">
-                <a16:creationId xmlns:a16="http://schemas.microsoft.com/office/drawing/2014/main" id="{7B58B52E-8D71-4A6D-56C7-B1DDEE04DEF1}"/>
+                <a16:creationId xmlns:a16="http://schemas.microsoft.com/office/drawing/2014/main" id="{1BBCDBDE-8FF7-C7C1-46E2-E896D156A5D4}"/>
               </a:ext>
             </a:extLst>
           </p:cNvPr>
@@ -990,7 +1571,7 @@
           <p:cNvPr id="3" name="Marcador de Posição do Texto 2">
             <a:extLst>
               <a:ext uri="{FF2B5EF4-FFF2-40B4-BE49-F238E27FC236}">
-                <a16:creationId xmlns:a16="http://schemas.microsoft.com/office/drawing/2014/main" id="{5E7EEBB6-D898-F1BB-EAFF-28B7D045CC8E}"/>
+                <a16:creationId xmlns:a16="http://schemas.microsoft.com/office/drawing/2014/main" id="{66016F44-324F-E737-B94B-3B63983F26A2}"/>
               </a:ext>
             </a:extLst>
           </p:cNvPr>
@@ -1115,7 +1696,7 @@
           <p:cNvPr id="4" name="Marcador de Posição da Data 3">
             <a:extLst>
               <a:ext uri="{FF2B5EF4-FFF2-40B4-BE49-F238E27FC236}">
-                <a16:creationId xmlns:a16="http://schemas.microsoft.com/office/drawing/2014/main" id="{AF35A7BF-D6E3-21C9-4187-3FBB86E708FF}"/>
+                <a16:creationId xmlns:a16="http://schemas.microsoft.com/office/drawing/2014/main" id="{1DC8648D-1CE0-9FF2-52A9-C34D4212D4E5}"/>
               </a:ext>
             </a:extLst>
           </p:cNvPr>
@@ -1131,11 +1712,11 @@
           <a:bodyPr/>
           <a:lstStyle/>
           <a:p>
-            <a:fld id="{A4392FC1-78AF-49F0-9C11-9F240922D893}" type="datetimeFigureOut">
-              <a:rPr lang="pt-PT" smtClean="0"/>
-              <a:t>28/04/2026</a:t>
+            <a:fld id="{7DA38F49-B3E2-4BF0-BEC7-C30D34ABBB8D}" type="datetime1">
+              <a:rPr lang="en-US" smtClean="0"/>
+              <a:t>4/28/2026</a:t>
             </a:fld>
-            <a:endParaRPr lang="pt-PT"/>
+            <a:endParaRPr lang="en-US"/>
           </a:p>
         </p:txBody>
       </p:sp>
@@ -1144,7 +1725,7 @@
           <p:cNvPr id="5" name="Marcador de Posição do Rodapé 4">
             <a:extLst>
               <a:ext uri="{FF2B5EF4-FFF2-40B4-BE49-F238E27FC236}">
-                <a16:creationId xmlns:a16="http://schemas.microsoft.com/office/drawing/2014/main" id="{083D6166-B65E-52A8-235F-9CBE11BE8308}"/>
+                <a16:creationId xmlns:a16="http://schemas.microsoft.com/office/drawing/2014/main" id="{EBD88390-12F2-0811-8D7E-FA7C4D1BC0B7}"/>
               </a:ext>
             </a:extLst>
           </p:cNvPr>
@@ -1160,7 +1741,7 @@
           <a:bodyPr/>
           <a:lstStyle/>
           <a:p>
-            <a:endParaRPr lang="pt-PT"/>
+            <a:endParaRPr lang="en-US" dirty="0"/>
           </a:p>
         </p:txBody>
       </p:sp>
@@ -1169,7 +1750,7 @@
           <p:cNvPr id="6" name="Marcador de Posição do Número do Diapositivo 5">
             <a:extLst>
               <a:ext uri="{FF2B5EF4-FFF2-40B4-BE49-F238E27FC236}">
-                <a16:creationId xmlns:a16="http://schemas.microsoft.com/office/drawing/2014/main" id="{7263D527-50E5-1A1C-38AF-F62571F097F6}"/>
+                <a16:creationId xmlns:a16="http://schemas.microsoft.com/office/drawing/2014/main" id="{8D4FEC07-6034-8566-D969-CC1BA445E457}"/>
               </a:ext>
             </a:extLst>
           </p:cNvPr>
@@ -1185,24 +1766,25 @@
           <a:bodyPr/>
           <a:lstStyle/>
           <a:p>
-            <a:fld id="{E380EDD8-04CB-40D0-ACE7-096DF763EA4B}" type="slidenum">
-              <a:rPr lang="pt-PT" smtClean="0"/>
+            <a:fld id="{70C12960-6E85-460F-B6E3-5B82CB31AF3D}" type="slidenum">
+              <a:rPr lang="en-US" smtClean="0"/>
               <a:t>‹nº›</a:t>
             </a:fld>
-            <a:endParaRPr lang="pt-PT"/>
+            <a:endParaRPr lang="en-US"/>
           </a:p>
         </p:txBody>
       </p:sp>
     </p:spTree>
     <p:extLst>
       <p:ext uri="{BB962C8B-B14F-4D97-AF65-F5344CB8AC3E}">
-        <p14:creationId xmlns:p14="http://schemas.microsoft.com/office/powerpoint/2010/main" val="1710320310"/>
+        <p14:creationId xmlns:p14="http://schemas.microsoft.com/office/powerpoint/2010/main" val="3360365932"/>
       </p:ext>
     </p:extLst>
   </p:cSld>
   <p:clrMapOvr>
     <a:masterClrMapping/>
   </p:clrMapOvr>
+  <p:hf sldNum="0" hdr="0" ftr="0" dt="0"/>
 </p:sldLayout>
 </file>
 
@@ -1228,7 +1810,7 @@
           <p:cNvPr id="2" name="Título 1">
             <a:extLst>
               <a:ext uri="{FF2B5EF4-FFF2-40B4-BE49-F238E27FC236}">
-                <a16:creationId xmlns:a16="http://schemas.microsoft.com/office/drawing/2014/main" id="{93D4D8A2-4CB8-7606-5FC4-A682595A1163}"/>
+                <a16:creationId xmlns:a16="http://schemas.microsoft.com/office/drawing/2014/main" id="{C48C634F-4345-F520-18C7-2F82CE4592CB}"/>
               </a:ext>
             </a:extLst>
           </p:cNvPr>
@@ -1256,7 +1838,7 @@
           <p:cNvPr id="3" name="Marcador de Posição de Conteúdo 2">
             <a:extLst>
               <a:ext uri="{FF2B5EF4-FFF2-40B4-BE49-F238E27FC236}">
-                <a16:creationId xmlns:a16="http://schemas.microsoft.com/office/drawing/2014/main" id="{90B59DA5-D9C2-4EBF-4DED-BC90D7D620BA}"/>
+                <a16:creationId xmlns:a16="http://schemas.microsoft.com/office/drawing/2014/main" id="{FFACEA6B-E2B7-1491-3205-CD47551297F5}"/>
               </a:ext>
             </a:extLst>
           </p:cNvPr>
@@ -1318,7 +1900,7 @@
           <p:cNvPr id="4" name="Marcador de Posição de Conteúdo 3">
             <a:extLst>
               <a:ext uri="{FF2B5EF4-FFF2-40B4-BE49-F238E27FC236}">
-                <a16:creationId xmlns:a16="http://schemas.microsoft.com/office/drawing/2014/main" id="{8C597E92-30AA-F74D-A60B-9F3A43DF5828}"/>
+                <a16:creationId xmlns:a16="http://schemas.microsoft.com/office/drawing/2014/main" id="{B2D2634F-3ACA-A9A4-EEAB-B87245AB1A7E}"/>
               </a:ext>
             </a:extLst>
           </p:cNvPr>
@@ -1380,7 +1962,7 @@
           <p:cNvPr id="5" name="Marcador de Posição da Data 4">
             <a:extLst>
               <a:ext uri="{FF2B5EF4-FFF2-40B4-BE49-F238E27FC236}">
-                <a16:creationId xmlns:a16="http://schemas.microsoft.com/office/drawing/2014/main" id="{DA4510AA-FFAB-A696-670B-38522C055421}"/>
+                <a16:creationId xmlns:a16="http://schemas.microsoft.com/office/drawing/2014/main" id="{FA845341-DC80-9829-3F78-127E3B36497E}"/>
               </a:ext>
             </a:extLst>
           </p:cNvPr>
@@ -1396,11 +1978,11 @@
           <a:bodyPr/>
           <a:lstStyle/>
           <a:p>
-            <a:fld id="{A4392FC1-78AF-49F0-9C11-9F240922D893}" type="datetimeFigureOut">
-              <a:rPr lang="pt-PT" smtClean="0"/>
-              <a:t>28/04/2026</a:t>
+            <a:fld id="{7DA38F49-B3E2-4BF0-BEC7-C30D34ABBB8D}" type="datetime1">
+              <a:rPr lang="en-US" smtClean="0"/>
+              <a:t>4/28/2026</a:t>
             </a:fld>
-            <a:endParaRPr lang="pt-PT"/>
+            <a:endParaRPr lang="en-US"/>
           </a:p>
         </p:txBody>
       </p:sp>
@@ -1409,7 +1991,7 @@
           <p:cNvPr id="6" name="Marcador de Posição do Rodapé 5">
             <a:extLst>
               <a:ext uri="{FF2B5EF4-FFF2-40B4-BE49-F238E27FC236}">
-                <a16:creationId xmlns:a16="http://schemas.microsoft.com/office/drawing/2014/main" id="{2F8A4935-AE36-C243-ECD1-06562D718595}"/>
+                <a16:creationId xmlns:a16="http://schemas.microsoft.com/office/drawing/2014/main" id="{818B1EE6-CB99-0709-ED13-1C6BB1D107B0}"/>
               </a:ext>
             </a:extLst>
           </p:cNvPr>
@@ -1425,7 +2007,7 @@
           <a:bodyPr/>
           <a:lstStyle/>
           <a:p>
-            <a:endParaRPr lang="pt-PT"/>
+            <a:endParaRPr lang="en-US" dirty="0"/>
           </a:p>
         </p:txBody>
       </p:sp>
@@ -1434,7 +2016,7 @@
           <p:cNvPr id="7" name="Marcador de Posição do Número do Diapositivo 6">
             <a:extLst>
               <a:ext uri="{FF2B5EF4-FFF2-40B4-BE49-F238E27FC236}">
-                <a16:creationId xmlns:a16="http://schemas.microsoft.com/office/drawing/2014/main" id="{5AA47F51-FABC-0122-FC3C-C0CF3CF6A482}"/>
+                <a16:creationId xmlns:a16="http://schemas.microsoft.com/office/drawing/2014/main" id="{F1D930E1-7185-F9C4-1B3C-AB1C12379996}"/>
               </a:ext>
             </a:extLst>
           </p:cNvPr>
@@ -1450,24 +2032,25 @@
           <a:bodyPr/>
           <a:lstStyle/>
           <a:p>
-            <a:fld id="{E380EDD8-04CB-40D0-ACE7-096DF763EA4B}" type="slidenum">
-              <a:rPr lang="pt-PT" smtClean="0"/>
+            <a:fld id="{70C12960-6E85-460F-B6E3-5B82CB31AF3D}" type="slidenum">
+              <a:rPr lang="en-US" smtClean="0"/>
               <a:t>‹nº›</a:t>
             </a:fld>
-            <a:endParaRPr lang="pt-PT"/>
+            <a:endParaRPr lang="en-US"/>
           </a:p>
         </p:txBody>
       </p:sp>
     </p:spTree>
     <p:extLst>
       <p:ext uri="{BB962C8B-B14F-4D97-AF65-F5344CB8AC3E}">
-        <p14:creationId xmlns:p14="http://schemas.microsoft.com/office/powerpoint/2010/main" val="1223066608"/>
+        <p14:creationId xmlns:p14="http://schemas.microsoft.com/office/powerpoint/2010/main" val="3055782462"/>
       </p:ext>
     </p:extLst>
   </p:cSld>
   <p:clrMapOvr>
     <a:masterClrMapping/>
   </p:clrMapOvr>
+  <p:hf sldNum="0" hdr="0" ftr="0" dt="0"/>
 </p:sldLayout>
 </file>
 
@@ -1493,7 +2076,7 @@
           <p:cNvPr id="2" name="Título 1">
             <a:extLst>
               <a:ext uri="{FF2B5EF4-FFF2-40B4-BE49-F238E27FC236}">
-                <a16:creationId xmlns:a16="http://schemas.microsoft.com/office/drawing/2014/main" id="{2B1726BC-FA40-14F6-1A22-76824BF46DDF}"/>
+                <a16:creationId xmlns:a16="http://schemas.microsoft.com/office/drawing/2014/main" id="{BF3BCC67-D668-3EFE-1955-B2F3E41B3D84}"/>
               </a:ext>
             </a:extLst>
           </p:cNvPr>
@@ -1526,7 +2109,7 @@
           <p:cNvPr id="3" name="Marcador de Posição do Texto 2">
             <a:extLst>
               <a:ext uri="{FF2B5EF4-FFF2-40B4-BE49-F238E27FC236}">
-                <a16:creationId xmlns:a16="http://schemas.microsoft.com/office/drawing/2014/main" id="{4DBBBAA5-8D2C-E9FC-C8CA-B6AC9D82F8D3}"/>
+                <a16:creationId xmlns:a16="http://schemas.microsoft.com/office/drawing/2014/main" id="{CCEC6C11-F0BB-96A0-52CA-BCD71C97EC3C}"/>
               </a:ext>
             </a:extLst>
           </p:cNvPr>
@@ -1597,7 +2180,7 @@
           <p:cNvPr id="4" name="Marcador de Posição de Conteúdo 3">
             <a:extLst>
               <a:ext uri="{FF2B5EF4-FFF2-40B4-BE49-F238E27FC236}">
-                <a16:creationId xmlns:a16="http://schemas.microsoft.com/office/drawing/2014/main" id="{DBA0E963-480A-7C1C-FF18-21ADE65D6CBD}"/>
+                <a16:creationId xmlns:a16="http://schemas.microsoft.com/office/drawing/2014/main" id="{B5E67304-7F4F-C27F-EC6A-48189984AC5A}"/>
               </a:ext>
             </a:extLst>
           </p:cNvPr>
@@ -1659,7 +2242,7 @@
           <p:cNvPr id="5" name="Marcador de Posição do Texto 4">
             <a:extLst>
               <a:ext uri="{FF2B5EF4-FFF2-40B4-BE49-F238E27FC236}">
-                <a16:creationId xmlns:a16="http://schemas.microsoft.com/office/drawing/2014/main" id="{45C4F120-4C83-01F4-D941-BE912A401E7D}"/>
+                <a16:creationId xmlns:a16="http://schemas.microsoft.com/office/drawing/2014/main" id="{5BD1C07D-ACB3-7A66-99FB-E27A13889095}"/>
               </a:ext>
             </a:extLst>
           </p:cNvPr>
@@ -1730,7 +2313,7 @@
           <p:cNvPr id="6" name="Marcador de Posição de Conteúdo 5">
             <a:extLst>
               <a:ext uri="{FF2B5EF4-FFF2-40B4-BE49-F238E27FC236}">
-                <a16:creationId xmlns:a16="http://schemas.microsoft.com/office/drawing/2014/main" id="{585BB110-A97D-0BE5-0CF6-52511B02CA33}"/>
+                <a16:creationId xmlns:a16="http://schemas.microsoft.com/office/drawing/2014/main" id="{DC2A6D8D-7837-EEFD-E25C-25396A061856}"/>
               </a:ext>
             </a:extLst>
           </p:cNvPr>
@@ -1792,7 +2375,7 @@
           <p:cNvPr id="7" name="Marcador de Posição da Data 6">
             <a:extLst>
               <a:ext uri="{FF2B5EF4-FFF2-40B4-BE49-F238E27FC236}">
-                <a16:creationId xmlns:a16="http://schemas.microsoft.com/office/drawing/2014/main" id="{A81EA436-B1A0-F223-9AE3-BA99E755D507}"/>
+                <a16:creationId xmlns:a16="http://schemas.microsoft.com/office/drawing/2014/main" id="{3513B54D-DBAE-84DC-8A7A-775805519BC5}"/>
               </a:ext>
             </a:extLst>
           </p:cNvPr>
@@ -1808,11 +2391,11 @@
           <a:bodyPr/>
           <a:lstStyle/>
           <a:p>
-            <a:fld id="{A4392FC1-78AF-49F0-9C11-9F240922D893}" type="datetimeFigureOut">
-              <a:rPr lang="pt-PT" smtClean="0"/>
-              <a:t>28/04/2026</a:t>
+            <a:fld id="{7DA38F49-B3E2-4BF0-BEC7-C30D34ABBB8D}" type="datetime1">
+              <a:rPr lang="en-US" smtClean="0"/>
+              <a:t>4/28/2026</a:t>
             </a:fld>
-            <a:endParaRPr lang="pt-PT"/>
+            <a:endParaRPr lang="en-US"/>
           </a:p>
         </p:txBody>
       </p:sp>
@@ -1821,7 +2404,7 @@
           <p:cNvPr id="8" name="Marcador de Posição do Rodapé 7">
             <a:extLst>
               <a:ext uri="{FF2B5EF4-FFF2-40B4-BE49-F238E27FC236}">
-                <a16:creationId xmlns:a16="http://schemas.microsoft.com/office/drawing/2014/main" id="{6D0DFBF9-5275-543E-B4B4-BCCAE1F6CBF8}"/>
+                <a16:creationId xmlns:a16="http://schemas.microsoft.com/office/drawing/2014/main" id="{B89C222C-AABA-8E69-D04C-87A1656B54B7}"/>
               </a:ext>
             </a:extLst>
           </p:cNvPr>
@@ -1837,7 +2420,7 @@
           <a:bodyPr/>
           <a:lstStyle/>
           <a:p>
-            <a:endParaRPr lang="pt-PT"/>
+            <a:endParaRPr lang="en-US" dirty="0"/>
           </a:p>
         </p:txBody>
       </p:sp>
@@ -1846,7 +2429,7 @@
           <p:cNvPr id="9" name="Marcador de Posição do Número do Diapositivo 8">
             <a:extLst>
               <a:ext uri="{FF2B5EF4-FFF2-40B4-BE49-F238E27FC236}">
-                <a16:creationId xmlns:a16="http://schemas.microsoft.com/office/drawing/2014/main" id="{C0980EF0-0448-27C6-5CD7-86C34239D37B}"/>
+                <a16:creationId xmlns:a16="http://schemas.microsoft.com/office/drawing/2014/main" id="{5E073A11-1C1D-08C0-8EE9-E8B5C4AAB645}"/>
               </a:ext>
             </a:extLst>
           </p:cNvPr>
@@ -1862,24 +2445,25 @@
           <a:bodyPr/>
           <a:lstStyle/>
           <a:p>
-            <a:fld id="{E380EDD8-04CB-40D0-ACE7-096DF763EA4B}" type="slidenum">
-              <a:rPr lang="pt-PT" smtClean="0"/>
+            <a:fld id="{70C12960-6E85-460F-B6E3-5B82CB31AF3D}" type="slidenum">
+              <a:rPr lang="en-US" smtClean="0"/>
               <a:t>‹nº›</a:t>
             </a:fld>
-            <a:endParaRPr lang="pt-PT"/>
+            <a:endParaRPr lang="en-US"/>
           </a:p>
         </p:txBody>
       </p:sp>
     </p:spTree>
     <p:extLst>
       <p:ext uri="{BB962C8B-B14F-4D97-AF65-F5344CB8AC3E}">
-        <p14:creationId xmlns:p14="http://schemas.microsoft.com/office/powerpoint/2010/main" val="826303713"/>
+        <p14:creationId xmlns:p14="http://schemas.microsoft.com/office/powerpoint/2010/main" val="2981660575"/>
       </p:ext>
     </p:extLst>
   </p:cSld>
   <p:clrMapOvr>
     <a:masterClrMapping/>
   </p:clrMapOvr>
+  <p:hf sldNum="0" hdr="0" ftr="0" dt="0"/>
 </p:sldLayout>
 </file>
 
@@ -1905,7 +2489,7 @@
           <p:cNvPr id="2" name="Título 1">
             <a:extLst>
               <a:ext uri="{FF2B5EF4-FFF2-40B4-BE49-F238E27FC236}">
-                <a16:creationId xmlns:a16="http://schemas.microsoft.com/office/drawing/2014/main" id="{7D14EF22-819E-DBCD-FE20-E34A769CF306}"/>
+                <a16:creationId xmlns:a16="http://schemas.microsoft.com/office/drawing/2014/main" id="{6C4A8732-DDD8-29EB-33D1-0651CD696685}"/>
               </a:ext>
             </a:extLst>
           </p:cNvPr>
@@ -1933,7 +2517,7 @@
           <p:cNvPr id="3" name="Marcador de Posição da Data 2">
             <a:extLst>
               <a:ext uri="{FF2B5EF4-FFF2-40B4-BE49-F238E27FC236}">
-                <a16:creationId xmlns:a16="http://schemas.microsoft.com/office/drawing/2014/main" id="{2A181727-0C6C-6027-80C1-B03DAC04C86E}"/>
+                <a16:creationId xmlns:a16="http://schemas.microsoft.com/office/drawing/2014/main" id="{2336D02B-27BC-41F3-1B43-FBD1AB264F42}"/>
               </a:ext>
             </a:extLst>
           </p:cNvPr>
@@ -1949,11 +2533,11 @@
           <a:bodyPr/>
           <a:lstStyle/>
           <a:p>
-            <a:fld id="{A4392FC1-78AF-49F0-9C11-9F240922D893}" type="datetimeFigureOut">
-              <a:rPr lang="pt-PT" smtClean="0"/>
-              <a:t>28/04/2026</a:t>
+            <a:fld id="{7DA38F49-B3E2-4BF0-BEC7-C30D34ABBB8D}" type="datetime1">
+              <a:rPr lang="en-US" smtClean="0"/>
+              <a:t>4/28/2026</a:t>
             </a:fld>
-            <a:endParaRPr lang="pt-PT"/>
+            <a:endParaRPr lang="en-US"/>
           </a:p>
         </p:txBody>
       </p:sp>
@@ -1962,7 +2546,7 @@
           <p:cNvPr id="4" name="Marcador de Posição do Rodapé 3">
             <a:extLst>
               <a:ext uri="{FF2B5EF4-FFF2-40B4-BE49-F238E27FC236}">
-                <a16:creationId xmlns:a16="http://schemas.microsoft.com/office/drawing/2014/main" id="{3669F61E-E5E0-00C2-6FEA-3A393010EC8C}"/>
+                <a16:creationId xmlns:a16="http://schemas.microsoft.com/office/drawing/2014/main" id="{34BDD2F8-6A8D-520D-F1AE-FCF053B25C9C}"/>
               </a:ext>
             </a:extLst>
           </p:cNvPr>
@@ -1978,7 +2562,7 @@
           <a:bodyPr/>
           <a:lstStyle/>
           <a:p>
-            <a:endParaRPr lang="pt-PT"/>
+            <a:endParaRPr lang="en-US" dirty="0"/>
           </a:p>
         </p:txBody>
       </p:sp>
@@ -1987,7 +2571,7 @@
           <p:cNvPr id="5" name="Marcador de Posição do Número do Diapositivo 4">
             <a:extLst>
               <a:ext uri="{FF2B5EF4-FFF2-40B4-BE49-F238E27FC236}">
-                <a16:creationId xmlns:a16="http://schemas.microsoft.com/office/drawing/2014/main" id="{6EA7F1F5-5757-7C18-9BFB-A398DF185192}"/>
+                <a16:creationId xmlns:a16="http://schemas.microsoft.com/office/drawing/2014/main" id="{E392F1CA-95DF-4B11-97B4-9A60B069E22D}"/>
               </a:ext>
             </a:extLst>
           </p:cNvPr>
@@ -2003,24 +2587,25 @@
           <a:bodyPr/>
           <a:lstStyle/>
           <a:p>
-            <a:fld id="{E380EDD8-04CB-40D0-ACE7-096DF763EA4B}" type="slidenum">
-              <a:rPr lang="pt-PT" smtClean="0"/>
+            <a:fld id="{70C12960-6E85-460F-B6E3-5B82CB31AF3D}" type="slidenum">
+              <a:rPr lang="en-US" smtClean="0"/>
               <a:t>‹nº›</a:t>
             </a:fld>
-            <a:endParaRPr lang="pt-PT"/>
+            <a:endParaRPr lang="en-US"/>
           </a:p>
         </p:txBody>
       </p:sp>
     </p:spTree>
     <p:extLst>
       <p:ext uri="{BB962C8B-B14F-4D97-AF65-F5344CB8AC3E}">
-        <p14:creationId xmlns:p14="http://schemas.microsoft.com/office/powerpoint/2010/main" val="1586888841"/>
+        <p14:creationId xmlns:p14="http://schemas.microsoft.com/office/powerpoint/2010/main" val="3588329965"/>
       </p:ext>
     </p:extLst>
   </p:cSld>
   <p:clrMapOvr>
     <a:masterClrMapping/>
   </p:clrMapOvr>
+  <p:hf sldNum="0" hdr="0" ftr="0" dt="0"/>
 </p:sldLayout>
 </file>
 
@@ -2046,7 +2631,7 @@
           <p:cNvPr id="2" name="Marcador de Posição da Data 1">
             <a:extLst>
               <a:ext uri="{FF2B5EF4-FFF2-40B4-BE49-F238E27FC236}">
-                <a16:creationId xmlns:a16="http://schemas.microsoft.com/office/drawing/2014/main" id="{3ACB8BA4-4830-8961-799B-C8DF6CD154BE}"/>
+                <a16:creationId xmlns:a16="http://schemas.microsoft.com/office/drawing/2014/main" id="{29C78170-896F-1F1A-4C56-07A2D156AB6A}"/>
               </a:ext>
             </a:extLst>
           </p:cNvPr>
@@ -2062,11 +2647,11 @@
           <a:bodyPr/>
           <a:lstStyle/>
           <a:p>
-            <a:fld id="{A4392FC1-78AF-49F0-9C11-9F240922D893}" type="datetimeFigureOut">
-              <a:rPr lang="pt-PT" smtClean="0"/>
-              <a:t>28/04/2026</a:t>
+            <a:fld id="{7DA38F49-B3E2-4BF0-BEC7-C30D34ABBB8D}" type="datetime1">
+              <a:rPr lang="en-US" smtClean="0"/>
+              <a:t>4/28/2026</a:t>
             </a:fld>
-            <a:endParaRPr lang="pt-PT"/>
+            <a:endParaRPr lang="en-US"/>
           </a:p>
         </p:txBody>
       </p:sp>
@@ -2075,7 +2660,7 @@
           <p:cNvPr id="3" name="Marcador de Posição do Rodapé 2">
             <a:extLst>
               <a:ext uri="{FF2B5EF4-FFF2-40B4-BE49-F238E27FC236}">
-                <a16:creationId xmlns:a16="http://schemas.microsoft.com/office/drawing/2014/main" id="{4392C504-2350-7147-4A99-D8F8B82C793E}"/>
+                <a16:creationId xmlns:a16="http://schemas.microsoft.com/office/drawing/2014/main" id="{691BFFD1-B41F-12E3-C65D-D349294AB21A}"/>
               </a:ext>
             </a:extLst>
           </p:cNvPr>
@@ -2091,7 +2676,7 @@
           <a:bodyPr/>
           <a:lstStyle/>
           <a:p>
-            <a:endParaRPr lang="pt-PT"/>
+            <a:endParaRPr lang="en-US" dirty="0"/>
           </a:p>
         </p:txBody>
       </p:sp>
@@ -2100,7 +2685,7 @@
           <p:cNvPr id="4" name="Marcador de Posição do Número do Diapositivo 3">
             <a:extLst>
               <a:ext uri="{FF2B5EF4-FFF2-40B4-BE49-F238E27FC236}">
-                <a16:creationId xmlns:a16="http://schemas.microsoft.com/office/drawing/2014/main" id="{7CEC61FE-A61C-1367-BA01-5C3C9D53472F}"/>
+                <a16:creationId xmlns:a16="http://schemas.microsoft.com/office/drawing/2014/main" id="{F860EC9E-F842-AA95-E62D-47AA8577D0D2}"/>
               </a:ext>
             </a:extLst>
           </p:cNvPr>
@@ -2116,24 +2701,25 @@
           <a:bodyPr/>
           <a:lstStyle/>
           <a:p>
-            <a:fld id="{E380EDD8-04CB-40D0-ACE7-096DF763EA4B}" type="slidenum">
-              <a:rPr lang="pt-PT" smtClean="0"/>
+            <a:fld id="{70C12960-6E85-460F-B6E3-5B82CB31AF3D}" type="slidenum">
+              <a:rPr lang="en-US" smtClean="0"/>
               <a:t>‹nº›</a:t>
             </a:fld>
-            <a:endParaRPr lang="pt-PT"/>
+            <a:endParaRPr lang="en-US"/>
           </a:p>
         </p:txBody>
       </p:sp>
     </p:spTree>
     <p:extLst>
       <p:ext uri="{BB962C8B-B14F-4D97-AF65-F5344CB8AC3E}">
-        <p14:creationId xmlns:p14="http://schemas.microsoft.com/office/powerpoint/2010/main" val="1448046336"/>
+        <p14:creationId xmlns:p14="http://schemas.microsoft.com/office/powerpoint/2010/main" val="3546661169"/>
       </p:ext>
     </p:extLst>
   </p:cSld>
   <p:clrMapOvr>
     <a:masterClrMapping/>
   </p:clrMapOvr>
+  <p:hf sldNum="0" hdr="0" ftr="0" dt="0"/>
 </p:sldLayout>
 </file>
 
@@ -2159,7 +2745,7 @@
           <p:cNvPr id="2" name="Título 1">
             <a:extLst>
               <a:ext uri="{FF2B5EF4-FFF2-40B4-BE49-F238E27FC236}">
-                <a16:creationId xmlns:a16="http://schemas.microsoft.com/office/drawing/2014/main" id="{54ED0285-096C-C73B-9466-FC11BB9CE1E9}"/>
+                <a16:creationId xmlns:a16="http://schemas.microsoft.com/office/drawing/2014/main" id="{85DF03F6-855E-2F57-E6A9-D28C8D43B56B}"/>
               </a:ext>
             </a:extLst>
           </p:cNvPr>
@@ -2196,7 +2782,7 @@
           <p:cNvPr id="3" name="Marcador de Posição de Conteúdo 2">
             <a:extLst>
               <a:ext uri="{FF2B5EF4-FFF2-40B4-BE49-F238E27FC236}">
-                <a16:creationId xmlns:a16="http://schemas.microsoft.com/office/drawing/2014/main" id="{CE511B8C-654B-B26C-A309-0CC53B575D7D}"/>
+                <a16:creationId xmlns:a16="http://schemas.microsoft.com/office/drawing/2014/main" id="{9E4DCB09-28AB-CCDE-575D-557596C7B35A}"/>
               </a:ext>
             </a:extLst>
           </p:cNvPr>
@@ -2286,7 +2872,7 @@
           <p:cNvPr id="4" name="Marcador de Posição do Texto 3">
             <a:extLst>
               <a:ext uri="{FF2B5EF4-FFF2-40B4-BE49-F238E27FC236}">
-                <a16:creationId xmlns:a16="http://schemas.microsoft.com/office/drawing/2014/main" id="{897E5207-8EB3-8962-6379-EF852CA03E53}"/>
+                <a16:creationId xmlns:a16="http://schemas.microsoft.com/office/drawing/2014/main" id="{2354ECF8-5D41-64F0-A923-B9CF2B824C50}"/>
               </a:ext>
             </a:extLst>
           </p:cNvPr>
@@ -2357,7 +2943,7 @@
           <p:cNvPr id="5" name="Marcador de Posição da Data 4">
             <a:extLst>
               <a:ext uri="{FF2B5EF4-FFF2-40B4-BE49-F238E27FC236}">
-                <a16:creationId xmlns:a16="http://schemas.microsoft.com/office/drawing/2014/main" id="{F675C4FD-20A2-A66A-6FBB-3787980C7C61}"/>
+                <a16:creationId xmlns:a16="http://schemas.microsoft.com/office/drawing/2014/main" id="{AD7D6CDE-BC89-2A9C-A5FC-4F702236A056}"/>
               </a:ext>
             </a:extLst>
           </p:cNvPr>
@@ -2373,11 +2959,11 @@
           <a:bodyPr/>
           <a:lstStyle/>
           <a:p>
-            <a:fld id="{A4392FC1-78AF-49F0-9C11-9F240922D893}" type="datetimeFigureOut">
-              <a:rPr lang="pt-PT" smtClean="0"/>
-              <a:t>28/04/2026</a:t>
+            <a:fld id="{7DA38F49-B3E2-4BF0-BEC7-C30D34ABBB8D}" type="datetime1">
+              <a:rPr lang="en-US" smtClean="0"/>
+              <a:t>4/28/2026</a:t>
             </a:fld>
-            <a:endParaRPr lang="pt-PT"/>
+            <a:endParaRPr lang="en-US"/>
           </a:p>
         </p:txBody>
       </p:sp>
@@ -2386,7 +2972,7 @@
           <p:cNvPr id="6" name="Marcador de Posição do Rodapé 5">
             <a:extLst>
               <a:ext uri="{FF2B5EF4-FFF2-40B4-BE49-F238E27FC236}">
-                <a16:creationId xmlns:a16="http://schemas.microsoft.com/office/drawing/2014/main" id="{B7079343-28E1-E746-EAF8-0D83642354E9}"/>
+                <a16:creationId xmlns:a16="http://schemas.microsoft.com/office/drawing/2014/main" id="{67EF8E43-3932-355B-008F-57AB10385945}"/>
               </a:ext>
             </a:extLst>
           </p:cNvPr>
@@ -2402,7 +2988,7 @@
           <a:bodyPr/>
           <a:lstStyle/>
           <a:p>
-            <a:endParaRPr lang="pt-PT"/>
+            <a:endParaRPr lang="en-US" dirty="0"/>
           </a:p>
         </p:txBody>
       </p:sp>
@@ -2411,7 +2997,7 @@
           <p:cNvPr id="7" name="Marcador de Posição do Número do Diapositivo 6">
             <a:extLst>
               <a:ext uri="{FF2B5EF4-FFF2-40B4-BE49-F238E27FC236}">
-                <a16:creationId xmlns:a16="http://schemas.microsoft.com/office/drawing/2014/main" id="{ECF02AE5-F04B-16F2-917D-8EDBE4C68538}"/>
+                <a16:creationId xmlns:a16="http://schemas.microsoft.com/office/drawing/2014/main" id="{89FD562F-711C-A515-1D7B-AFDCC6221AC3}"/>
               </a:ext>
             </a:extLst>
           </p:cNvPr>
@@ -2427,24 +3013,25 @@
           <a:bodyPr/>
           <a:lstStyle/>
           <a:p>
-            <a:fld id="{E380EDD8-04CB-40D0-ACE7-096DF763EA4B}" type="slidenum">
-              <a:rPr lang="pt-PT" smtClean="0"/>
+            <a:fld id="{70C12960-6E85-460F-B6E3-5B82CB31AF3D}" type="slidenum">
+              <a:rPr lang="en-US" smtClean="0"/>
               <a:t>‹nº›</a:t>
             </a:fld>
-            <a:endParaRPr lang="pt-PT"/>
+            <a:endParaRPr lang="en-US"/>
           </a:p>
         </p:txBody>
       </p:sp>
     </p:spTree>
     <p:extLst>
       <p:ext uri="{BB962C8B-B14F-4D97-AF65-F5344CB8AC3E}">
-        <p14:creationId xmlns:p14="http://schemas.microsoft.com/office/powerpoint/2010/main" val="3551394267"/>
+        <p14:creationId xmlns:p14="http://schemas.microsoft.com/office/powerpoint/2010/main" val="982669990"/>
       </p:ext>
     </p:extLst>
   </p:cSld>
   <p:clrMapOvr>
     <a:masterClrMapping/>
   </p:clrMapOvr>
+  <p:hf sldNum="0" hdr="0" ftr="0" dt="0"/>
 </p:sldLayout>
 </file>
 
@@ -2470,7 +3057,7 @@
           <p:cNvPr id="2" name="Título 1">
             <a:extLst>
               <a:ext uri="{FF2B5EF4-FFF2-40B4-BE49-F238E27FC236}">
-                <a16:creationId xmlns:a16="http://schemas.microsoft.com/office/drawing/2014/main" id="{E5027B05-9AB8-50F9-21E2-9A8712635EC4}"/>
+                <a16:creationId xmlns:a16="http://schemas.microsoft.com/office/drawing/2014/main" id="{6FF75A2E-E7FD-4116-AA25-3F67487DDB64}"/>
               </a:ext>
             </a:extLst>
           </p:cNvPr>
@@ -2507,7 +3094,7 @@
           <p:cNvPr id="3" name="Marcador de Posição da Imagem 2">
             <a:extLst>
               <a:ext uri="{FF2B5EF4-FFF2-40B4-BE49-F238E27FC236}">
-                <a16:creationId xmlns:a16="http://schemas.microsoft.com/office/drawing/2014/main" id="{080867AC-75C8-07CE-AFFC-7DCCCE1EE07C}"/>
+                <a16:creationId xmlns:a16="http://schemas.microsoft.com/office/drawing/2014/main" id="{B43BBAD4-4C03-049F-DA9F-3E6F0DCBA4F0}"/>
               </a:ext>
             </a:extLst>
           </p:cNvPr>
@@ -2574,7 +3161,7 @@
           <p:cNvPr id="4" name="Marcador de Posição do Texto 3">
             <a:extLst>
               <a:ext uri="{FF2B5EF4-FFF2-40B4-BE49-F238E27FC236}">
-                <a16:creationId xmlns:a16="http://schemas.microsoft.com/office/drawing/2014/main" id="{66DFC293-FBAD-239B-D7FC-0A1EDA074ABE}"/>
+                <a16:creationId xmlns:a16="http://schemas.microsoft.com/office/drawing/2014/main" id="{503EE287-79A5-650B-BFEE-0E41E45FAB02}"/>
               </a:ext>
             </a:extLst>
           </p:cNvPr>
@@ -2645,7 +3232,7 @@
           <p:cNvPr id="5" name="Marcador de Posição da Data 4">
             <a:extLst>
               <a:ext uri="{FF2B5EF4-FFF2-40B4-BE49-F238E27FC236}">
-                <a16:creationId xmlns:a16="http://schemas.microsoft.com/office/drawing/2014/main" id="{2EF0C8C4-1F03-C0B9-5262-9E28B15F2D53}"/>
+                <a16:creationId xmlns:a16="http://schemas.microsoft.com/office/drawing/2014/main" id="{E0A88BC6-685F-3ED8-380B-4BB57B29D05F}"/>
               </a:ext>
             </a:extLst>
           </p:cNvPr>
@@ -2661,11 +3248,11 @@
           <a:bodyPr/>
           <a:lstStyle/>
           <a:p>
-            <a:fld id="{A4392FC1-78AF-49F0-9C11-9F240922D893}" type="datetimeFigureOut">
-              <a:rPr lang="pt-PT" smtClean="0"/>
-              <a:t>28/04/2026</a:t>
+            <a:fld id="{7DA38F49-B3E2-4BF0-BEC7-C30D34ABBB8D}" type="datetime1">
+              <a:rPr lang="en-US" smtClean="0"/>
+              <a:t>4/28/2026</a:t>
             </a:fld>
-            <a:endParaRPr lang="pt-PT"/>
+            <a:endParaRPr lang="en-US"/>
           </a:p>
         </p:txBody>
       </p:sp>
@@ -2674,7 +3261,7 @@
           <p:cNvPr id="6" name="Marcador de Posição do Rodapé 5">
             <a:extLst>
               <a:ext uri="{FF2B5EF4-FFF2-40B4-BE49-F238E27FC236}">
-                <a16:creationId xmlns:a16="http://schemas.microsoft.com/office/drawing/2014/main" id="{0340210A-223F-B681-0DA6-E834C243F117}"/>
+                <a16:creationId xmlns:a16="http://schemas.microsoft.com/office/drawing/2014/main" id="{35BF7D1D-DC61-65F9-29BE-DF0A239E6ED4}"/>
               </a:ext>
             </a:extLst>
           </p:cNvPr>
@@ -2690,7 +3277,7 @@
           <a:bodyPr/>
           <a:lstStyle/>
           <a:p>
-            <a:endParaRPr lang="pt-PT"/>
+            <a:endParaRPr lang="en-US" dirty="0"/>
           </a:p>
         </p:txBody>
       </p:sp>
@@ -2699,7 +3286,7 @@
           <p:cNvPr id="7" name="Marcador de Posição do Número do Diapositivo 6">
             <a:extLst>
               <a:ext uri="{FF2B5EF4-FFF2-40B4-BE49-F238E27FC236}">
-                <a16:creationId xmlns:a16="http://schemas.microsoft.com/office/drawing/2014/main" id="{8E072D83-6D61-8E7C-AA04-F27137A2C62D}"/>
+                <a16:creationId xmlns:a16="http://schemas.microsoft.com/office/drawing/2014/main" id="{51BA090C-EF20-6883-985C-603E422071C3}"/>
               </a:ext>
             </a:extLst>
           </p:cNvPr>
@@ -2715,24 +3302,25 @@
           <a:bodyPr/>
           <a:lstStyle/>
           <a:p>
-            <a:fld id="{E380EDD8-04CB-40D0-ACE7-096DF763EA4B}" type="slidenum">
-              <a:rPr lang="pt-PT" smtClean="0"/>
+            <a:fld id="{70C12960-6E85-460F-B6E3-5B82CB31AF3D}" type="slidenum">
+              <a:rPr lang="en-US" smtClean="0"/>
               <a:t>‹nº›</a:t>
             </a:fld>
-            <a:endParaRPr lang="pt-PT"/>
+            <a:endParaRPr lang="en-US"/>
           </a:p>
         </p:txBody>
       </p:sp>
     </p:spTree>
     <p:extLst>
       <p:ext uri="{BB962C8B-B14F-4D97-AF65-F5344CB8AC3E}">
-        <p14:creationId xmlns:p14="http://schemas.microsoft.com/office/powerpoint/2010/main" val="516438867"/>
+        <p14:creationId xmlns:p14="http://schemas.microsoft.com/office/powerpoint/2010/main" val="3715662746"/>
       </p:ext>
     </p:extLst>
   </p:cSld>
   <p:clrMapOvr>
     <a:masterClrMapping/>
   </p:clrMapOvr>
+  <p:hf sldNum="0" hdr="0" ftr="0" dt="0"/>
 </p:sldLayout>
 </file>
 
@@ -2763,7 +3351,7 @@
           <p:cNvPr id="2" name="Marcador de Posição do Título 1">
             <a:extLst>
               <a:ext uri="{FF2B5EF4-FFF2-40B4-BE49-F238E27FC236}">
-                <a16:creationId xmlns:a16="http://schemas.microsoft.com/office/drawing/2014/main" id="{EA6836C0-9AB7-C42B-3689-F86EC863B4D9}"/>
+                <a16:creationId xmlns:a16="http://schemas.microsoft.com/office/drawing/2014/main" id="{3D174D76-E0A6-1B62-225B-62D42A333B2B}"/>
               </a:ext>
             </a:extLst>
           </p:cNvPr>
@@ -2801,7 +3389,7 @@
           <p:cNvPr id="3" name="Marcador de Posição do Texto 2">
             <a:extLst>
               <a:ext uri="{FF2B5EF4-FFF2-40B4-BE49-F238E27FC236}">
-                <a16:creationId xmlns:a16="http://schemas.microsoft.com/office/drawing/2014/main" id="{849091C5-1D52-CA7F-D0F5-6B60E7E87B02}"/>
+                <a16:creationId xmlns:a16="http://schemas.microsoft.com/office/drawing/2014/main" id="{BA2ADC7B-0E8A-CC38-30C1-4BC73E64AC73}"/>
               </a:ext>
             </a:extLst>
           </p:cNvPr>
@@ -2868,7 +3456,7 @@
           <p:cNvPr id="4" name="Marcador de Posição da Data 3">
             <a:extLst>
               <a:ext uri="{FF2B5EF4-FFF2-40B4-BE49-F238E27FC236}">
-                <a16:creationId xmlns:a16="http://schemas.microsoft.com/office/drawing/2014/main" id="{60F8BDE6-1793-8897-7FBD-BDE7A44A5521}"/>
+                <a16:creationId xmlns:a16="http://schemas.microsoft.com/office/drawing/2014/main" id="{4B147179-AAB0-1091-92F1-767F7132CB54}"/>
               </a:ext>
             </a:extLst>
           </p:cNvPr>
@@ -2902,11 +3490,11 @@
             </a:lvl1pPr>
           </a:lstStyle>
           <a:p>
-            <a:fld id="{A4392FC1-78AF-49F0-9C11-9F240922D893}" type="datetimeFigureOut">
-              <a:rPr lang="pt-PT" smtClean="0"/>
-              <a:t>28/04/2026</a:t>
+            <a:fld id="{7DA38F49-B3E2-4BF0-BEC7-C30D34ABBB8D}" type="datetime1">
+              <a:rPr lang="en-US" smtClean="0"/>
+              <a:t>4/28/2026</a:t>
             </a:fld>
-            <a:endParaRPr lang="pt-PT"/>
+            <a:endParaRPr lang="en-US"/>
           </a:p>
         </p:txBody>
       </p:sp>
@@ -2915,7 +3503,7 @@
           <p:cNvPr id="5" name="Marcador de Posição do Rodapé 4">
             <a:extLst>
               <a:ext uri="{FF2B5EF4-FFF2-40B4-BE49-F238E27FC236}">
-                <a16:creationId xmlns:a16="http://schemas.microsoft.com/office/drawing/2014/main" id="{CBE16782-8D4E-6C97-271E-773B97553831}"/>
+                <a16:creationId xmlns:a16="http://schemas.microsoft.com/office/drawing/2014/main" id="{D2B7C036-F9E4-13C9-1A14-40DAC27D3990}"/>
               </a:ext>
             </a:extLst>
           </p:cNvPr>
@@ -2949,7 +3537,7 @@
             </a:lvl1pPr>
           </a:lstStyle>
           <a:p>
-            <a:endParaRPr lang="pt-PT"/>
+            <a:endParaRPr lang="en-US" dirty="0"/>
           </a:p>
         </p:txBody>
       </p:sp>
@@ -2958,7 +3546,7 @@
           <p:cNvPr id="6" name="Marcador de Posição do Número do Diapositivo 5">
             <a:extLst>
               <a:ext uri="{FF2B5EF4-FFF2-40B4-BE49-F238E27FC236}">
-                <a16:creationId xmlns:a16="http://schemas.microsoft.com/office/drawing/2014/main" id="{AD1DFE1A-E57E-918B-DB78-87944A7FE08E}"/>
+                <a16:creationId xmlns:a16="http://schemas.microsoft.com/office/drawing/2014/main" id="{864D3A57-CE33-25E1-4277-3CB73FDD11BE}"/>
               </a:ext>
             </a:extLst>
           </p:cNvPr>
@@ -2992,35 +3580,36 @@
             </a:lvl1pPr>
           </a:lstStyle>
           <a:p>
-            <a:fld id="{E380EDD8-04CB-40D0-ACE7-096DF763EA4B}" type="slidenum">
-              <a:rPr lang="pt-PT" smtClean="0"/>
+            <a:fld id="{70C12960-6E85-460F-B6E3-5B82CB31AF3D}" type="slidenum">
+              <a:rPr lang="en-US" smtClean="0"/>
               <a:t>‹nº›</a:t>
             </a:fld>
-            <a:endParaRPr lang="pt-PT"/>
+            <a:endParaRPr lang="en-US"/>
           </a:p>
         </p:txBody>
       </p:sp>
     </p:spTree>
     <p:extLst>
       <p:ext uri="{BB962C8B-B14F-4D97-AF65-F5344CB8AC3E}">
-        <p14:creationId xmlns:p14="http://schemas.microsoft.com/office/powerpoint/2010/main" val="3575647126"/>
+        <p14:creationId xmlns:p14="http://schemas.microsoft.com/office/powerpoint/2010/main" val="2138304286"/>
       </p:ext>
     </p:extLst>
   </p:cSld>
   <p:clrMap bg1="lt1" tx1="dk1" bg2="lt2" tx2="dk2" accent1="accent1" accent2="accent2" accent3="accent3" accent4="accent4" accent5="accent5" accent6="accent6" hlink="hlink" folHlink="folHlink"/>
   <p:sldLayoutIdLst>
-    <p:sldLayoutId id="2147483649" r:id="rId1"/>
-    <p:sldLayoutId id="2147483650" r:id="rId2"/>
-    <p:sldLayoutId id="2147483651" r:id="rId3"/>
-    <p:sldLayoutId id="2147483652" r:id="rId4"/>
-    <p:sldLayoutId id="2147483653" r:id="rId5"/>
-    <p:sldLayoutId id="2147483654" r:id="rId6"/>
-    <p:sldLayoutId id="2147483655" r:id="rId7"/>
-    <p:sldLayoutId id="2147483656" r:id="rId8"/>
-    <p:sldLayoutId id="2147483657" r:id="rId9"/>
-    <p:sldLayoutId id="2147483658" r:id="rId10"/>
-    <p:sldLayoutId id="2147483659" r:id="rId11"/>
+    <p:sldLayoutId id="2147483690" r:id="rId1"/>
+    <p:sldLayoutId id="2147483691" r:id="rId2"/>
+    <p:sldLayoutId id="2147483692" r:id="rId3"/>
+    <p:sldLayoutId id="2147483693" r:id="rId4"/>
+    <p:sldLayoutId id="2147483694" r:id="rId5"/>
+    <p:sldLayoutId id="2147483695" r:id="rId6"/>
+    <p:sldLayoutId id="2147483696" r:id="rId7"/>
+    <p:sldLayoutId id="2147483697" r:id="rId8"/>
+    <p:sldLayoutId id="2147483698" r:id="rId9"/>
+    <p:sldLayoutId id="2147483699" r:id="rId10"/>
+    <p:sldLayoutId id="2147483700" r:id="rId11"/>
   </p:sldLayoutIdLst>
+  <p:hf sldNum="0" hdr="0" ftr="0" dt="0"/>
   <p:txStyles>
     <p:titleStyle>
       <a:lvl1pPr algn="l" defTabSz="914400" rtl="0" eaLnBrk="1" latinLnBrk="0" hangingPunct="1">
@@ -3307,6 +3896,14 @@
 <file path=ppt/slides/slide1.xml><?xml version="1.0" encoding="utf-8"?>
 <p:sld xmlns:a="http://schemas.openxmlformats.org/drawingml/2006/main" xmlns:r="http://schemas.openxmlformats.org/officeDocument/2006/relationships" xmlns:p="http://schemas.openxmlformats.org/presentationml/2006/main">
   <p:cSld>
+    <p:bg>
+      <p:bgPr>
+        <a:solidFill>
+          <a:schemeClr val="bg1"/>
+        </a:solidFill>
+        <a:effectLst/>
+      </p:bgPr>
+    </p:bg>
     <p:spTree>
       <p:nvGrpSpPr>
         <p:cNvPr id="1" name=""/>
@@ -3337,12 +3934,35 @@
             <p:ph type="ctrTitle"/>
           </p:nvPr>
         </p:nvSpPr>
-        <p:spPr/>
-        <p:txBody>
-          <a:bodyPr/>
-          <a:lstStyle/>
-          <a:p>
-            <a:endParaRPr lang="pt-PT"/>
+        <p:spPr>
+          <a:xfrm>
+            <a:off x="661915" y="2071467"/>
+            <a:ext cx="10686198" cy="1897137"/>
+          </a:xfrm>
+        </p:spPr>
+        <p:txBody>
+          <a:bodyPr anchor="t">
+            <a:normAutofit/>
+          </a:bodyPr>
+          <a:lstStyle/>
+          <a:p>
+            <a:pPr>
+              <a:lnSpc>
+                <a:spcPct val="90000"/>
+              </a:lnSpc>
+            </a:pPr>
+            <a:r>
+              <a:rPr lang="pt-PT" sz="4200" dirty="0"/>
+              <a:t>Eficácia da Intervenção Digital </a:t>
+            </a:r>
+            <a:r>
+              <a:rPr lang="pt-PT" sz="4200" dirty="0" err="1"/>
+              <a:t>MindMove</a:t>
+            </a:r>
+            <a:r>
+              <a:rPr lang="pt-PT" sz="4200" dirty="0"/>
+              <a:t> na Saúde Mental de Universitários</a:t>
+            </a:r>
           </a:p>
         </p:txBody>
       </p:sp>
@@ -3362,12 +3982,140 @@
             <p:ph type="subTitle" idx="1"/>
           </p:nvPr>
         </p:nvSpPr>
-        <p:spPr/>
-        <p:txBody>
-          <a:bodyPr/>
-          <a:lstStyle/>
-          <a:p>
-            <a:endParaRPr lang="pt-PT"/>
+        <p:spPr>
+          <a:xfrm>
+            <a:off x="661915" y="3493467"/>
+            <a:ext cx="10686198" cy="950275"/>
+          </a:xfrm>
+        </p:spPr>
+        <p:txBody>
+          <a:bodyPr anchor="t">
+            <a:normAutofit/>
+          </a:bodyPr>
+          <a:lstStyle/>
+          <a:p>
+            <a:r>
+              <a:rPr lang="pt-PT" dirty="0" err="1"/>
+              <a:t>MindMove</a:t>
+            </a:r>
+            <a:r>
+              <a:rPr lang="pt-PT" dirty="0"/>
+              <a:t>: Ensaio Clínico em Saúde Mental Digital</a:t>
+            </a:r>
+          </a:p>
+        </p:txBody>
+      </p:sp>
+      <p:pic>
+        <p:nvPicPr>
+          <p:cNvPr id="1028" name="Picture 4" descr="Faculty of Medicine - University of Porto">
+            <a:extLst>
+              <a:ext uri="{FF2B5EF4-FFF2-40B4-BE49-F238E27FC236}">
+                <a16:creationId xmlns:a16="http://schemas.microsoft.com/office/drawing/2014/main" id="{639F4097-F9F9-7805-5185-50A8AE3A89A3}"/>
+              </a:ext>
+            </a:extLst>
+          </p:cNvPr>
+          <p:cNvPicPr>
+            <a:picLocks noChangeAspect="1" noChangeArrowheads="1"/>
+          </p:cNvPicPr>
+          <p:nvPr/>
+        </p:nvPicPr>
+        <p:blipFill>
+          <a:blip r:embed="rId2">
+            <a:extLst>
+              <a:ext uri="{28A0092B-C50C-407E-A947-70E740481C1C}">
+                <a14:useLocalDpi xmlns:a14="http://schemas.microsoft.com/office/drawing/2010/main" val="0"/>
+              </a:ext>
+            </a:extLst>
+          </a:blip>
+          <a:stretch>
+            <a:fillRect/>
+          </a:stretch>
+        </p:blipFill>
+        <p:spPr bwMode="auto">
+          <a:xfrm>
+            <a:off x="133746" y="468459"/>
+            <a:ext cx="2673254" cy="1069301"/>
+          </a:xfrm>
+          <a:prstGeom prst="rect">
+            <a:avLst/>
+          </a:prstGeom>
+          <a:noFill/>
+          <a:extLst>
+            <a:ext uri="{909E8E84-426E-40DD-AFC4-6F175D3DCCD1}">
+              <a14:hiddenFill xmlns:a14="http://schemas.microsoft.com/office/drawing/2010/main">
+                <a:solidFill>
+                  <a:srgbClr val="FFFFFF"/>
+                </a:solidFill>
+              </a14:hiddenFill>
+            </a:ext>
+          </a:extLst>
+        </p:spPr>
+      </p:pic>
+      <p:sp>
+        <p:nvSpPr>
+          <p:cNvPr id="10" name="CaixaDeTexto 9">
+            <a:extLst>
+              <a:ext uri="{FF2B5EF4-FFF2-40B4-BE49-F238E27FC236}">
+                <a16:creationId xmlns:a16="http://schemas.microsoft.com/office/drawing/2014/main" id="{0B83327B-5780-CA19-0F3B-A91E31244EFE}"/>
+              </a:ext>
+            </a:extLst>
+          </p:cNvPr>
+          <p:cNvSpPr txBox="1"/>
+          <p:nvPr/>
+        </p:nvSpPr>
+        <p:spPr>
+          <a:xfrm>
+            <a:off x="661915" y="5098408"/>
+            <a:ext cx="6097136" cy="1477328"/>
+          </a:xfrm>
+          <a:prstGeom prst="rect">
+            <a:avLst/>
+          </a:prstGeom>
+          <a:noFill/>
+        </p:spPr>
+        <p:txBody>
+          <a:bodyPr wrap="square">
+            <a:spAutoFit/>
+          </a:bodyPr>
+          <a:lstStyle/>
+          <a:p>
+            <a:r>
+              <a:rPr lang="pt-PT" dirty="0"/>
+              <a:t>Autores:</a:t>
+            </a:r>
+            <a:br>
+              <a:rPr lang="pt-PT" dirty="0"/>
+            </a:br>
+            <a:r>
+              <a:rPr lang="pt-PT" dirty="0"/>
+              <a:t>Ana Moreira</a:t>
+            </a:r>
+            <a:br>
+              <a:rPr lang="pt-PT" dirty="0"/>
+            </a:br>
+            <a:r>
+              <a:rPr lang="pt-PT" dirty="0"/>
+              <a:t>Flávio Vieira</a:t>
+            </a:r>
+            <a:br>
+              <a:rPr lang="pt-PT" dirty="0"/>
+            </a:br>
+            <a:r>
+              <a:rPr lang="pt-PT" dirty="0"/>
+              <a:t>Gabriela Carneiro</a:t>
+            </a:r>
+            <a:br>
+              <a:rPr lang="pt-PT" dirty="0"/>
+            </a:br>
+            <a:r>
+              <a:rPr lang="pt-PT" dirty="0"/>
+              <a:t>Maria Leonor </a:t>
+            </a:r>
+            <a:r>
+              <a:rPr lang="pt-PT" dirty="0" err="1"/>
+              <a:t>Fernades</a:t>
+            </a:r>
+            <a:endParaRPr lang="pt-PT" dirty="0"/>
           </a:p>
         </p:txBody>
       </p:sp>
@@ -3381,6 +4129,98 @@
   <p:clrMapOvr>
     <a:masterClrMapping/>
   </p:clrMapOvr>
+  <p:timing>
+    <p:tnLst>
+      <p:par>
+        <p:cTn id="1" dur="indefinite" restart="never" nodeType="tmRoot">
+          <p:childTnLst>
+            <p:seq concurrent="1" nextAc="seek">
+              <p:cTn id="2" dur="indefinite" nodeType="mainSeq">
+                <p:childTnLst>
+                  <p:par>
+                    <p:cTn id="3" fill="hold">
+                      <p:stCondLst>
+                        <p:cond delay="indefinite"/>
+                        <p:cond evt="onBegin" delay="0">
+                          <p:tn val="2"/>
+                        </p:cond>
+                      </p:stCondLst>
+                      <p:childTnLst>
+                        <p:par>
+                          <p:cTn id="4" fill="hold">
+                            <p:stCondLst>
+                              <p:cond delay="0"/>
+                            </p:stCondLst>
+                            <p:childTnLst>
+                              <p:par>
+                                <p:cTn id="5" presetID="10" presetClass="entr" presetSubtype="0" fill="hold" grpId="0" nodeType="withEffect">
+                                  <p:stCondLst>
+                                    <p:cond delay="1000"/>
+                                  </p:stCondLst>
+                                  <p:iterate type="lt">
+                                    <p:tmPct val="10000"/>
+                                  </p:iterate>
+                                  <p:childTnLst>
+                                    <p:set>
+                                      <p:cBhvr>
+                                        <p:cTn id="6" dur="1" fill="hold">
+                                          <p:stCondLst>
+                                            <p:cond delay="0"/>
+                                          </p:stCondLst>
+                                        </p:cTn>
+                                        <p:tgtEl>
+                                          <p:spTgt spid="2"/>
+                                        </p:tgtEl>
+                                        <p:attrNameLst>
+                                          <p:attrName>style.visibility</p:attrName>
+                                        </p:attrNameLst>
+                                      </p:cBhvr>
+                                      <p:to>
+                                        <p:strVal val="visible"/>
+                                      </p:to>
+                                    </p:set>
+                                    <p:animEffect transition="in" filter="fade">
+                                      <p:cBhvr>
+                                        <p:cTn id="7" dur="400"/>
+                                        <p:tgtEl>
+                                          <p:spTgt spid="2"/>
+                                        </p:tgtEl>
+                                      </p:cBhvr>
+                                    </p:animEffect>
+                                  </p:childTnLst>
+                                </p:cTn>
+                              </p:par>
+                            </p:childTnLst>
+                          </p:cTn>
+                        </p:par>
+                      </p:childTnLst>
+                    </p:cTn>
+                  </p:par>
+                </p:childTnLst>
+              </p:cTn>
+              <p:prevCondLst>
+                <p:cond evt="onPrev" delay="0">
+                  <p:tgtEl>
+                    <p:sldTgt/>
+                  </p:tgtEl>
+                </p:cond>
+              </p:prevCondLst>
+              <p:nextCondLst>
+                <p:cond evt="onNext" delay="0">
+                  <p:tgtEl>
+                    <p:sldTgt/>
+                  </p:tgtEl>
+                </p:cond>
+              </p:nextCondLst>
+            </p:seq>
+          </p:childTnLst>
+        </p:cTn>
+      </p:par>
+    </p:tnLst>
+    <p:bldLst>
+      <p:bldP spid="2" grpId="0"/>
+    </p:bldLst>
+  </p:timing>
 </p:sld>
 </file>
 

--- a/projeto_fp_tp10.pptx
+++ b/projeto_fp_tp10.pptx
@@ -6,6 +6,15 @@
   </p:sldMasterIdLst>
   <p:sldIdLst>
     <p:sldId id="256" r:id="rId2"/>
+    <p:sldId id="257" r:id="rId3"/>
+    <p:sldId id="258" r:id="rId4"/>
+    <p:sldId id="259" r:id="rId5"/>
+    <p:sldId id="260" r:id="rId6"/>
+    <p:sldId id="261" r:id="rId7"/>
+    <p:sldId id="262" r:id="rId8"/>
+    <p:sldId id="263" r:id="rId9"/>
+    <p:sldId id="264" r:id="rId10"/>
+    <p:sldId id="265" r:id="rId11"/>
   </p:sldIdLst>
   <p:sldSz cx="12192000" cy="6858000"/>
   <p:notesSz cx="6858000" cy="9144000"/>
@@ -119,13 +128,13 @@
 <pc:chgInfo xmlns:a="http://schemas.openxmlformats.org/drawingml/2006/main" xmlns:r="http://schemas.openxmlformats.org/officeDocument/2006/relationships" xmlns:ac="http://schemas.microsoft.com/office/drawing/2013/main/command" xmlns:pc="http://schemas.microsoft.com/office/powerpoint/2013/main/command">
   <pc:docChgLst>
     <pc:chgData name="Gabriela Carneiro" userId="038eca41cd8564ab" providerId="LiveId" clId="{D03F746D-BE5D-4789-93E6-42C6E52F57A2}"/>
-    <pc:docChg chg="undo custSel modSld addMainMaster delMainMaster">
-      <pc:chgData name="Gabriela Carneiro" userId="038eca41cd8564ab" providerId="LiveId" clId="{D03F746D-BE5D-4789-93E6-42C6E52F57A2}" dt="2026-04-28T19:29:07.359" v="234" actId="1076"/>
+    <pc:docChg chg="undo custSel addSld modSld addMainMaster delMainMaster">
+      <pc:chgData name="Gabriela Carneiro" userId="038eca41cd8564ab" providerId="LiveId" clId="{D03F746D-BE5D-4789-93E6-42C6E52F57A2}" dt="2026-04-28T20:37:07.666" v="443" actId="20577"/>
       <pc:docMkLst>
         <pc:docMk/>
       </pc:docMkLst>
       <pc:sldChg chg="addSp delSp modSp mod setBg modClrScheme addAnim delAnim delDesignElem chgLayout">
-        <pc:chgData name="Gabriela Carneiro" userId="038eca41cd8564ab" providerId="LiveId" clId="{D03F746D-BE5D-4789-93E6-42C6E52F57A2}" dt="2026-04-28T19:29:07.359" v="234" actId="1076"/>
+        <pc:chgData name="Gabriela Carneiro" userId="038eca41cd8564ab" providerId="LiveId" clId="{D03F746D-BE5D-4789-93E6-42C6E52F57A2}" dt="2026-04-28T20:13:32.243" v="237" actId="962"/>
         <pc:sldMkLst>
           <pc:docMk/>
           <pc:sldMk cId="334472207" sldId="256"/>
@@ -210,6 +219,14 @@
             <ac:picMk id="6" creationId="{E9EA455F-004B-8977-4D38-DFA54E3384C7}"/>
           </ac:picMkLst>
         </pc:picChg>
+        <pc:picChg chg="add mod">
+          <ac:chgData name="Gabriela Carneiro" userId="038eca41cd8564ab" providerId="LiveId" clId="{D03F746D-BE5D-4789-93E6-42C6E52F57A2}" dt="2026-04-28T20:13:32.243" v="237" actId="962"/>
+          <ac:picMkLst>
+            <pc:docMk/>
+            <pc:sldMk cId="334472207" sldId="256"/>
+            <ac:picMk id="12" creationId="{B1543DE4-892E-743A-3243-1BDD81B45FCB}"/>
+          </ac:picMkLst>
+        </pc:picChg>
         <pc:picChg chg="add del mod">
           <ac:chgData name="Gabriela Carneiro" userId="038eca41cd8564ab" providerId="LiveId" clId="{D03F746D-BE5D-4789-93E6-42C6E52F57A2}" dt="2026-04-28T19:28:00.762" v="227" actId="478"/>
           <ac:picMkLst>
@@ -258,6 +275,149 @@
             <ac:cxnSpMk id="1046" creationId="{59D7B6BE-A4E0-4483-BEC5-493AC3E5D2AD}"/>
           </ac:cxnSpMkLst>
         </pc:cxnChg>
+      </pc:sldChg>
+      <pc:sldChg chg="modSp new mod">
+        <pc:chgData name="Gabriela Carneiro" userId="038eca41cd8564ab" providerId="LiveId" clId="{D03F746D-BE5D-4789-93E6-42C6E52F57A2}" dt="2026-04-28T20:17:43.937" v="281" actId="20577"/>
+        <pc:sldMkLst>
+          <pc:docMk/>
+          <pc:sldMk cId="4265899404" sldId="257"/>
+        </pc:sldMkLst>
+        <pc:spChg chg="mod">
+          <ac:chgData name="Gabriela Carneiro" userId="038eca41cd8564ab" providerId="LiveId" clId="{D03F746D-BE5D-4789-93E6-42C6E52F57A2}" dt="2026-04-28T20:17:43.937" v="281" actId="20577"/>
+          <ac:spMkLst>
+            <pc:docMk/>
+            <pc:sldMk cId="4265899404" sldId="257"/>
+            <ac:spMk id="2" creationId="{3175DD11-AAE8-AF69-175F-BA393B81FEEA}"/>
+          </ac:spMkLst>
+        </pc:spChg>
+        <pc:spChg chg="mod">
+          <ac:chgData name="Gabriela Carneiro" userId="038eca41cd8564ab" providerId="LiveId" clId="{D03F746D-BE5D-4789-93E6-42C6E52F57A2}" dt="2026-04-28T20:14:01.851" v="273" actId="20577"/>
+          <ac:spMkLst>
+            <pc:docMk/>
+            <pc:sldMk cId="4265899404" sldId="257"/>
+            <ac:spMk id="3" creationId="{AF18BF26-25E5-07D1-5825-0816A9924346}"/>
+          </ac:spMkLst>
+        </pc:spChg>
+      </pc:sldChg>
+      <pc:sldChg chg="modSp add mod">
+        <pc:chgData name="Gabriela Carneiro" userId="038eca41cd8564ab" providerId="LiveId" clId="{D03F746D-BE5D-4789-93E6-42C6E52F57A2}" dt="2026-04-28T20:18:04.224" v="299" actId="20577"/>
+        <pc:sldMkLst>
+          <pc:docMk/>
+          <pc:sldMk cId="3171773370" sldId="258"/>
+        </pc:sldMkLst>
+        <pc:spChg chg="mod">
+          <ac:chgData name="Gabriela Carneiro" userId="038eca41cd8564ab" providerId="LiveId" clId="{D03F746D-BE5D-4789-93E6-42C6E52F57A2}" dt="2026-04-28T20:18:04.224" v="299" actId="20577"/>
+          <ac:spMkLst>
+            <pc:docMk/>
+            <pc:sldMk cId="3171773370" sldId="258"/>
+            <ac:spMk id="2" creationId="{DEE1E2DE-4AD9-AD89-5DC8-3A2F0D0360E3}"/>
+          </ac:spMkLst>
+        </pc:spChg>
+      </pc:sldChg>
+      <pc:sldChg chg="modSp new mod">
+        <pc:chgData name="Gabriela Carneiro" userId="038eca41cd8564ab" providerId="LiveId" clId="{D03F746D-BE5D-4789-93E6-42C6E52F57A2}" dt="2026-04-28T20:18:17.261" v="317" actId="20577"/>
+        <pc:sldMkLst>
+          <pc:docMk/>
+          <pc:sldMk cId="1439218118" sldId="259"/>
+        </pc:sldMkLst>
+        <pc:spChg chg="mod">
+          <ac:chgData name="Gabriela Carneiro" userId="038eca41cd8564ab" providerId="LiveId" clId="{D03F746D-BE5D-4789-93E6-42C6E52F57A2}" dt="2026-04-28T20:18:17.261" v="317" actId="20577"/>
+          <ac:spMkLst>
+            <pc:docMk/>
+            <pc:sldMk cId="1439218118" sldId="259"/>
+            <ac:spMk id="2" creationId="{1D87031A-95F2-7260-23DB-612231579116}"/>
+          </ac:spMkLst>
+        </pc:spChg>
+      </pc:sldChg>
+      <pc:sldChg chg="modSp new mod">
+        <pc:chgData name="Gabriela Carneiro" userId="038eca41cd8564ab" providerId="LiveId" clId="{D03F746D-BE5D-4789-93E6-42C6E52F57A2}" dt="2026-04-28T20:18:27.735" v="329" actId="20577"/>
+        <pc:sldMkLst>
+          <pc:docMk/>
+          <pc:sldMk cId="4267865674" sldId="260"/>
+        </pc:sldMkLst>
+        <pc:spChg chg="mod">
+          <ac:chgData name="Gabriela Carneiro" userId="038eca41cd8564ab" providerId="LiveId" clId="{D03F746D-BE5D-4789-93E6-42C6E52F57A2}" dt="2026-04-28T20:18:27.735" v="329" actId="20577"/>
+          <ac:spMkLst>
+            <pc:docMk/>
+            <pc:sldMk cId="4267865674" sldId="260"/>
+            <ac:spMk id="2" creationId="{37573BB9-D4B1-2203-CD10-6B57645B337F}"/>
+          </ac:spMkLst>
+        </pc:spChg>
+      </pc:sldChg>
+      <pc:sldChg chg="modSp new mod">
+        <pc:chgData name="Gabriela Carneiro" userId="038eca41cd8564ab" providerId="LiveId" clId="{D03F746D-BE5D-4789-93E6-42C6E52F57A2}" dt="2026-04-28T20:35:46.549" v="353" actId="20577"/>
+        <pc:sldMkLst>
+          <pc:docMk/>
+          <pc:sldMk cId="2298641520" sldId="261"/>
+        </pc:sldMkLst>
+        <pc:spChg chg="mod">
+          <ac:chgData name="Gabriela Carneiro" userId="038eca41cd8564ab" providerId="LiveId" clId="{D03F746D-BE5D-4789-93E6-42C6E52F57A2}" dt="2026-04-28T20:35:46.549" v="353" actId="20577"/>
+          <ac:spMkLst>
+            <pc:docMk/>
+            <pc:sldMk cId="2298641520" sldId="261"/>
+            <ac:spMk id="2" creationId="{77D74BBF-F8B0-14AD-237E-DA7B7927390B}"/>
+          </ac:spMkLst>
+        </pc:spChg>
+      </pc:sldChg>
+      <pc:sldChg chg="modSp add mod">
+        <pc:chgData name="Gabriela Carneiro" userId="038eca41cd8564ab" providerId="LiveId" clId="{D03F746D-BE5D-4789-93E6-42C6E52F57A2}" dt="2026-04-28T20:36:10.624" v="367" actId="20577"/>
+        <pc:sldMkLst>
+          <pc:docMk/>
+          <pc:sldMk cId="3797817761" sldId="262"/>
+        </pc:sldMkLst>
+        <pc:spChg chg="mod">
+          <ac:chgData name="Gabriela Carneiro" userId="038eca41cd8564ab" providerId="LiveId" clId="{D03F746D-BE5D-4789-93E6-42C6E52F57A2}" dt="2026-04-28T20:36:10.624" v="367" actId="20577"/>
+          <ac:spMkLst>
+            <pc:docMk/>
+            <pc:sldMk cId="3797817761" sldId="262"/>
+            <ac:spMk id="2" creationId="{91D8C058-7E42-3F3C-4504-069FFF661988}"/>
+          </ac:spMkLst>
+        </pc:spChg>
+      </pc:sldChg>
+      <pc:sldChg chg="modSp add mod">
+        <pc:chgData name="Gabriela Carneiro" userId="038eca41cd8564ab" providerId="LiveId" clId="{D03F746D-BE5D-4789-93E6-42C6E52F57A2}" dt="2026-04-28T20:36:21.254" v="376" actId="20577"/>
+        <pc:sldMkLst>
+          <pc:docMk/>
+          <pc:sldMk cId="3489097716" sldId="263"/>
+        </pc:sldMkLst>
+        <pc:spChg chg="mod">
+          <ac:chgData name="Gabriela Carneiro" userId="038eca41cd8564ab" providerId="LiveId" clId="{D03F746D-BE5D-4789-93E6-42C6E52F57A2}" dt="2026-04-28T20:36:21.254" v="376" actId="20577"/>
+          <ac:spMkLst>
+            <pc:docMk/>
+            <pc:sldMk cId="3489097716" sldId="263"/>
+            <ac:spMk id="2" creationId="{4090D609-DBD7-B1A4-8A0F-867A1E911DA8}"/>
+          </ac:spMkLst>
+        </pc:spChg>
+      </pc:sldChg>
+      <pc:sldChg chg="modSp new mod">
+        <pc:chgData name="Gabriela Carneiro" userId="038eca41cd8564ab" providerId="LiveId" clId="{D03F746D-BE5D-4789-93E6-42C6E52F57A2}" dt="2026-04-28T20:36:55.033" v="415" actId="20577"/>
+        <pc:sldMkLst>
+          <pc:docMk/>
+          <pc:sldMk cId="1436765159" sldId="264"/>
+        </pc:sldMkLst>
+        <pc:spChg chg="mod">
+          <ac:chgData name="Gabriela Carneiro" userId="038eca41cd8564ab" providerId="LiveId" clId="{D03F746D-BE5D-4789-93E6-42C6E52F57A2}" dt="2026-04-28T20:36:55.033" v="415" actId="20577"/>
+          <ac:spMkLst>
+            <pc:docMk/>
+            <pc:sldMk cId="1436765159" sldId="264"/>
+            <ac:spMk id="2" creationId="{B4743D12-D2E9-BED2-1731-E6C8BBC4ACBF}"/>
+          </ac:spMkLst>
+        </pc:spChg>
+      </pc:sldChg>
+      <pc:sldChg chg="modSp new mod">
+        <pc:chgData name="Gabriela Carneiro" userId="038eca41cd8564ab" providerId="LiveId" clId="{D03F746D-BE5D-4789-93E6-42C6E52F57A2}" dt="2026-04-28T20:37:07.666" v="443" actId="20577"/>
+        <pc:sldMkLst>
+          <pc:docMk/>
+          <pc:sldMk cId="2199764213" sldId="265"/>
+        </pc:sldMkLst>
+        <pc:spChg chg="mod">
+          <ac:chgData name="Gabriela Carneiro" userId="038eca41cd8564ab" providerId="LiveId" clId="{D03F746D-BE5D-4789-93E6-42C6E52F57A2}" dt="2026-04-28T20:37:07.666" v="443" actId="20577"/>
+          <ac:spMkLst>
+            <pc:docMk/>
+            <pc:sldMk cId="2199764213" sldId="265"/>
+            <ac:spMk id="2" creationId="{EDEB4CE7-7D17-C27F-BCCA-AED2BD96B21D}"/>
+          </ac:spMkLst>
+        </pc:spChg>
       </pc:sldChg>
       <pc:sldMasterChg chg="add del addSldLayout delSldLayout">
         <pc:chgData name="Gabriela Carneiro" userId="038eca41cd8564ab" providerId="LiveId" clId="{D03F746D-BE5D-4789-93E6-42C6E52F57A2}" dt="2026-04-28T18:54:34.652" v="10" actId="26606"/>
@@ -4119,6 +4279,36 @@
           </a:p>
         </p:txBody>
       </p:sp>
+      <p:pic>
+        <p:nvPicPr>
+          <p:cNvPr id="12" name="Imagem 11" descr="The image is a presentation slide from the Faculty of Medicine at the University of Porto, featuring the Digital MindMove in Health project, with authors Ana Moreira, Flￃﾡvio Vieira, Gabriela Carneiro, and Maria Leonor Fernades.&#10;&#10;Os conteúdos gerados por IA podem estar incorretos.">
+            <a:extLst>
+              <a:ext uri="{FF2B5EF4-FFF2-40B4-BE49-F238E27FC236}">
+                <a16:creationId xmlns:a16="http://schemas.microsoft.com/office/drawing/2014/main" id="{B1543DE4-892E-743A-3243-1BDD81B45FCB}"/>
+              </a:ext>
+            </a:extLst>
+          </p:cNvPr>
+          <p:cNvPicPr>
+            <a:picLocks noChangeAspect="1"/>
+          </p:cNvPicPr>
+          <p:nvPr/>
+        </p:nvPicPr>
+        <p:blipFill>
+          <a:blip r:embed="rId3"/>
+          <a:stretch>
+            <a:fillRect/>
+          </a:stretch>
+        </p:blipFill>
+        <p:spPr>
+          <a:xfrm>
+            <a:off x="63689" y="0"/>
+            <a:ext cx="12064621" cy="6858000"/>
+          </a:xfrm>
+          <a:prstGeom prst="rect">
+            <a:avLst/>
+          </a:prstGeom>
+        </p:spPr>
+      </p:pic>
     </p:spTree>
     <p:extLst>
       <p:ext uri="{BB962C8B-B14F-4D97-AF65-F5344CB8AC3E}">
@@ -4221,6 +4411,789 @@
       <p:bldP spid="2" grpId="0"/>
     </p:bldLst>
   </p:timing>
+</p:sld>
+</file>
+
+<file path=ppt/slides/slide10.xml><?xml version="1.0" encoding="utf-8"?>
+<p:sld xmlns:a="http://schemas.openxmlformats.org/drawingml/2006/main" xmlns:r="http://schemas.openxmlformats.org/officeDocument/2006/relationships" xmlns:p="http://schemas.openxmlformats.org/presentationml/2006/main">
+  <p:cSld>
+    <p:spTree>
+      <p:nvGrpSpPr>
+        <p:cNvPr id="1" name=""/>
+        <p:cNvGrpSpPr/>
+        <p:nvPr/>
+      </p:nvGrpSpPr>
+      <p:grpSpPr>
+        <a:xfrm>
+          <a:off x="0" y="0"/>
+          <a:ext cx="0" cy="0"/>
+          <a:chOff x="0" y="0"/>
+          <a:chExt cx="0" cy="0"/>
+        </a:xfrm>
+      </p:grpSpPr>
+      <p:sp>
+        <p:nvSpPr>
+          <p:cNvPr id="2" name="Título 1">
+            <a:extLst>
+              <a:ext uri="{FF2B5EF4-FFF2-40B4-BE49-F238E27FC236}">
+                <a16:creationId xmlns:a16="http://schemas.microsoft.com/office/drawing/2014/main" id="{EDEB4CE7-7D17-C27F-BCCA-AED2BD96B21D}"/>
+              </a:ext>
+            </a:extLst>
+          </p:cNvPr>
+          <p:cNvSpPr>
+            <a:spLocks noGrp="1"/>
+          </p:cNvSpPr>
+          <p:nvPr>
+            <p:ph type="title"/>
+          </p:nvPr>
+        </p:nvSpPr>
+        <p:spPr/>
+        <p:txBody>
+          <a:bodyPr/>
+          <a:lstStyle/>
+          <a:p>
+            <a:r>
+              <a:rPr lang="pt-PT" dirty="0"/>
+              <a:t>Ética e proteção </a:t>
+            </a:r>
+            <a:r>
+              <a:rPr lang="pt-PT"/>
+              <a:t>de dados</a:t>
+            </a:r>
+          </a:p>
+        </p:txBody>
+      </p:sp>
+      <p:sp>
+        <p:nvSpPr>
+          <p:cNvPr id="3" name="Marcador de Posição de Conteúdo 2">
+            <a:extLst>
+              <a:ext uri="{FF2B5EF4-FFF2-40B4-BE49-F238E27FC236}">
+                <a16:creationId xmlns:a16="http://schemas.microsoft.com/office/drawing/2014/main" id="{697E5CD2-05E4-59E0-32EF-30F549E86D69}"/>
+              </a:ext>
+            </a:extLst>
+          </p:cNvPr>
+          <p:cNvSpPr>
+            <a:spLocks noGrp="1"/>
+          </p:cNvSpPr>
+          <p:nvPr>
+            <p:ph idx="1"/>
+          </p:nvPr>
+        </p:nvSpPr>
+        <p:spPr/>
+        <p:txBody>
+          <a:bodyPr/>
+          <a:lstStyle/>
+          <a:p>
+            <a:endParaRPr lang="pt-PT"/>
+          </a:p>
+        </p:txBody>
+      </p:sp>
+    </p:spTree>
+    <p:extLst>
+      <p:ext uri="{BB962C8B-B14F-4D97-AF65-F5344CB8AC3E}">
+        <p14:creationId xmlns:p14="http://schemas.microsoft.com/office/powerpoint/2010/main" val="2199764213"/>
+      </p:ext>
+    </p:extLst>
+  </p:cSld>
+  <p:clrMapOvr>
+    <a:masterClrMapping/>
+  </p:clrMapOvr>
+</p:sld>
+</file>
+
+<file path=ppt/slides/slide2.xml><?xml version="1.0" encoding="utf-8"?>
+<p:sld xmlns:a="http://schemas.openxmlformats.org/drawingml/2006/main" xmlns:r="http://schemas.openxmlformats.org/officeDocument/2006/relationships" xmlns:p="http://schemas.openxmlformats.org/presentationml/2006/main">
+  <p:cSld>
+    <p:spTree>
+      <p:nvGrpSpPr>
+        <p:cNvPr id="1" name=""/>
+        <p:cNvGrpSpPr/>
+        <p:nvPr/>
+      </p:nvGrpSpPr>
+      <p:grpSpPr>
+        <a:xfrm>
+          <a:off x="0" y="0"/>
+          <a:ext cx="0" cy="0"/>
+          <a:chOff x="0" y="0"/>
+          <a:chExt cx="0" cy="0"/>
+        </a:xfrm>
+      </p:grpSpPr>
+      <p:sp>
+        <p:nvSpPr>
+          <p:cNvPr id="2" name="Título 1">
+            <a:extLst>
+              <a:ext uri="{FF2B5EF4-FFF2-40B4-BE49-F238E27FC236}">
+                <a16:creationId xmlns:a16="http://schemas.microsoft.com/office/drawing/2014/main" id="{3175DD11-AAE8-AF69-175F-BA393B81FEEA}"/>
+              </a:ext>
+            </a:extLst>
+          </p:cNvPr>
+          <p:cNvSpPr>
+            <a:spLocks noGrp="1"/>
+          </p:cNvSpPr>
+          <p:nvPr>
+            <p:ph type="title"/>
+          </p:nvPr>
+        </p:nvSpPr>
+        <p:spPr/>
+        <p:txBody>
+          <a:bodyPr/>
+          <a:lstStyle/>
+          <a:p>
+            <a:r>
+              <a:rPr lang="pt-PT" dirty="0"/>
+              <a:t>Racional</a:t>
+            </a:r>
+          </a:p>
+        </p:txBody>
+      </p:sp>
+      <p:sp>
+        <p:nvSpPr>
+          <p:cNvPr id="3" name="Marcador de Posição de Conteúdo 2">
+            <a:extLst>
+              <a:ext uri="{FF2B5EF4-FFF2-40B4-BE49-F238E27FC236}">
+                <a16:creationId xmlns:a16="http://schemas.microsoft.com/office/drawing/2014/main" id="{AF18BF26-25E5-07D1-5825-0816A9924346}"/>
+              </a:ext>
+            </a:extLst>
+          </p:cNvPr>
+          <p:cNvSpPr>
+            <a:spLocks noGrp="1"/>
+          </p:cNvSpPr>
+          <p:nvPr>
+            <p:ph idx="1"/>
+          </p:nvPr>
+        </p:nvSpPr>
+        <p:spPr/>
+        <p:txBody>
+          <a:bodyPr/>
+          <a:lstStyle/>
+          <a:p>
+            <a:pPr marL="0" indent="0">
+              <a:buNone/>
+            </a:pPr>
+            <a:r>
+              <a:rPr lang="pt-PT" dirty="0"/>
+              <a:t>O que é </a:t>
+            </a:r>
+          </a:p>
+        </p:txBody>
+      </p:sp>
+    </p:spTree>
+    <p:extLst>
+      <p:ext uri="{BB962C8B-B14F-4D97-AF65-F5344CB8AC3E}">
+        <p14:creationId xmlns:p14="http://schemas.microsoft.com/office/powerpoint/2010/main" val="4265899404"/>
+      </p:ext>
+    </p:extLst>
+  </p:cSld>
+  <p:clrMapOvr>
+    <a:masterClrMapping/>
+  </p:clrMapOvr>
+</p:sld>
+</file>
+
+<file path=ppt/slides/slide3.xml><?xml version="1.0" encoding="utf-8"?>
+<p:sld xmlns:a="http://schemas.openxmlformats.org/drawingml/2006/main" xmlns:r="http://schemas.openxmlformats.org/officeDocument/2006/relationships" xmlns:p="http://schemas.openxmlformats.org/presentationml/2006/main">
+  <p:cSld>
+    <p:spTree>
+      <p:nvGrpSpPr>
+        <p:cNvPr id="1" name="">
+          <a:extLst>
+            <a:ext uri="{FF2B5EF4-FFF2-40B4-BE49-F238E27FC236}">
+              <a16:creationId xmlns:a16="http://schemas.microsoft.com/office/drawing/2014/main" id="{74681113-7C0D-9CB1-E4BF-A9FD279E7879}"/>
+            </a:ext>
+          </a:extLst>
+        </p:cNvPr>
+        <p:cNvGrpSpPr/>
+        <p:nvPr/>
+      </p:nvGrpSpPr>
+      <p:grpSpPr>
+        <a:xfrm>
+          <a:off x="0" y="0"/>
+          <a:ext cx="0" cy="0"/>
+          <a:chOff x="0" y="0"/>
+          <a:chExt cx="0" cy="0"/>
+        </a:xfrm>
+      </p:grpSpPr>
+      <p:sp>
+        <p:nvSpPr>
+          <p:cNvPr id="2" name="Título 1">
+            <a:extLst>
+              <a:ext uri="{FF2B5EF4-FFF2-40B4-BE49-F238E27FC236}">
+                <a16:creationId xmlns:a16="http://schemas.microsoft.com/office/drawing/2014/main" id="{DEE1E2DE-4AD9-AD89-5DC8-3A2F0D0360E3}"/>
+              </a:ext>
+            </a:extLst>
+          </p:cNvPr>
+          <p:cNvSpPr>
+            <a:spLocks noGrp="1"/>
+          </p:cNvSpPr>
+          <p:nvPr>
+            <p:ph type="title"/>
+          </p:nvPr>
+        </p:nvSpPr>
+        <p:spPr/>
+        <p:txBody>
+          <a:bodyPr/>
+          <a:lstStyle/>
+          <a:p>
+            <a:r>
+              <a:rPr lang="pt-PT" dirty="0"/>
+              <a:t>Objetivos</a:t>
+            </a:r>
+          </a:p>
+        </p:txBody>
+      </p:sp>
+      <p:sp>
+        <p:nvSpPr>
+          <p:cNvPr id="3" name="Marcador de Posição de Conteúdo 2">
+            <a:extLst>
+              <a:ext uri="{FF2B5EF4-FFF2-40B4-BE49-F238E27FC236}">
+                <a16:creationId xmlns:a16="http://schemas.microsoft.com/office/drawing/2014/main" id="{BDC72D86-3A31-7A3A-6AA8-53F401637844}"/>
+              </a:ext>
+            </a:extLst>
+          </p:cNvPr>
+          <p:cNvSpPr>
+            <a:spLocks noGrp="1"/>
+          </p:cNvSpPr>
+          <p:nvPr>
+            <p:ph idx="1"/>
+          </p:nvPr>
+        </p:nvSpPr>
+        <p:spPr/>
+        <p:txBody>
+          <a:bodyPr/>
+          <a:lstStyle/>
+          <a:p>
+            <a:pPr marL="0" indent="0">
+              <a:buNone/>
+            </a:pPr>
+            <a:r>
+              <a:rPr lang="pt-PT" dirty="0"/>
+              <a:t>O que é </a:t>
+            </a:r>
+          </a:p>
+        </p:txBody>
+      </p:sp>
+    </p:spTree>
+    <p:extLst>
+      <p:ext uri="{BB962C8B-B14F-4D97-AF65-F5344CB8AC3E}">
+        <p14:creationId xmlns:p14="http://schemas.microsoft.com/office/powerpoint/2010/main" val="3171773370"/>
+      </p:ext>
+    </p:extLst>
+  </p:cSld>
+  <p:clrMapOvr>
+    <a:masterClrMapping/>
+  </p:clrMapOvr>
+</p:sld>
+</file>
+
+<file path=ppt/slides/slide4.xml><?xml version="1.0" encoding="utf-8"?>
+<p:sld xmlns:a="http://schemas.openxmlformats.org/drawingml/2006/main" xmlns:r="http://schemas.openxmlformats.org/officeDocument/2006/relationships" xmlns:p="http://schemas.openxmlformats.org/presentationml/2006/main">
+  <p:cSld>
+    <p:spTree>
+      <p:nvGrpSpPr>
+        <p:cNvPr id="1" name=""/>
+        <p:cNvGrpSpPr/>
+        <p:nvPr/>
+      </p:nvGrpSpPr>
+      <p:grpSpPr>
+        <a:xfrm>
+          <a:off x="0" y="0"/>
+          <a:ext cx="0" cy="0"/>
+          <a:chOff x="0" y="0"/>
+          <a:chExt cx="0" cy="0"/>
+        </a:xfrm>
+      </p:grpSpPr>
+      <p:sp>
+        <p:nvSpPr>
+          <p:cNvPr id="2" name="Título 1">
+            <a:extLst>
+              <a:ext uri="{FF2B5EF4-FFF2-40B4-BE49-F238E27FC236}">
+                <a16:creationId xmlns:a16="http://schemas.microsoft.com/office/drawing/2014/main" id="{1D87031A-95F2-7260-23DB-612231579116}"/>
+              </a:ext>
+            </a:extLst>
+          </p:cNvPr>
+          <p:cNvSpPr>
+            <a:spLocks noGrp="1"/>
+          </p:cNvSpPr>
+          <p:nvPr>
+            <p:ph type="title"/>
+          </p:nvPr>
+        </p:nvSpPr>
+        <p:spPr/>
+        <p:txBody>
+          <a:bodyPr/>
+          <a:lstStyle/>
+          <a:p>
+            <a:r>
+              <a:rPr lang="pt-PT" dirty="0"/>
+              <a:t>Desenho de Estudo</a:t>
+            </a:r>
+          </a:p>
+        </p:txBody>
+      </p:sp>
+      <p:sp>
+        <p:nvSpPr>
+          <p:cNvPr id="3" name="Marcador de Posição de Conteúdo 2">
+            <a:extLst>
+              <a:ext uri="{FF2B5EF4-FFF2-40B4-BE49-F238E27FC236}">
+                <a16:creationId xmlns:a16="http://schemas.microsoft.com/office/drawing/2014/main" id="{187BCC5D-5278-926E-AA7E-F5C7F9B98261}"/>
+              </a:ext>
+            </a:extLst>
+          </p:cNvPr>
+          <p:cNvSpPr>
+            <a:spLocks noGrp="1"/>
+          </p:cNvSpPr>
+          <p:nvPr>
+            <p:ph idx="1"/>
+          </p:nvPr>
+        </p:nvSpPr>
+        <p:spPr/>
+        <p:txBody>
+          <a:bodyPr/>
+          <a:lstStyle/>
+          <a:p>
+            <a:endParaRPr lang="pt-PT"/>
+          </a:p>
+        </p:txBody>
+      </p:sp>
+    </p:spTree>
+    <p:extLst>
+      <p:ext uri="{BB962C8B-B14F-4D97-AF65-F5344CB8AC3E}">
+        <p14:creationId xmlns:p14="http://schemas.microsoft.com/office/powerpoint/2010/main" val="1439218118"/>
+      </p:ext>
+    </p:extLst>
+  </p:cSld>
+  <p:clrMapOvr>
+    <a:masterClrMapping/>
+  </p:clrMapOvr>
+</p:sld>
+</file>
+
+<file path=ppt/slides/slide5.xml><?xml version="1.0" encoding="utf-8"?>
+<p:sld xmlns:a="http://schemas.openxmlformats.org/drawingml/2006/main" xmlns:r="http://schemas.openxmlformats.org/officeDocument/2006/relationships" xmlns:p="http://schemas.openxmlformats.org/presentationml/2006/main">
+  <p:cSld>
+    <p:spTree>
+      <p:nvGrpSpPr>
+        <p:cNvPr id="1" name=""/>
+        <p:cNvGrpSpPr/>
+        <p:nvPr/>
+      </p:nvGrpSpPr>
+      <p:grpSpPr>
+        <a:xfrm>
+          <a:off x="0" y="0"/>
+          <a:ext cx="0" cy="0"/>
+          <a:chOff x="0" y="0"/>
+          <a:chExt cx="0" cy="0"/>
+        </a:xfrm>
+      </p:grpSpPr>
+      <p:sp>
+        <p:nvSpPr>
+          <p:cNvPr id="2" name="Título 1">
+            <a:extLst>
+              <a:ext uri="{FF2B5EF4-FFF2-40B4-BE49-F238E27FC236}">
+                <a16:creationId xmlns:a16="http://schemas.microsoft.com/office/drawing/2014/main" id="{37573BB9-D4B1-2203-CD10-6B57645B337F}"/>
+              </a:ext>
+            </a:extLst>
+          </p:cNvPr>
+          <p:cNvSpPr>
+            <a:spLocks noGrp="1"/>
+          </p:cNvSpPr>
+          <p:nvPr>
+            <p:ph type="title"/>
+          </p:nvPr>
+        </p:nvSpPr>
+        <p:spPr/>
+        <p:txBody>
+          <a:bodyPr/>
+          <a:lstStyle/>
+          <a:p>
+            <a:r>
+              <a:rPr lang="pt-PT" dirty="0" err="1"/>
+              <a:t>Metedologia</a:t>
+            </a:r>
+            <a:endParaRPr lang="pt-PT" dirty="0"/>
+          </a:p>
+        </p:txBody>
+      </p:sp>
+      <p:sp>
+        <p:nvSpPr>
+          <p:cNvPr id="3" name="Marcador de Posição de Conteúdo 2">
+            <a:extLst>
+              <a:ext uri="{FF2B5EF4-FFF2-40B4-BE49-F238E27FC236}">
+                <a16:creationId xmlns:a16="http://schemas.microsoft.com/office/drawing/2014/main" id="{77979BBC-F16A-9938-9523-52DCDAA663B4}"/>
+              </a:ext>
+            </a:extLst>
+          </p:cNvPr>
+          <p:cNvSpPr>
+            <a:spLocks noGrp="1"/>
+          </p:cNvSpPr>
+          <p:nvPr>
+            <p:ph idx="1"/>
+          </p:nvPr>
+        </p:nvSpPr>
+        <p:spPr/>
+        <p:txBody>
+          <a:bodyPr/>
+          <a:lstStyle/>
+          <a:p>
+            <a:endParaRPr lang="pt-PT"/>
+          </a:p>
+        </p:txBody>
+      </p:sp>
+    </p:spTree>
+    <p:extLst>
+      <p:ext uri="{BB962C8B-B14F-4D97-AF65-F5344CB8AC3E}">
+        <p14:creationId xmlns:p14="http://schemas.microsoft.com/office/powerpoint/2010/main" val="4267865674"/>
+      </p:ext>
+    </p:extLst>
+  </p:cSld>
+  <p:clrMapOvr>
+    <a:masterClrMapping/>
+  </p:clrMapOvr>
+</p:sld>
+</file>
+
+<file path=ppt/slides/slide6.xml><?xml version="1.0" encoding="utf-8"?>
+<p:sld xmlns:a="http://schemas.openxmlformats.org/drawingml/2006/main" xmlns:r="http://schemas.openxmlformats.org/officeDocument/2006/relationships" xmlns:p="http://schemas.openxmlformats.org/presentationml/2006/main">
+  <p:cSld>
+    <p:spTree>
+      <p:nvGrpSpPr>
+        <p:cNvPr id="1" name=""/>
+        <p:cNvGrpSpPr/>
+        <p:nvPr/>
+      </p:nvGrpSpPr>
+      <p:grpSpPr>
+        <a:xfrm>
+          <a:off x="0" y="0"/>
+          <a:ext cx="0" cy="0"/>
+          <a:chOff x="0" y="0"/>
+          <a:chExt cx="0" cy="0"/>
+        </a:xfrm>
+      </p:grpSpPr>
+      <p:sp>
+        <p:nvSpPr>
+          <p:cNvPr id="2" name="Título 1">
+            <a:extLst>
+              <a:ext uri="{FF2B5EF4-FFF2-40B4-BE49-F238E27FC236}">
+                <a16:creationId xmlns:a16="http://schemas.microsoft.com/office/drawing/2014/main" id="{77D74BBF-F8B0-14AD-237E-DA7B7927390B}"/>
+              </a:ext>
+            </a:extLst>
+          </p:cNvPr>
+          <p:cNvSpPr>
+            <a:spLocks noGrp="1"/>
+          </p:cNvSpPr>
+          <p:nvPr>
+            <p:ph type="title"/>
+          </p:nvPr>
+        </p:nvSpPr>
+        <p:spPr/>
+        <p:txBody>
+          <a:bodyPr/>
+          <a:lstStyle/>
+          <a:p>
+            <a:r>
+              <a:rPr lang="pt-PT" dirty="0"/>
+              <a:t>População do estudo</a:t>
+            </a:r>
+          </a:p>
+        </p:txBody>
+      </p:sp>
+      <p:sp>
+        <p:nvSpPr>
+          <p:cNvPr id="3" name="Marcador de Posição de Conteúdo 2">
+            <a:extLst>
+              <a:ext uri="{FF2B5EF4-FFF2-40B4-BE49-F238E27FC236}">
+                <a16:creationId xmlns:a16="http://schemas.microsoft.com/office/drawing/2014/main" id="{2B6D9C2E-2B27-BA93-78B5-E64CE19F8B05}"/>
+              </a:ext>
+            </a:extLst>
+          </p:cNvPr>
+          <p:cNvSpPr>
+            <a:spLocks noGrp="1"/>
+          </p:cNvSpPr>
+          <p:nvPr>
+            <p:ph idx="1"/>
+          </p:nvPr>
+        </p:nvSpPr>
+        <p:spPr/>
+        <p:txBody>
+          <a:bodyPr/>
+          <a:lstStyle/>
+          <a:p>
+            <a:endParaRPr lang="pt-PT"/>
+          </a:p>
+        </p:txBody>
+      </p:sp>
+    </p:spTree>
+    <p:extLst>
+      <p:ext uri="{BB962C8B-B14F-4D97-AF65-F5344CB8AC3E}">
+        <p14:creationId xmlns:p14="http://schemas.microsoft.com/office/powerpoint/2010/main" val="2298641520"/>
+      </p:ext>
+    </p:extLst>
+  </p:cSld>
+  <p:clrMapOvr>
+    <a:masterClrMapping/>
+  </p:clrMapOvr>
+</p:sld>
+</file>
+
+<file path=ppt/slides/slide7.xml><?xml version="1.0" encoding="utf-8"?>
+<p:sld xmlns:a="http://schemas.openxmlformats.org/drawingml/2006/main" xmlns:r="http://schemas.openxmlformats.org/officeDocument/2006/relationships" xmlns:p="http://schemas.openxmlformats.org/presentationml/2006/main">
+  <p:cSld>
+    <p:spTree>
+      <p:nvGrpSpPr>
+        <p:cNvPr id="1" name="">
+          <a:extLst>
+            <a:ext uri="{FF2B5EF4-FFF2-40B4-BE49-F238E27FC236}">
+              <a16:creationId xmlns:a16="http://schemas.microsoft.com/office/drawing/2014/main" id="{281EBEEE-BD63-D0B3-BD50-A2CC104499FC}"/>
+            </a:ext>
+          </a:extLst>
+        </p:cNvPr>
+        <p:cNvGrpSpPr/>
+        <p:nvPr/>
+      </p:nvGrpSpPr>
+      <p:grpSpPr>
+        <a:xfrm>
+          <a:off x="0" y="0"/>
+          <a:ext cx="0" cy="0"/>
+          <a:chOff x="0" y="0"/>
+          <a:chExt cx="0" cy="0"/>
+        </a:xfrm>
+      </p:grpSpPr>
+      <p:sp>
+        <p:nvSpPr>
+          <p:cNvPr id="2" name="Título 1">
+            <a:extLst>
+              <a:ext uri="{FF2B5EF4-FFF2-40B4-BE49-F238E27FC236}">
+                <a16:creationId xmlns:a16="http://schemas.microsoft.com/office/drawing/2014/main" id="{91D8C058-7E42-3F3C-4504-069FFF661988}"/>
+              </a:ext>
+            </a:extLst>
+          </p:cNvPr>
+          <p:cNvSpPr>
+            <a:spLocks noGrp="1"/>
+          </p:cNvSpPr>
+          <p:nvPr>
+            <p:ph type="title"/>
+          </p:nvPr>
+        </p:nvSpPr>
+        <p:spPr/>
+        <p:txBody>
+          <a:bodyPr/>
+          <a:lstStyle/>
+          <a:p>
+            <a:r>
+              <a:rPr lang="pt-PT" dirty="0"/>
+              <a:t>Metodologia</a:t>
+            </a:r>
+          </a:p>
+        </p:txBody>
+      </p:sp>
+      <p:sp>
+        <p:nvSpPr>
+          <p:cNvPr id="3" name="Marcador de Posição de Conteúdo 2">
+            <a:extLst>
+              <a:ext uri="{FF2B5EF4-FFF2-40B4-BE49-F238E27FC236}">
+                <a16:creationId xmlns:a16="http://schemas.microsoft.com/office/drawing/2014/main" id="{8AFE875B-13F4-0A38-6571-38FEB8886301}"/>
+              </a:ext>
+            </a:extLst>
+          </p:cNvPr>
+          <p:cNvSpPr>
+            <a:spLocks noGrp="1"/>
+          </p:cNvSpPr>
+          <p:nvPr>
+            <p:ph idx="1"/>
+          </p:nvPr>
+        </p:nvSpPr>
+        <p:spPr/>
+        <p:txBody>
+          <a:bodyPr/>
+          <a:lstStyle/>
+          <a:p>
+            <a:endParaRPr lang="pt-PT"/>
+          </a:p>
+        </p:txBody>
+      </p:sp>
+    </p:spTree>
+    <p:extLst>
+      <p:ext uri="{BB962C8B-B14F-4D97-AF65-F5344CB8AC3E}">
+        <p14:creationId xmlns:p14="http://schemas.microsoft.com/office/powerpoint/2010/main" val="3797817761"/>
+      </p:ext>
+    </p:extLst>
+  </p:cSld>
+  <p:clrMapOvr>
+    <a:masterClrMapping/>
+  </p:clrMapOvr>
+</p:sld>
+</file>
+
+<file path=ppt/slides/slide8.xml><?xml version="1.0" encoding="utf-8"?>
+<p:sld xmlns:a="http://schemas.openxmlformats.org/drawingml/2006/main" xmlns:r="http://schemas.openxmlformats.org/officeDocument/2006/relationships" xmlns:p="http://schemas.openxmlformats.org/presentationml/2006/main">
+  <p:cSld>
+    <p:spTree>
+      <p:nvGrpSpPr>
+        <p:cNvPr id="1" name="">
+          <a:extLst>
+            <a:ext uri="{FF2B5EF4-FFF2-40B4-BE49-F238E27FC236}">
+              <a16:creationId xmlns:a16="http://schemas.microsoft.com/office/drawing/2014/main" id="{220B5D6F-69C6-D230-31EC-19020B8F6F55}"/>
+            </a:ext>
+          </a:extLst>
+        </p:cNvPr>
+        <p:cNvGrpSpPr/>
+        <p:nvPr/>
+      </p:nvGrpSpPr>
+      <p:grpSpPr>
+        <a:xfrm>
+          <a:off x="0" y="0"/>
+          <a:ext cx="0" cy="0"/>
+          <a:chOff x="0" y="0"/>
+          <a:chExt cx="0" cy="0"/>
+        </a:xfrm>
+      </p:grpSpPr>
+      <p:sp>
+        <p:nvSpPr>
+          <p:cNvPr id="2" name="Título 1">
+            <a:extLst>
+              <a:ext uri="{FF2B5EF4-FFF2-40B4-BE49-F238E27FC236}">
+                <a16:creationId xmlns:a16="http://schemas.microsoft.com/office/drawing/2014/main" id="{4090D609-DBD7-B1A4-8A0F-867A1E911DA8}"/>
+              </a:ext>
+            </a:extLst>
+          </p:cNvPr>
+          <p:cNvSpPr>
+            <a:spLocks noGrp="1"/>
+          </p:cNvSpPr>
+          <p:nvPr>
+            <p:ph type="title"/>
+          </p:nvPr>
+        </p:nvSpPr>
+        <p:spPr/>
+        <p:txBody>
+          <a:bodyPr/>
+          <a:lstStyle/>
+          <a:p>
+            <a:r>
+              <a:rPr lang="pt-PT" dirty="0" err="1"/>
+              <a:t>Outcomes</a:t>
+            </a:r>
+            <a:endParaRPr lang="pt-PT" dirty="0"/>
+          </a:p>
+        </p:txBody>
+      </p:sp>
+      <p:sp>
+        <p:nvSpPr>
+          <p:cNvPr id="3" name="Marcador de Posição de Conteúdo 2">
+            <a:extLst>
+              <a:ext uri="{FF2B5EF4-FFF2-40B4-BE49-F238E27FC236}">
+                <a16:creationId xmlns:a16="http://schemas.microsoft.com/office/drawing/2014/main" id="{CC1C5F76-23B1-1E09-345E-E2FD9227D1C6}"/>
+              </a:ext>
+            </a:extLst>
+          </p:cNvPr>
+          <p:cNvSpPr>
+            <a:spLocks noGrp="1"/>
+          </p:cNvSpPr>
+          <p:nvPr>
+            <p:ph idx="1"/>
+          </p:nvPr>
+        </p:nvSpPr>
+        <p:spPr/>
+        <p:txBody>
+          <a:bodyPr/>
+          <a:lstStyle/>
+          <a:p>
+            <a:endParaRPr lang="pt-PT"/>
+          </a:p>
+        </p:txBody>
+      </p:sp>
+    </p:spTree>
+    <p:extLst>
+      <p:ext uri="{BB962C8B-B14F-4D97-AF65-F5344CB8AC3E}">
+        <p14:creationId xmlns:p14="http://schemas.microsoft.com/office/powerpoint/2010/main" val="3489097716"/>
+      </p:ext>
+    </p:extLst>
+  </p:cSld>
+  <p:clrMapOvr>
+    <a:masterClrMapping/>
+  </p:clrMapOvr>
+</p:sld>
+</file>
+
+<file path=ppt/slides/slide9.xml><?xml version="1.0" encoding="utf-8"?>
+<p:sld xmlns:a="http://schemas.openxmlformats.org/drawingml/2006/main" xmlns:r="http://schemas.openxmlformats.org/officeDocument/2006/relationships" xmlns:p="http://schemas.openxmlformats.org/presentationml/2006/main">
+  <p:cSld>
+    <p:spTree>
+      <p:nvGrpSpPr>
+        <p:cNvPr id="1" name=""/>
+        <p:cNvGrpSpPr/>
+        <p:nvPr/>
+      </p:nvGrpSpPr>
+      <p:grpSpPr>
+        <a:xfrm>
+          <a:off x="0" y="0"/>
+          <a:ext cx="0" cy="0"/>
+          <a:chOff x="0" y="0"/>
+          <a:chExt cx="0" cy="0"/>
+        </a:xfrm>
+      </p:grpSpPr>
+      <p:sp>
+        <p:nvSpPr>
+          <p:cNvPr id="2" name="Título 1">
+            <a:extLst>
+              <a:ext uri="{FF2B5EF4-FFF2-40B4-BE49-F238E27FC236}">
+                <a16:creationId xmlns:a16="http://schemas.microsoft.com/office/drawing/2014/main" id="{B4743D12-D2E9-BED2-1731-E6C8BBC4ACBF}"/>
+              </a:ext>
+            </a:extLst>
+          </p:cNvPr>
+          <p:cNvSpPr>
+            <a:spLocks noGrp="1"/>
+          </p:cNvSpPr>
+          <p:nvPr>
+            <p:ph type="title"/>
+          </p:nvPr>
+        </p:nvSpPr>
+        <p:spPr/>
+        <p:txBody>
+          <a:bodyPr/>
+          <a:lstStyle/>
+          <a:p>
+            <a:r>
+              <a:rPr lang="pt-PT" dirty="0"/>
+              <a:t>Análise Estatística</a:t>
+            </a:r>
+          </a:p>
+        </p:txBody>
+      </p:sp>
+      <p:sp>
+        <p:nvSpPr>
+          <p:cNvPr id="3" name="Marcador de Posição de Conteúdo 2">
+            <a:extLst>
+              <a:ext uri="{FF2B5EF4-FFF2-40B4-BE49-F238E27FC236}">
+                <a16:creationId xmlns:a16="http://schemas.microsoft.com/office/drawing/2014/main" id="{D53A77B6-F4C0-930D-C503-E81692D56F47}"/>
+              </a:ext>
+            </a:extLst>
+          </p:cNvPr>
+          <p:cNvSpPr>
+            <a:spLocks noGrp="1"/>
+          </p:cNvSpPr>
+          <p:nvPr>
+            <p:ph idx="1"/>
+          </p:nvPr>
+        </p:nvSpPr>
+        <p:spPr/>
+        <p:txBody>
+          <a:bodyPr/>
+          <a:lstStyle/>
+          <a:p>
+            <a:endParaRPr lang="pt-PT"/>
+          </a:p>
+        </p:txBody>
+      </p:sp>
+    </p:spTree>
+    <p:extLst>
+      <p:ext uri="{BB962C8B-B14F-4D97-AF65-F5344CB8AC3E}">
+        <p14:creationId xmlns:p14="http://schemas.microsoft.com/office/powerpoint/2010/main" val="1436765159"/>
+      </p:ext>
+    </p:extLst>
+  </p:cSld>
+  <p:clrMapOvr>
+    <a:masterClrMapping/>
+  </p:clrMapOvr>
 </p:sld>
 </file>
 

--- a/projeto_fp_tp10.pptx
+++ b/projeto_fp_tp10.pptx
@@ -119,7 +119,7 @@
 <file path=ppt/revisionInfo.xml><?xml version="1.0" encoding="utf-8"?>
 <p1510:revInfo xmlns:a="http://schemas.openxmlformats.org/drawingml/2006/main" xmlns:r="http://schemas.openxmlformats.org/officeDocument/2006/relationships" xmlns:p1510="http://schemas.microsoft.com/office/powerpoint/2015/10/main">
   <p1510:revLst>
-    <p1510:client id="{49293244-A155-4740-A274-1AB9773F4798}" v="28" dt="2026-04-28T19:29:07.362"/>
+    <p1510:client id="{49293244-A155-4740-A274-1AB9773F4798}" v="61" dt="2026-04-28T20:58:15.437"/>
   </p1510:revLst>
 </p1510:revInfo>
 </file>
@@ -128,13 +128,13 @@
 <pc:chgInfo xmlns:a="http://schemas.openxmlformats.org/drawingml/2006/main" xmlns:r="http://schemas.openxmlformats.org/officeDocument/2006/relationships" xmlns:ac="http://schemas.microsoft.com/office/drawing/2013/main/command" xmlns:pc="http://schemas.microsoft.com/office/powerpoint/2013/main/command">
   <pc:docChgLst>
     <pc:chgData name="Gabriela Carneiro" userId="038eca41cd8564ab" providerId="LiveId" clId="{D03F746D-BE5D-4789-93E6-42C6E52F57A2}"/>
-    <pc:docChg chg="undo custSel addSld modSld addMainMaster delMainMaster">
-      <pc:chgData name="Gabriela Carneiro" userId="038eca41cd8564ab" providerId="LiveId" clId="{D03F746D-BE5D-4789-93E6-42C6E52F57A2}" dt="2026-04-28T20:37:07.666" v="443" actId="20577"/>
+    <pc:docChg chg="undo custSel addSld modSld sldOrd addMainMaster delMainMaster">
+      <pc:chgData name="Gabriela Carneiro" userId="038eca41cd8564ab" providerId="LiveId" clId="{D03F746D-BE5D-4789-93E6-42C6E52F57A2}" dt="2026-04-28T20:58:15.437" v="686"/>
       <pc:docMkLst>
         <pc:docMk/>
       </pc:docMkLst>
-      <pc:sldChg chg="addSp delSp modSp mod setBg modClrScheme addAnim delAnim delDesignElem chgLayout">
-        <pc:chgData name="Gabriela Carneiro" userId="038eca41cd8564ab" providerId="LiveId" clId="{D03F746D-BE5D-4789-93E6-42C6E52F57A2}" dt="2026-04-28T20:13:32.243" v="237" actId="962"/>
+      <pc:sldChg chg="addSp delSp modSp mod ord setBg modClrScheme addAnim delAnim delDesignElem chgLayout">
+        <pc:chgData name="Gabriela Carneiro" userId="038eca41cd8564ab" providerId="LiveId" clId="{D03F746D-BE5D-4789-93E6-42C6E52F57A2}" dt="2026-04-28T20:43:27.707" v="485" actId="478"/>
         <pc:sldMkLst>
           <pc:docMk/>
           <pc:sldMk cId="334472207" sldId="256"/>
@@ -219,8 +219,8 @@
             <ac:picMk id="6" creationId="{E9EA455F-004B-8977-4D38-DFA54E3384C7}"/>
           </ac:picMkLst>
         </pc:picChg>
-        <pc:picChg chg="add mod">
-          <ac:chgData name="Gabriela Carneiro" userId="038eca41cd8564ab" providerId="LiveId" clId="{D03F746D-BE5D-4789-93E6-42C6E52F57A2}" dt="2026-04-28T20:13:32.243" v="237" actId="962"/>
+        <pc:picChg chg="add del mod">
+          <ac:chgData name="Gabriela Carneiro" userId="038eca41cd8564ab" providerId="LiveId" clId="{D03F746D-BE5D-4789-93E6-42C6E52F57A2}" dt="2026-04-28T20:42:20.578" v="480" actId="478"/>
           <ac:picMkLst>
             <pc:docMk/>
             <pc:sldMk cId="334472207" sldId="256"/>
@@ -243,6 +243,14 @@
             <ac:picMk id="1028" creationId="{639F4097-F9F9-7805-5185-50A8AE3A89A3}"/>
           </ac:picMkLst>
         </pc:picChg>
+        <pc:picChg chg="add del mod">
+          <ac:chgData name="Gabriela Carneiro" userId="038eca41cd8564ab" providerId="LiveId" clId="{D03F746D-BE5D-4789-93E6-42C6E52F57A2}" dt="2026-04-28T20:43:27.707" v="485" actId="478"/>
+          <ac:picMkLst>
+            <pc:docMk/>
+            <pc:sldMk cId="334472207" sldId="256"/>
+            <ac:picMk id="1030" creationId="{6A56CC01-14D1-E3FD-32C5-04504E5A1FAE}"/>
+          </ac:picMkLst>
+        </pc:picChg>
         <pc:cxnChg chg="add del">
           <ac:chgData name="Gabriela Carneiro" userId="038eca41cd8564ab" providerId="LiveId" clId="{D03F746D-BE5D-4789-93E6-42C6E52F57A2}" dt="2026-04-28T18:54:33.043" v="7" actId="26606"/>
           <ac:cxnSpMkLst>
@@ -276,8 +284,8 @@
           </ac:cxnSpMkLst>
         </pc:cxnChg>
       </pc:sldChg>
-      <pc:sldChg chg="modSp new mod">
-        <pc:chgData name="Gabriela Carneiro" userId="038eca41cd8564ab" providerId="LiveId" clId="{D03F746D-BE5D-4789-93E6-42C6E52F57A2}" dt="2026-04-28T20:17:43.937" v="281" actId="20577"/>
+      <pc:sldChg chg="addSp delSp modSp new mod">
+        <pc:chgData name="Gabriela Carneiro" userId="038eca41cd8564ab" providerId="LiveId" clId="{D03F746D-BE5D-4789-93E6-42C6E52F57A2}" dt="2026-04-28T20:43:37.410" v="487" actId="478"/>
         <pc:sldMkLst>
           <pc:docMk/>
           <pc:sldMk cId="4265899404" sldId="257"/>
@@ -291,16 +299,24 @@
           </ac:spMkLst>
         </pc:spChg>
         <pc:spChg chg="mod">
-          <ac:chgData name="Gabriela Carneiro" userId="038eca41cd8564ab" providerId="LiveId" clId="{D03F746D-BE5D-4789-93E6-42C6E52F57A2}" dt="2026-04-28T20:14:01.851" v="273" actId="20577"/>
+          <ac:chgData name="Gabriela Carneiro" userId="038eca41cd8564ab" providerId="LiveId" clId="{D03F746D-BE5D-4789-93E6-42C6E52F57A2}" dt="2026-04-28T20:42:06.876" v="478" actId="20577"/>
           <ac:spMkLst>
             <pc:docMk/>
             <pc:sldMk cId="4265899404" sldId="257"/>
             <ac:spMk id="3" creationId="{AF18BF26-25E5-07D1-5825-0816A9924346}"/>
           </ac:spMkLst>
         </pc:spChg>
+        <pc:picChg chg="add del">
+          <ac:chgData name="Gabriela Carneiro" userId="038eca41cd8564ab" providerId="LiveId" clId="{D03F746D-BE5D-4789-93E6-42C6E52F57A2}" dt="2026-04-28T20:43:37.410" v="487" actId="478"/>
+          <ac:picMkLst>
+            <pc:docMk/>
+            <pc:sldMk cId="4265899404" sldId="257"/>
+            <ac:picMk id="2050" creationId="{82B941BC-69AD-6F33-C91F-6FD4E6309E13}"/>
+          </ac:picMkLst>
+        </pc:picChg>
       </pc:sldChg>
       <pc:sldChg chg="modSp add mod">
-        <pc:chgData name="Gabriela Carneiro" userId="038eca41cd8564ab" providerId="LiveId" clId="{D03F746D-BE5D-4789-93E6-42C6E52F57A2}" dt="2026-04-28T20:18:04.224" v="299" actId="20577"/>
+        <pc:chgData name="Gabriela Carneiro" userId="038eca41cd8564ab" providerId="LiveId" clId="{D03F746D-BE5D-4789-93E6-42C6E52F57A2}" dt="2026-04-28T20:44:40.838" v="514"/>
         <pc:sldMkLst>
           <pc:docMk/>
           <pc:sldMk cId="3171773370" sldId="258"/>
@@ -313,9 +329,17 @@
             <ac:spMk id="2" creationId="{DEE1E2DE-4AD9-AD89-5DC8-3A2F0D0360E3}"/>
           </ac:spMkLst>
         </pc:spChg>
+        <pc:spChg chg="mod">
+          <ac:chgData name="Gabriela Carneiro" userId="038eca41cd8564ab" providerId="LiveId" clId="{D03F746D-BE5D-4789-93E6-42C6E52F57A2}" dt="2026-04-28T20:44:40.838" v="514"/>
+          <ac:spMkLst>
+            <pc:docMk/>
+            <pc:sldMk cId="3171773370" sldId="258"/>
+            <ac:spMk id="3" creationId="{BDC72D86-3A31-7A3A-6AA8-53F401637844}"/>
+          </ac:spMkLst>
+        </pc:spChg>
       </pc:sldChg>
       <pc:sldChg chg="modSp new mod">
-        <pc:chgData name="Gabriela Carneiro" userId="038eca41cd8564ab" providerId="LiveId" clId="{D03F746D-BE5D-4789-93E6-42C6E52F57A2}" dt="2026-04-28T20:18:17.261" v="317" actId="20577"/>
+        <pc:chgData name="Gabriela Carneiro" userId="038eca41cd8564ab" providerId="LiveId" clId="{D03F746D-BE5D-4789-93E6-42C6E52F57A2}" dt="2026-04-28T20:46:03.452" v="519"/>
         <pc:sldMkLst>
           <pc:docMk/>
           <pc:sldMk cId="1439218118" sldId="259"/>
@@ -328,9 +352,17 @@
             <ac:spMk id="2" creationId="{1D87031A-95F2-7260-23DB-612231579116}"/>
           </ac:spMkLst>
         </pc:spChg>
+        <pc:spChg chg="mod">
+          <ac:chgData name="Gabriela Carneiro" userId="038eca41cd8564ab" providerId="LiveId" clId="{D03F746D-BE5D-4789-93E6-42C6E52F57A2}" dt="2026-04-28T20:46:03.452" v="519"/>
+          <ac:spMkLst>
+            <pc:docMk/>
+            <pc:sldMk cId="1439218118" sldId="259"/>
+            <ac:spMk id="3" creationId="{187BCC5D-5278-926E-AA7E-F5C7F9B98261}"/>
+          </ac:spMkLst>
+        </pc:spChg>
       </pc:sldChg>
       <pc:sldChg chg="modSp new mod">
-        <pc:chgData name="Gabriela Carneiro" userId="038eca41cd8564ab" providerId="LiveId" clId="{D03F746D-BE5D-4789-93E6-42C6E52F57A2}" dt="2026-04-28T20:18:27.735" v="329" actId="20577"/>
+        <pc:chgData name="Gabriela Carneiro" userId="038eca41cd8564ab" providerId="LiveId" clId="{D03F746D-BE5D-4789-93E6-42C6E52F57A2}" dt="2026-04-28T20:50:48.460" v="562" actId="27636"/>
         <pc:sldMkLst>
           <pc:docMk/>
           <pc:sldMk cId="4267865674" sldId="260"/>
@@ -343,9 +375,17 @@
             <ac:spMk id="2" creationId="{37573BB9-D4B1-2203-CD10-6B57645B337F}"/>
           </ac:spMkLst>
         </pc:spChg>
+        <pc:spChg chg="mod">
+          <ac:chgData name="Gabriela Carneiro" userId="038eca41cd8564ab" providerId="LiveId" clId="{D03F746D-BE5D-4789-93E6-42C6E52F57A2}" dt="2026-04-28T20:50:48.460" v="562" actId="27636"/>
+          <ac:spMkLst>
+            <pc:docMk/>
+            <pc:sldMk cId="4267865674" sldId="260"/>
+            <ac:spMk id="3" creationId="{77979BBC-F16A-9938-9523-52DCDAA663B4}"/>
+          </ac:spMkLst>
+        </pc:spChg>
       </pc:sldChg>
       <pc:sldChg chg="modSp new mod">
-        <pc:chgData name="Gabriela Carneiro" userId="038eca41cd8564ab" providerId="LiveId" clId="{D03F746D-BE5D-4789-93E6-42C6E52F57A2}" dt="2026-04-28T20:35:46.549" v="353" actId="20577"/>
+        <pc:chgData name="Gabriela Carneiro" userId="038eca41cd8564ab" providerId="LiveId" clId="{D03F746D-BE5D-4789-93E6-42C6E52F57A2}" dt="2026-04-28T20:54:58.450" v="636" actId="27636"/>
         <pc:sldMkLst>
           <pc:docMk/>
           <pc:sldMk cId="2298641520" sldId="261"/>
@@ -358,9 +398,17 @@
             <ac:spMk id="2" creationId="{77D74BBF-F8B0-14AD-237E-DA7B7927390B}"/>
           </ac:spMkLst>
         </pc:spChg>
+        <pc:spChg chg="mod">
+          <ac:chgData name="Gabriela Carneiro" userId="038eca41cd8564ab" providerId="LiveId" clId="{D03F746D-BE5D-4789-93E6-42C6E52F57A2}" dt="2026-04-28T20:54:58.450" v="636" actId="27636"/>
+          <ac:spMkLst>
+            <pc:docMk/>
+            <pc:sldMk cId="2298641520" sldId="261"/>
+            <ac:spMk id="3" creationId="{2B6D9C2E-2B27-BA93-78B5-E64CE19F8B05}"/>
+          </ac:spMkLst>
+        </pc:spChg>
       </pc:sldChg>
       <pc:sldChg chg="modSp add mod">
-        <pc:chgData name="Gabriela Carneiro" userId="038eca41cd8564ab" providerId="LiveId" clId="{D03F746D-BE5D-4789-93E6-42C6E52F57A2}" dt="2026-04-28T20:36:10.624" v="367" actId="20577"/>
+        <pc:chgData name="Gabriela Carneiro" userId="038eca41cd8564ab" providerId="LiveId" clId="{D03F746D-BE5D-4789-93E6-42C6E52F57A2}" dt="2026-04-28T20:55:43.266" v="643"/>
         <pc:sldMkLst>
           <pc:docMk/>
           <pc:sldMk cId="3797817761" sldId="262"/>
@@ -373,9 +421,17 @@
             <ac:spMk id="2" creationId="{91D8C058-7E42-3F3C-4504-069FFF661988}"/>
           </ac:spMkLst>
         </pc:spChg>
+        <pc:spChg chg="mod">
+          <ac:chgData name="Gabriela Carneiro" userId="038eca41cd8564ab" providerId="LiveId" clId="{D03F746D-BE5D-4789-93E6-42C6E52F57A2}" dt="2026-04-28T20:55:43.266" v="643"/>
+          <ac:spMkLst>
+            <pc:docMk/>
+            <pc:sldMk cId="3797817761" sldId="262"/>
+            <ac:spMk id="3" creationId="{8AFE875B-13F4-0A38-6571-38FEB8886301}"/>
+          </ac:spMkLst>
+        </pc:spChg>
       </pc:sldChg>
       <pc:sldChg chg="modSp add mod">
-        <pc:chgData name="Gabriela Carneiro" userId="038eca41cd8564ab" providerId="LiveId" clId="{D03F746D-BE5D-4789-93E6-42C6E52F57A2}" dt="2026-04-28T20:36:21.254" v="376" actId="20577"/>
+        <pc:chgData name="Gabriela Carneiro" userId="038eca41cd8564ab" providerId="LiveId" clId="{D03F746D-BE5D-4789-93E6-42C6E52F57A2}" dt="2026-04-28T20:56:07.754" v="651"/>
         <pc:sldMkLst>
           <pc:docMk/>
           <pc:sldMk cId="3489097716" sldId="263"/>
@@ -388,9 +444,17 @@
             <ac:spMk id="2" creationId="{4090D609-DBD7-B1A4-8A0F-867A1E911DA8}"/>
           </ac:spMkLst>
         </pc:spChg>
+        <pc:spChg chg="mod">
+          <ac:chgData name="Gabriela Carneiro" userId="038eca41cd8564ab" providerId="LiveId" clId="{D03F746D-BE5D-4789-93E6-42C6E52F57A2}" dt="2026-04-28T20:56:07.754" v="651"/>
+          <ac:spMkLst>
+            <pc:docMk/>
+            <pc:sldMk cId="3489097716" sldId="263"/>
+            <ac:spMk id="3" creationId="{CC1C5F76-23B1-1E09-345E-E2FD9227D1C6}"/>
+          </ac:spMkLst>
+        </pc:spChg>
       </pc:sldChg>
       <pc:sldChg chg="modSp new mod">
-        <pc:chgData name="Gabriela Carneiro" userId="038eca41cd8564ab" providerId="LiveId" clId="{D03F746D-BE5D-4789-93E6-42C6E52F57A2}" dt="2026-04-28T20:36:55.033" v="415" actId="20577"/>
+        <pc:chgData name="Gabriela Carneiro" userId="038eca41cd8564ab" providerId="LiveId" clId="{D03F746D-BE5D-4789-93E6-42C6E52F57A2}" dt="2026-04-28T20:57:38.159" v="681" actId="313"/>
         <pc:sldMkLst>
           <pc:docMk/>
           <pc:sldMk cId="1436765159" sldId="264"/>
@@ -403,9 +467,17 @@
             <ac:spMk id="2" creationId="{B4743D12-D2E9-BED2-1731-E6C8BBC4ACBF}"/>
           </ac:spMkLst>
         </pc:spChg>
+        <pc:spChg chg="mod">
+          <ac:chgData name="Gabriela Carneiro" userId="038eca41cd8564ab" providerId="LiveId" clId="{D03F746D-BE5D-4789-93E6-42C6E52F57A2}" dt="2026-04-28T20:57:38.159" v="681" actId="313"/>
+          <ac:spMkLst>
+            <pc:docMk/>
+            <pc:sldMk cId="1436765159" sldId="264"/>
+            <ac:spMk id="3" creationId="{D53A77B6-F4C0-930D-C503-E81692D56F47}"/>
+          </ac:spMkLst>
+        </pc:spChg>
       </pc:sldChg>
       <pc:sldChg chg="modSp new mod">
-        <pc:chgData name="Gabriela Carneiro" userId="038eca41cd8564ab" providerId="LiveId" clId="{D03F746D-BE5D-4789-93E6-42C6E52F57A2}" dt="2026-04-28T20:37:07.666" v="443" actId="20577"/>
+        <pc:chgData name="Gabriela Carneiro" userId="038eca41cd8564ab" providerId="LiveId" clId="{D03F746D-BE5D-4789-93E6-42C6E52F57A2}" dt="2026-04-28T20:58:15.437" v="686"/>
         <pc:sldMkLst>
           <pc:docMk/>
           <pc:sldMk cId="2199764213" sldId="265"/>
@@ -416,6 +488,14 @@
             <pc:docMk/>
             <pc:sldMk cId="2199764213" sldId="265"/>
             <ac:spMk id="2" creationId="{EDEB4CE7-7D17-C27F-BCCA-AED2BD96B21D}"/>
+          </ac:spMkLst>
+        </pc:spChg>
+        <pc:spChg chg="mod">
+          <ac:chgData name="Gabriela Carneiro" userId="038eca41cd8564ab" providerId="LiveId" clId="{D03F746D-BE5D-4789-93E6-42C6E52F57A2}" dt="2026-04-28T20:58:15.437" v="686"/>
+          <ac:spMkLst>
+            <pc:docMk/>
+            <pc:sldMk cId="2199764213" sldId="265"/>
+            <ac:spMk id="3" creationId="{697E5CD2-05E4-59E0-32EF-30F549E86D69}"/>
           </ac:spMkLst>
         </pc:spChg>
       </pc:sldChg>
@@ -4279,36 +4359,6 @@
           </a:p>
         </p:txBody>
       </p:sp>
-      <p:pic>
-        <p:nvPicPr>
-          <p:cNvPr id="12" name="Imagem 11" descr="The image is a presentation slide from the Faculty of Medicine at the University of Porto, featuring the Digital MindMove in Health project, with authors Ana Moreira, Flￃﾡvio Vieira, Gabriela Carneiro, and Maria Leonor Fernades.&#10;&#10;Os conteúdos gerados por IA podem estar incorretos.">
-            <a:extLst>
-              <a:ext uri="{FF2B5EF4-FFF2-40B4-BE49-F238E27FC236}">
-                <a16:creationId xmlns:a16="http://schemas.microsoft.com/office/drawing/2014/main" id="{B1543DE4-892E-743A-3243-1BDD81B45FCB}"/>
-              </a:ext>
-            </a:extLst>
-          </p:cNvPr>
-          <p:cNvPicPr>
-            <a:picLocks noChangeAspect="1"/>
-          </p:cNvPicPr>
-          <p:nvPr/>
-        </p:nvPicPr>
-        <p:blipFill>
-          <a:blip r:embed="rId3"/>
-          <a:stretch>
-            <a:fillRect/>
-          </a:stretch>
-        </p:blipFill>
-        <p:spPr>
-          <a:xfrm>
-            <a:off x="63689" y="0"/>
-            <a:ext cx="12064621" cy="6858000"/>
-          </a:xfrm>
-          <a:prstGeom prst="rect">
-            <a:avLst/>
-          </a:prstGeom>
-        </p:spPr>
-      </p:pic>
     </p:spTree>
     <p:extLst>
       <p:ext uri="{BB962C8B-B14F-4D97-AF65-F5344CB8AC3E}">
@@ -4454,11 +4504,7 @@
           <a:p>
             <a:r>
               <a:rPr lang="pt-PT" dirty="0"/>
-              <a:t>Ética e proteção </a:t>
-            </a:r>
-            <a:r>
-              <a:rPr lang="pt-PT"/>
-              <a:t>de dados</a:t>
+              <a:t>Ética e proteção de dados</a:t>
             </a:r>
           </a:p>
         </p:txBody>
@@ -4484,7 +4530,80 @@
           <a:bodyPr/>
           <a:lstStyle/>
           <a:p>
-            <a:endParaRPr lang="pt-PT"/>
+            <a:pPr marL="0" indent="0">
+              <a:buNone/>
+            </a:pPr>
+            <a:r>
+              <a:rPr lang="pt-PT" b="0" i="0" dirty="0">
+                <a:effectLst/>
+              </a:rPr>
+              <a:t>Aprovação ética pela Comissão de Ética da FMUP. Consentimento informado digital obtido via </a:t>
+            </a:r>
+            <a:r>
+              <a:rPr lang="pt-PT" b="0" i="0" dirty="0" err="1">
+                <a:effectLst/>
+              </a:rPr>
+              <a:t>landing</a:t>
+            </a:r>
+            <a:r>
+              <a:rPr lang="pt-PT" b="0" i="0" dirty="0">
+                <a:effectLst/>
+              </a:rPr>
+              <a:t> </a:t>
+            </a:r>
+            <a:r>
+              <a:rPr lang="pt-PT" b="0" i="0" dirty="0" err="1">
+                <a:effectLst/>
+              </a:rPr>
+              <a:t>page</a:t>
+            </a:r>
+            <a:r>
+              <a:rPr lang="pt-PT" b="0" i="0" dirty="0">
+                <a:effectLst/>
+              </a:rPr>
+              <a:t> antes da participação no estudo.</a:t>
+            </a:r>
+            <a:br>
+              <a:rPr lang="pt-PT" b="0" i="0" dirty="0">
+                <a:effectLst/>
+              </a:rPr>
+            </a:br>
+            <a:br>
+              <a:rPr lang="pt-PT" b="0" i="0" dirty="0">
+                <a:effectLst/>
+              </a:rPr>
+            </a:br>
+            <a:r>
+              <a:rPr lang="pt-PT" b="0" i="0" dirty="0">
+                <a:effectLst/>
+              </a:rPr>
+              <a:t>Proteção de dados em conformidade com o RGPD. Dados anonimizados e armazenados em servidores seguros com encriptação </a:t>
+            </a:r>
+            <a:r>
+              <a:rPr lang="pt-PT" b="0" i="0" dirty="0" err="1">
+                <a:effectLst/>
+              </a:rPr>
+              <a:t>end</a:t>
+            </a:r>
+            <a:r>
+              <a:rPr lang="pt-PT" b="0" i="0" dirty="0">
+                <a:effectLst/>
+              </a:rPr>
+              <a:t>-to-</a:t>
+            </a:r>
+            <a:r>
+              <a:rPr lang="pt-PT" b="0" i="0" dirty="0" err="1">
+                <a:effectLst/>
+              </a:rPr>
+              <a:t>end</a:t>
+            </a:r>
+            <a:r>
+              <a:rPr lang="pt-PT" b="0" i="0" dirty="0">
+                <a:effectLst/>
+              </a:rPr>
+              <a:t>.</a:t>
+            </a:r>
+            <a:endParaRPr lang="pt-PT" dirty="0"/>
           </a:p>
         </p:txBody>
       </p:sp>
@@ -4564,16 +4683,70 @@
         </p:nvSpPr>
         <p:spPr/>
         <p:txBody>
-          <a:bodyPr/>
-          <a:lstStyle/>
+          <a:bodyPr>
+            <a:normAutofit fontScale="85000" lnSpcReduction="20000"/>
+          </a:bodyPr>
+          <a:lstStyle/>
+          <a:p>
+            <a:pPr marL="0" indent="0" algn="just">
+              <a:buNone/>
+            </a:pPr>
+            <a:r>
+              <a:rPr lang="pt-PT" dirty="0"/>
+              <a:t>A transição para o ensino superior é um período de elevada vulnerabilidade, estimando-se que um terço dos estudantes sofra de mal-estar psicológico. Barreiras como o estigma, custos elevados e longas listas de espera dificultam o acesso ao apoio tradicional, que é muitas vezes escasso ou passivo.</a:t>
+            </a:r>
+          </a:p>
+          <a:p>
+            <a:pPr marL="0" indent="0" algn="just">
+              <a:buNone/>
+            </a:pPr>
+            <a:r>
+              <a:rPr lang="pt-PT" dirty="0" err="1"/>
+              <a:t>Oprojeto</a:t>
+            </a:r>
+            <a:r>
+              <a:rPr lang="pt-PT" dirty="0"/>
+              <a:t> </a:t>
+            </a:r>
+            <a:r>
+              <a:rPr lang="pt-PT" b="1" dirty="0" err="1"/>
+              <a:t>MindMove</a:t>
+            </a:r>
+            <a:r>
+              <a:rPr lang="pt-PT" dirty="0"/>
+              <a:t> surge para colmatar esta lacuna, apresentando uma intervenção digital multimodal que integra a Terapia Cognitivo-Comportamental (</a:t>
+            </a:r>
+            <a:r>
+              <a:rPr lang="pt-PT" dirty="0" err="1"/>
+              <a:t>dCBT</a:t>
+            </a:r>
+            <a:r>
+              <a:rPr lang="pt-PT" dirty="0"/>
+              <a:t>) com a monitorização de estilos de vida (sono e exercício). A aplicação, focada em sintomas depressivos ligeiros a moderados (PHQ-9 entre 5 e 14), atua preventivamente para evitar o agravamento clínico.</a:t>
+            </a:r>
+          </a:p>
+          <a:p>
+            <a:pPr marL="0" indent="0" algn="just">
+              <a:buNone/>
+            </a:pPr>
+            <a:r>
+              <a:rPr lang="pt-PT" dirty="0"/>
+              <a:t>Ao comparar a monitorização ativa via app com o suporte estático (brochuras informativas), que representa o padrão atual nos serviços universitários, este estudo pretende demonstrar a superioridade da solução tecnológica na redução de sintomas. Assim, o </a:t>
+            </a:r>
+            <a:r>
+              <a:rPr lang="pt-PT" dirty="0" err="1"/>
+              <a:t>MindMove</a:t>
+            </a:r>
+            <a:r>
+              <a:rPr lang="pt-PT" dirty="0"/>
+              <a:t> oferece uma alternativa escalável e eficaz para a saúde mental no contexto académico português.</a:t>
+            </a:r>
+          </a:p>
           <a:p>
             <a:pPr marL="0" indent="0">
               <a:buNone/>
             </a:pPr>
-            <a:r>
-              <a:rPr lang="pt-PT" dirty="0"/>
-              <a:t>O que é </a:t>
-            </a:r>
+            <a:endParaRPr lang="pt-PT" dirty="0"/>
           </a:p>
         </p:txBody>
       </p:sp>
@@ -4667,8 +4840,43 @@
             </a:pPr>
             <a:r>
               <a:rPr lang="pt-PT" dirty="0"/>
-              <a:t>O que é </a:t>
-            </a:r>
+              <a:t>Objetivo primário: </a:t>
+            </a:r>
+            <a:r>
+              <a:rPr lang="pt-PT" b="0" i="0" dirty="0">
+                <a:effectLst/>
+              </a:rPr>
+              <a:t>Avaliar a eficácia da intervenção digital </a:t>
+            </a:r>
+            <a:r>
+              <a:rPr lang="pt-PT" b="0" i="0" dirty="0" err="1">
+                <a:effectLst/>
+              </a:rPr>
+              <a:t>MindMove</a:t>
+            </a:r>
+            <a:r>
+              <a:rPr lang="pt-PT" b="0" i="0" dirty="0">
+                <a:effectLst/>
+              </a:rPr>
+              <a:t> na redução dos sintomas depressivos, medidos através do questionário PHQ-9, em estudantes universitários.</a:t>
+            </a:r>
+            <a:br>
+              <a:rPr lang="pt-PT" b="0" i="0" dirty="0">
+                <a:effectLst/>
+              </a:rPr>
+            </a:br>
+            <a:br>
+              <a:rPr lang="pt-PT" b="0" i="0" dirty="0">
+                <a:effectLst/>
+              </a:rPr>
+            </a:br>
+            <a:r>
+              <a:rPr lang="pt-PT" b="0" i="0" dirty="0">
+                <a:effectLst/>
+              </a:rPr>
+              <a:t>Objetivos Secundários: Avaliar o impacto na ansiedade (GAD-7), qualidade do sono (PSQI), níveis de atividade física, adesão à intervenção e usabilidade da aplicação (SUS).</a:t>
+            </a:r>
+            <a:endParaRPr lang="pt-PT" dirty="0"/>
           </a:p>
         </p:txBody>
       </p:sp>
@@ -4751,7 +4959,68 @@
           <a:bodyPr/>
           <a:lstStyle/>
           <a:p>
-            <a:endParaRPr lang="pt-PT"/>
+            <a:pPr marL="0" indent="0">
+              <a:buNone/>
+            </a:pPr>
+            <a:r>
+              <a:rPr lang="pt-PT" b="0" i="0" dirty="0">
+                <a:effectLst/>
+              </a:rPr>
+              <a:t>Ensaio clínico randomizado (RCT) paralelo com 30 participantes e alocação 1:1. Grupo intervenção utiliza a aplicação </a:t>
+            </a:r>
+            <a:r>
+              <a:rPr lang="pt-PT" b="0" i="0" dirty="0" err="1">
+                <a:effectLst/>
+              </a:rPr>
+              <a:t>MindMove</a:t>
+            </a:r>
+            <a:r>
+              <a:rPr lang="pt-PT" b="0" i="0" dirty="0">
+                <a:effectLst/>
+              </a:rPr>
+              <a:t> com monitorização, alertas e conteúdo educativo.</a:t>
+            </a:r>
+            <a:br>
+              <a:rPr lang="pt-PT" b="0" i="0" dirty="0">
+                <a:effectLst/>
+              </a:rPr>
+            </a:br>
+            <a:br>
+              <a:rPr lang="pt-PT" b="0" i="0" dirty="0">
+                <a:effectLst/>
+              </a:rPr>
+            </a:br>
+            <a:r>
+              <a:rPr lang="pt-PT" b="0" i="0" dirty="0">
+                <a:effectLst/>
+              </a:rPr>
+              <a:t>Grupo controlo em lista de espera recebe brochuras informativas (standard </a:t>
+            </a:r>
+            <a:r>
+              <a:rPr lang="pt-PT" b="0" i="0" dirty="0" err="1">
+                <a:effectLst/>
+              </a:rPr>
+              <a:t>of</a:t>
+            </a:r>
+            <a:r>
+              <a:rPr lang="pt-PT" b="0" i="0" dirty="0">
+                <a:effectLst/>
+              </a:rPr>
+              <a:t> </a:t>
+            </a:r>
+            <a:r>
+              <a:rPr lang="pt-PT" b="0" i="0" dirty="0" err="1">
+                <a:effectLst/>
+              </a:rPr>
+              <a:t>care</a:t>
+            </a:r>
+            <a:r>
+              <a:rPr lang="pt-PT" b="0" i="0" dirty="0">
+                <a:effectLst/>
+              </a:rPr>
+              <a:t>). Período do estudo: 21 a 27 de março de 2026 (fase piloto).</a:t>
+            </a:r>
+            <a:endParaRPr lang="pt-PT" dirty="0"/>
           </a:p>
         </p:txBody>
       </p:sp>
@@ -4832,10 +5101,142 @@
         </p:nvSpPr>
         <p:spPr/>
         <p:txBody>
-          <a:bodyPr/>
-          <a:lstStyle/>
-          <a:p>
-            <a:endParaRPr lang="pt-PT"/>
+          <a:bodyPr>
+            <a:normAutofit fontScale="92500" lnSpcReduction="20000"/>
+          </a:bodyPr>
+          <a:lstStyle/>
+          <a:p>
+            <a:pPr marL="0" indent="0">
+              <a:buNone/>
+            </a:pPr>
+            <a:r>
+              <a:rPr lang="pt-PT" dirty="0"/>
+              <a:t>Desenho do Estudo</a:t>
+            </a:r>
+            <a:endParaRPr lang="pt-PT" dirty="0">
+              <a:effectLst/>
+            </a:endParaRPr>
+          </a:p>
+          <a:p>
+            <a:pPr marL="0" indent="0">
+              <a:buNone/>
+            </a:pPr>
+            <a:r>
+              <a:rPr lang="pt-PT" b="0" i="0" dirty="0">
+                <a:effectLst/>
+              </a:rPr>
+              <a:t>Ensaio clínico randomizado, controlado, paralelo com 30 participantes divididos 1:1 entre grupo intervenção (App </a:t>
+            </a:r>
+            <a:r>
+              <a:rPr lang="pt-PT" b="0" i="0" dirty="0" err="1">
+                <a:effectLst/>
+              </a:rPr>
+              <a:t>MindMove</a:t>
+            </a:r>
+            <a:r>
+              <a:rPr lang="pt-PT" b="0" i="0" dirty="0">
+                <a:effectLst/>
+              </a:rPr>
+              <a:t>) e grupo controlo (lista de espera com brochuras informativas).</a:t>
+            </a:r>
+            <a:br>
+              <a:rPr lang="pt-PT" b="0" i="0" dirty="0">
+                <a:effectLst/>
+              </a:rPr>
+            </a:br>
+            <a:br>
+              <a:rPr lang="pt-PT" b="0" i="0" dirty="0">
+                <a:effectLst/>
+              </a:rPr>
+            </a:br>
+            <a:r>
+              <a:rPr lang="pt-PT" dirty="0" err="1"/>
+              <a:t>Timeline</a:t>
+            </a:r>
+            <a:r>
+              <a:rPr lang="pt-PT" dirty="0"/>
+              <a:t> do Estudo</a:t>
+            </a:r>
+            <a:endParaRPr lang="pt-PT" dirty="0">
+              <a:effectLst/>
+            </a:endParaRPr>
+          </a:p>
+          <a:p>
+            <a:r>
+              <a:rPr lang="pt-PT" b="0" i="0" dirty="0">
+                <a:effectLst/>
+              </a:rPr>
+              <a:t>Recrutamento: Seleção de participantes</a:t>
+            </a:r>
+            <a:endParaRPr lang="pt-PT" dirty="0"/>
+          </a:p>
+          <a:p>
+            <a:r>
+              <a:rPr lang="pt-PT" b="0" i="0" dirty="0" err="1">
+                <a:effectLst/>
+              </a:rPr>
+              <a:t>Baseline</a:t>
+            </a:r>
+            <a:r>
+              <a:rPr lang="pt-PT" b="0" i="0" dirty="0">
+                <a:effectLst/>
+              </a:rPr>
+              <a:t>: Avaliação inicial (PHQ-9, GAD-7)</a:t>
+            </a:r>
+            <a:endParaRPr lang="pt-PT" dirty="0"/>
+          </a:p>
+          <a:p>
+            <a:r>
+              <a:rPr lang="pt-PT" b="0" i="0" dirty="0">
+                <a:effectLst/>
+              </a:rPr>
+              <a:t>Intervenção: data definida </a:t>
+            </a:r>
+          </a:p>
+          <a:p>
+            <a:r>
+              <a:rPr lang="pt-PT" b="0" i="0" dirty="0" err="1">
+                <a:effectLst/>
+              </a:rPr>
+              <a:t>Mid-term</a:t>
+            </a:r>
+            <a:r>
+              <a:rPr lang="pt-PT" b="0" i="0" dirty="0">
+                <a:effectLst/>
+              </a:rPr>
+              <a:t>: Avaliação intermédia</a:t>
+            </a:r>
+            <a:endParaRPr lang="pt-PT" dirty="0"/>
+          </a:p>
+          <a:p>
+            <a:r>
+              <a:rPr lang="pt-PT" b="0" i="0" dirty="0" err="1">
+                <a:effectLst/>
+              </a:rPr>
+              <a:t>Post-test</a:t>
+            </a:r>
+            <a:r>
+              <a:rPr lang="pt-PT" b="0" i="0" dirty="0">
+                <a:effectLst/>
+              </a:rPr>
+              <a:t>: Avaliação final</a:t>
+            </a:r>
+            <a:endParaRPr lang="pt-PT" dirty="0"/>
+          </a:p>
+          <a:p>
+            <a:r>
+              <a:rPr lang="pt-PT" b="0" i="0" dirty="0">
+                <a:effectLst/>
+              </a:rPr>
+              <a:t>Follow-up: Acompanhamento</a:t>
+            </a:r>
+            <a:endParaRPr lang="pt-PT" dirty="0"/>
+          </a:p>
+          <a:p>
+            <a:pPr marL="0" indent="0">
+              <a:buNone/>
+            </a:pPr>
+            <a:endParaRPr lang="pt-PT" dirty="0"/>
           </a:p>
         </p:txBody>
       </p:sp>
@@ -4915,10 +5316,99 @@
         </p:nvSpPr>
         <p:spPr/>
         <p:txBody>
-          <a:bodyPr/>
-          <a:lstStyle/>
-          <a:p>
-            <a:endParaRPr lang="pt-PT"/>
+          <a:bodyPr>
+            <a:normAutofit fontScale="62500" lnSpcReduction="20000"/>
+          </a:bodyPr>
+          <a:lstStyle/>
+          <a:p>
+            <a:pPr marL="0" indent="0">
+              <a:buNone/>
+            </a:pPr>
+            <a:r>
+              <a:rPr lang="pt-PT" dirty="0"/>
+              <a:t>Critérios de Inclusão:</a:t>
+            </a:r>
+          </a:p>
+          <a:p>
+            <a:r>
+              <a:rPr lang="pt-PT" dirty="0"/>
+              <a:t>Estudantes universitários matriculados</a:t>
+            </a:r>
+          </a:p>
+          <a:p>
+            <a:r>
+              <a:rPr lang="pt-PT" dirty="0"/>
+              <a:t>Idade entre 18 e 30 anos</a:t>
+            </a:r>
+          </a:p>
+          <a:p>
+            <a:r>
+              <a:rPr lang="pt-PT" dirty="0"/>
+              <a:t>Pontuação PHQ-9 ≥ 5 (sintomas depressivos leves a moderados)</a:t>
+            </a:r>
+          </a:p>
+          <a:p>
+            <a:r>
+              <a:rPr lang="pt-PT" dirty="0"/>
+              <a:t>Acesso a smartphone com sistema iOS ou Android</a:t>
+            </a:r>
+          </a:p>
+          <a:p>
+            <a:r>
+              <a:rPr lang="pt-PT" dirty="0"/>
+              <a:t>Capacidade de fornecer consentimento informado</a:t>
+            </a:r>
+          </a:p>
+          <a:p>
+            <a:endParaRPr lang="pt-PT" dirty="0"/>
+          </a:p>
+          <a:p>
+            <a:r>
+              <a:rPr lang="pt-PT" dirty="0"/>
+              <a:t>Critérios de Exclusão:</a:t>
+            </a:r>
+          </a:p>
+          <a:p>
+            <a:r>
+              <a:rPr lang="pt-PT" dirty="0"/>
+              <a:t>Tratamento psiquiátrico ativo em curso</a:t>
+            </a:r>
+          </a:p>
+          <a:p>
+            <a:r>
+              <a:rPr lang="pt-PT" dirty="0"/>
+              <a:t>Presença de ideação suicida (item 9 do PHQ-9 ≥ 2)</a:t>
+            </a:r>
+          </a:p>
+          <a:p>
+            <a:r>
+              <a:rPr lang="pt-PT" dirty="0"/>
+              <a:t>Diagnóstico de perturbação psicótica ou bipolar</a:t>
+            </a:r>
+          </a:p>
+          <a:p>
+            <a:r>
+              <a:rPr lang="pt-PT" dirty="0"/>
+              <a:t>Participação noutro ensaio clínico de saúde mental</a:t>
+            </a:r>
+          </a:p>
+          <a:p>
+            <a:r>
+              <a:rPr lang="pt-PT" dirty="0"/>
+              <a:t>Incapacidade de compreender português escrito</a:t>
+            </a:r>
+          </a:p>
+          <a:p>
+            <a:pPr marL="0" indent="0">
+              <a:buNone/>
+            </a:pPr>
+            <a:endParaRPr lang="pt-PT" dirty="0"/>
+          </a:p>
+          <a:p>
+            <a:pPr marL="0" indent="0">
+              <a:buNone/>
+            </a:pPr>
+            <a:endParaRPr lang="pt-PT" dirty="0"/>
           </a:p>
         </p:txBody>
       </p:sp>
@@ -5007,7 +5497,86 @@
           <a:bodyPr/>
           <a:lstStyle/>
           <a:p>
-            <a:endParaRPr lang="pt-PT"/>
+            <a:pPr marL="0" indent="0">
+              <a:buNone/>
+            </a:pPr>
+            <a:r>
+              <a:rPr lang="pt-PT" dirty="0"/>
+              <a:t>Grupo Intervenção</a:t>
+            </a:r>
+            <a:endParaRPr lang="pt-PT" dirty="0">
+              <a:effectLst/>
+            </a:endParaRPr>
+          </a:p>
+          <a:p>
+            <a:pPr marL="0" indent="0">
+              <a:buNone/>
+            </a:pPr>
+            <a:r>
+              <a:rPr lang="pt-PT" dirty="0"/>
+              <a:t>App </a:t>
+            </a:r>
+            <a:r>
+              <a:rPr lang="pt-PT" dirty="0" err="1"/>
+              <a:t>MindMove</a:t>
+            </a:r>
+            <a:r>
+              <a:rPr lang="pt-PT" dirty="0"/>
+              <a:t> com funcionalidades integradas: monitorização contínua de sintomas, alertas personalizados baseados em dados, conteúdo educativo sobre saúde mental e exercícios de bem-estar.</a:t>
+            </a:r>
+            <a:endParaRPr lang="pt-PT" dirty="0">
+              <a:effectLst/>
+            </a:endParaRPr>
+          </a:p>
+          <a:p>
+            <a:pPr marL="0" indent="0">
+              <a:buNone/>
+            </a:pPr>
+            <a:br>
+              <a:rPr lang="pt-PT" dirty="0"/>
+            </a:br>
+            <a:r>
+              <a:rPr lang="pt-PT" b="0" i="0" dirty="0">
+                <a:effectLst/>
+              </a:rPr>
+              <a:t>Grupo Controlo</a:t>
+            </a:r>
+            <a:br>
+              <a:rPr lang="pt-PT" b="0" i="0" dirty="0">
+                <a:effectLst/>
+              </a:rPr>
+            </a:br>
+            <a:r>
+              <a:rPr lang="pt-PT" b="0" i="0" dirty="0">
+                <a:effectLst/>
+              </a:rPr>
+              <a:t>Brochuras informativas sobre saúde mental (standard </a:t>
+            </a:r>
+            <a:r>
+              <a:rPr lang="pt-PT" b="0" i="0" dirty="0" err="1">
+                <a:effectLst/>
+              </a:rPr>
+              <a:t>of</a:t>
+            </a:r>
+            <a:r>
+              <a:rPr lang="pt-PT" b="0" i="0" dirty="0">
+                <a:effectLst/>
+              </a:rPr>
+              <a:t> </a:t>
+            </a:r>
+            <a:r>
+              <a:rPr lang="pt-PT" b="0" i="0" dirty="0" err="1">
+                <a:effectLst/>
+              </a:rPr>
+              <a:t>care</a:t>
+            </a:r>
+            <a:r>
+              <a:rPr lang="pt-PT" b="0" i="0" dirty="0">
+                <a:effectLst/>
+              </a:rPr>
+              <a:t>): material educativo convencional sem componente digital ou interativo, servindo como comparador ativo.</a:t>
+            </a:r>
+            <a:endParaRPr lang="pt-PT" dirty="0"/>
           </a:p>
         </p:txBody>
       </p:sp>
@@ -5097,7 +5666,180 @@
           <a:bodyPr/>
           <a:lstStyle/>
           <a:p>
-            <a:endParaRPr lang="pt-PT"/>
+            <a:pPr marL="0" indent="0">
+              <a:buNone/>
+            </a:pPr>
+            <a:r>
+              <a:rPr lang="pt-PT" b="0" i="0" dirty="0" err="1">
+                <a:effectLst/>
+              </a:rPr>
+              <a:t>Outcome</a:t>
+            </a:r>
+            <a:r>
+              <a:rPr lang="pt-PT" b="0" i="0" dirty="0">
+                <a:effectLst/>
+              </a:rPr>
+              <a:t> Primário: Variação no score PHQ-9 (</a:t>
+            </a:r>
+            <a:r>
+              <a:rPr lang="pt-PT" b="0" i="0" dirty="0" err="1">
+                <a:effectLst/>
+              </a:rPr>
+              <a:t>Patient</a:t>
+            </a:r>
+            <a:r>
+              <a:rPr lang="pt-PT" b="0" i="0" dirty="0">
+                <a:effectLst/>
+              </a:rPr>
+              <a:t> </a:t>
+            </a:r>
+            <a:r>
+              <a:rPr lang="pt-PT" b="0" i="0" dirty="0" err="1">
+                <a:effectLst/>
+              </a:rPr>
+              <a:t>Health</a:t>
+            </a:r>
+            <a:r>
+              <a:rPr lang="pt-PT" b="0" i="0" dirty="0">
+                <a:effectLst/>
+              </a:rPr>
+              <a:t> Questionnaire-9) para avaliação da redução de sintomas depressivos.</a:t>
+            </a:r>
+            <a:br>
+              <a:rPr lang="pt-PT" b="0" i="0" dirty="0">
+                <a:effectLst/>
+              </a:rPr>
+            </a:br>
+            <a:br>
+              <a:rPr lang="pt-PT" b="0" i="0" dirty="0">
+                <a:effectLst/>
+              </a:rPr>
+            </a:br>
+            <a:r>
+              <a:rPr lang="pt-PT" b="0" i="0" dirty="0">
+                <a:effectLst/>
+              </a:rPr>
+              <a:t>Usabilidade: Avaliação através do </a:t>
+            </a:r>
+            <a:r>
+              <a:rPr lang="pt-PT" b="0" i="0" dirty="0" err="1">
+                <a:effectLst/>
+              </a:rPr>
+              <a:t>System</a:t>
+            </a:r>
+            <a:r>
+              <a:rPr lang="pt-PT" b="0" i="0" dirty="0">
+                <a:effectLst/>
+              </a:rPr>
+              <a:t> </a:t>
+            </a:r>
+            <a:r>
+              <a:rPr lang="pt-PT" b="0" i="0" dirty="0" err="1">
+                <a:effectLst/>
+              </a:rPr>
+              <a:t>Usability</a:t>
+            </a:r>
+            <a:r>
+              <a:rPr lang="pt-PT" b="0" i="0" dirty="0">
+                <a:effectLst/>
+              </a:rPr>
+              <a:t> </a:t>
+            </a:r>
+            <a:r>
+              <a:rPr lang="pt-PT" b="0" i="0" dirty="0" err="1">
+                <a:effectLst/>
+              </a:rPr>
+              <a:t>Scale</a:t>
+            </a:r>
+            <a:r>
+              <a:rPr lang="pt-PT" b="0" i="0" dirty="0">
+                <a:effectLst/>
+              </a:rPr>
+              <a:t> (SUS) para medir a experiência do utilizador com a aplicação </a:t>
+            </a:r>
+            <a:r>
+              <a:rPr lang="pt-PT" b="0" i="0" dirty="0" err="1">
+                <a:effectLst/>
+              </a:rPr>
+              <a:t>MindMove</a:t>
+            </a:r>
+            <a:r>
+              <a:rPr lang="pt-PT" b="0" i="0" dirty="0">
+                <a:effectLst/>
+              </a:rPr>
+              <a:t>.</a:t>
+            </a:r>
+            <a:br>
+              <a:rPr lang="pt-PT" b="0" i="0" dirty="0">
+                <a:effectLst/>
+              </a:rPr>
+            </a:br>
+            <a:br>
+              <a:rPr lang="pt-PT" b="0" i="0" dirty="0">
+                <a:effectLst/>
+              </a:rPr>
+            </a:br>
+            <a:r>
+              <a:rPr lang="pt-PT" b="0" i="0" dirty="0" err="1">
+                <a:effectLst/>
+              </a:rPr>
+              <a:t>Outcomes</a:t>
+            </a:r>
+            <a:r>
+              <a:rPr lang="pt-PT" b="0" i="0" dirty="0">
+                <a:effectLst/>
+              </a:rPr>
+              <a:t> Secundários: Adesão à intervenção digital e bem-estar geral medido pelo WHO-5 (</a:t>
+            </a:r>
+            <a:r>
+              <a:rPr lang="pt-PT" b="0" i="0" dirty="0" err="1">
+                <a:effectLst/>
+              </a:rPr>
+              <a:t>World</a:t>
+            </a:r>
+            <a:r>
+              <a:rPr lang="pt-PT" b="0" i="0" dirty="0">
+                <a:effectLst/>
+              </a:rPr>
+              <a:t> </a:t>
+            </a:r>
+            <a:r>
+              <a:rPr lang="pt-PT" b="0" i="0" dirty="0" err="1">
+                <a:effectLst/>
+              </a:rPr>
+              <a:t>Health</a:t>
+            </a:r>
+            <a:r>
+              <a:rPr lang="pt-PT" b="0" i="0" dirty="0">
+                <a:effectLst/>
+              </a:rPr>
+              <a:t> </a:t>
+            </a:r>
+            <a:r>
+              <a:rPr lang="pt-PT" b="0" i="0" dirty="0" err="1">
+                <a:effectLst/>
+              </a:rPr>
+              <a:t>Organization</a:t>
+            </a:r>
+            <a:r>
+              <a:rPr lang="pt-PT" b="0" i="0" dirty="0">
+                <a:effectLst/>
+              </a:rPr>
+              <a:t> </a:t>
+            </a:r>
+            <a:r>
+              <a:rPr lang="pt-PT" b="0" i="0" dirty="0" err="1">
+                <a:effectLst/>
+              </a:rPr>
+              <a:t>Well-Being</a:t>
+            </a:r>
+            <a:r>
+              <a:rPr lang="pt-PT" b="0" i="0" dirty="0">
+                <a:effectLst/>
+              </a:rPr>
+              <a:t> Index).</a:t>
+            </a:r>
+            <a:endParaRPr lang="pt-PT" dirty="0"/>
           </a:p>
         </p:txBody>
       </p:sp>
@@ -5180,7 +5922,65 @@
           <a:bodyPr/>
           <a:lstStyle/>
           <a:p>
-            <a:endParaRPr lang="pt-PT"/>
+            <a:pPr marL="0" indent="0">
+              <a:buNone/>
+            </a:pPr>
+            <a:r>
+              <a:rPr lang="pt-PT" b="0" i="0" dirty="0">
+                <a:effectLst/>
+              </a:rPr>
+              <a:t>Métodos e Métricas</a:t>
+            </a:r>
+            <a:endParaRPr lang="pt-PT" dirty="0"/>
+          </a:p>
+          <a:p>
+            <a:r>
+              <a:rPr lang="pt-PT" dirty="0"/>
+              <a:t>Amostra piloto: n=30 participantes</a:t>
+            </a:r>
+          </a:p>
+          <a:p>
+            <a:r>
+              <a:rPr lang="pt-PT" dirty="0"/>
+              <a:t>Modelos Lineares Mistos (LMM) para análise longitudinal</a:t>
+            </a:r>
+          </a:p>
+          <a:p>
+            <a:r>
+              <a:rPr lang="pt-PT" dirty="0"/>
+              <a:t>Análise ITT (intenção de tratar) e per-</a:t>
+            </a:r>
+            <a:r>
+              <a:rPr lang="pt-PT" dirty="0" err="1"/>
+              <a:t>protocol</a:t>
+            </a:r>
+            <a:endParaRPr lang="pt-PT" dirty="0"/>
+          </a:p>
+          <a:p>
+            <a:r>
+              <a:rPr lang="pt-PT" dirty="0"/>
+              <a:t>Cálculo do tamanho de efeito: </a:t>
+            </a:r>
+            <a:r>
+              <a:rPr lang="pt-PT" dirty="0" err="1"/>
+              <a:t>Cohen’s</a:t>
+            </a:r>
+            <a:r>
+              <a:rPr lang="pt-PT" dirty="0"/>
+              <a:t> d</a:t>
+            </a:r>
+          </a:p>
+          <a:p>
+            <a:r>
+              <a:rPr lang="pt-PT" dirty="0"/>
+              <a:t>Comparação entre grupos ao longo do tempo</a:t>
+            </a:r>
+          </a:p>
+          <a:p>
+            <a:pPr marL="0" indent="0">
+              <a:buNone/>
+            </a:pPr>
+            <a:endParaRPr lang="pt-PT" dirty="0"/>
           </a:p>
         </p:txBody>
       </p:sp>

--- a/projeto_fp_tp10.pptx
+++ b/projeto_fp_tp10.pptx
@@ -113,6 +113,11 @@
       </a:defRPr>
     </a:lvl9pPr>
   </p:defaultTextStyle>
+  <p:extLst>
+    <p:ext uri="{EFAFB233-063F-42B5-8137-9DF3F51BA10A}">
+      <p15:sldGuideLst xmlns:p15="http://schemas.microsoft.com/office/powerpoint/2012/main"/>
+    </p:ext>
+  </p:extLst>
 </p:presentation>
 </file>
 
@@ -129,12 +134,12 @@
   <pc:docChgLst>
     <pc:chgData name="Gabriela Carneiro" userId="038eca41cd8564ab" providerId="LiveId" clId="{D03F746D-BE5D-4789-93E6-42C6E52F57A2}"/>
     <pc:docChg chg="undo custSel addSld modSld sldOrd addMainMaster delMainMaster">
-      <pc:chgData name="Gabriela Carneiro" userId="038eca41cd8564ab" providerId="LiveId" clId="{D03F746D-BE5D-4789-93E6-42C6E52F57A2}" dt="2026-04-28T20:58:15.437" v="686"/>
+      <pc:chgData name="Gabriela Carneiro" userId="038eca41cd8564ab" providerId="LiveId" clId="{D03F746D-BE5D-4789-93E6-42C6E52F57A2}" dt="2026-04-29T20:21:35.612" v="713" actId="1076"/>
       <pc:docMkLst>
         <pc:docMk/>
       </pc:docMkLst>
       <pc:sldChg chg="addSp delSp modSp mod ord setBg modClrScheme addAnim delAnim delDesignElem chgLayout">
-        <pc:chgData name="Gabriela Carneiro" userId="038eca41cd8564ab" providerId="LiveId" clId="{D03F746D-BE5D-4789-93E6-42C6E52F57A2}" dt="2026-04-28T20:43:27.707" v="485" actId="478"/>
+        <pc:chgData name="Gabriela Carneiro" userId="038eca41cd8564ab" providerId="LiveId" clId="{D03F746D-BE5D-4789-93E6-42C6E52F57A2}" dt="2026-04-29T20:21:35.612" v="713" actId="1076"/>
         <pc:sldMkLst>
           <pc:docMk/>
           <pc:sldMk cId="334472207" sldId="256"/>
@@ -172,7 +177,7 @@
           </ac:spMkLst>
         </pc:spChg>
         <pc:spChg chg="add mod">
-          <ac:chgData name="Gabriela Carneiro" userId="038eca41cd8564ab" providerId="LiveId" clId="{D03F746D-BE5D-4789-93E6-42C6E52F57A2}" dt="2026-04-28T19:24:32.657" v="226" actId="20577"/>
+          <ac:chgData name="Gabriela Carneiro" userId="038eca41cd8564ab" providerId="LiveId" clId="{D03F746D-BE5D-4789-93E6-42C6E52F57A2}" dt="2026-04-29T20:21:35.612" v="713" actId="1076"/>
           <ac:spMkLst>
             <pc:docMk/>
             <pc:sldMk cId="334472207" sldId="256"/>
@@ -284,14 +289,14 @@
           </ac:cxnSpMkLst>
         </pc:cxnChg>
       </pc:sldChg>
-      <pc:sldChg chg="addSp delSp modSp new mod">
-        <pc:chgData name="Gabriela Carneiro" userId="038eca41cd8564ab" providerId="LiveId" clId="{D03F746D-BE5D-4789-93E6-42C6E52F57A2}" dt="2026-04-28T20:43:37.410" v="487" actId="478"/>
+      <pc:sldChg chg="addSp delSp modSp new mod ord">
+        <pc:chgData name="Gabriela Carneiro" userId="038eca41cd8564ab" providerId="LiveId" clId="{D03F746D-BE5D-4789-93E6-42C6E52F57A2}" dt="2026-04-29T16:51:38.945" v="712" actId="20577"/>
         <pc:sldMkLst>
           <pc:docMk/>
           <pc:sldMk cId="4265899404" sldId="257"/>
         </pc:sldMkLst>
         <pc:spChg chg="mod">
-          <ac:chgData name="Gabriela Carneiro" userId="038eca41cd8564ab" providerId="LiveId" clId="{D03F746D-BE5D-4789-93E6-42C6E52F57A2}" dt="2026-04-28T20:17:43.937" v="281" actId="20577"/>
+          <ac:chgData name="Gabriela Carneiro" userId="038eca41cd8564ab" providerId="LiveId" clId="{D03F746D-BE5D-4789-93E6-42C6E52F57A2}" dt="2026-04-29T16:51:38.945" v="712" actId="20577"/>
           <ac:spMkLst>
             <pc:docMk/>
             <pc:sldMk cId="4265899404" sldId="257"/>
@@ -631,101 +636,6 @@
             <pc:docMk/>
             <pc:sldMasterMk cId="4021644389" sldId="2147483660"/>
             <pc:sldLayoutMk cId="1620018748" sldId="2147483676"/>
-          </pc:sldLayoutMkLst>
-        </pc:sldLayoutChg>
-      </pc:sldMasterChg>
-      <pc:sldMasterChg chg="add del replId addSldLayout delSldLayout">
-        <pc:chgData name="Gabriela Carneiro" userId="038eca41cd8564ab" providerId="LiveId" clId="{D03F746D-BE5D-4789-93E6-42C6E52F57A2}" dt="2026-04-28T18:54:33.043" v="7" actId="26606"/>
-        <pc:sldMasterMkLst>
-          <pc:docMk/>
-          <pc:sldMasterMk cId="1706574332" sldId="2147483677"/>
-        </pc:sldMasterMkLst>
-        <pc:sldLayoutChg chg="add del replId">
-          <pc:chgData name="Gabriela Carneiro" userId="038eca41cd8564ab" providerId="LiveId" clId="{D03F746D-BE5D-4789-93E6-42C6E52F57A2}" dt="2026-04-28T18:54:33.043" v="7" actId="26606"/>
-          <pc:sldLayoutMkLst>
-            <pc:docMk/>
-            <pc:sldMasterMk cId="1706574332" sldId="2147483677"/>
-            <pc:sldLayoutMk cId="4169075916" sldId="2147483678"/>
-          </pc:sldLayoutMkLst>
-        </pc:sldLayoutChg>
-        <pc:sldLayoutChg chg="add del replId">
-          <pc:chgData name="Gabriela Carneiro" userId="038eca41cd8564ab" providerId="LiveId" clId="{D03F746D-BE5D-4789-93E6-42C6E52F57A2}" dt="2026-04-28T18:54:33.043" v="7" actId="26606"/>
-          <pc:sldLayoutMkLst>
-            <pc:docMk/>
-            <pc:sldMasterMk cId="1706574332" sldId="2147483677"/>
-            <pc:sldLayoutMk cId="3971105433" sldId="2147483679"/>
-          </pc:sldLayoutMkLst>
-        </pc:sldLayoutChg>
-        <pc:sldLayoutChg chg="add del replId">
-          <pc:chgData name="Gabriela Carneiro" userId="038eca41cd8564ab" providerId="LiveId" clId="{D03F746D-BE5D-4789-93E6-42C6E52F57A2}" dt="2026-04-28T18:54:33.043" v="7" actId="26606"/>
-          <pc:sldLayoutMkLst>
-            <pc:docMk/>
-            <pc:sldMasterMk cId="1706574332" sldId="2147483677"/>
-            <pc:sldLayoutMk cId="2809624590" sldId="2147483680"/>
-          </pc:sldLayoutMkLst>
-        </pc:sldLayoutChg>
-        <pc:sldLayoutChg chg="add del replId">
-          <pc:chgData name="Gabriela Carneiro" userId="038eca41cd8564ab" providerId="LiveId" clId="{D03F746D-BE5D-4789-93E6-42C6E52F57A2}" dt="2026-04-28T18:54:33.043" v="7" actId="26606"/>
-          <pc:sldLayoutMkLst>
-            <pc:docMk/>
-            <pc:sldMasterMk cId="1706574332" sldId="2147483677"/>
-            <pc:sldLayoutMk cId="46483895" sldId="2147483681"/>
-          </pc:sldLayoutMkLst>
-        </pc:sldLayoutChg>
-        <pc:sldLayoutChg chg="add del replId">
-          <pc:chgData name="Gabriela Carneiro" userId="038eca41cd8564ab" providerId="LiveId" clId="{D03F746D-BE5D-4789-93E6-42C6E52F57A2}" dt="2026-04-28T18:54:33.043" v="7" actId="26606"/>
-          <pc:sldLayoutMkLst>
-            <pc:docMk/>
-            <pc:sldMasterMk cId="1706574332" sldId="2147483677"/>
-            <pc:sldLayoutMk cId="1032196476" sldId="2147483682"/>
-          </pc:sldLayoutMkLst>
-        </pc:sldLayoutChg>
-        <pc:sldLayoutChg chg="add del replId">
-          <pc:chgData name="Gabriela Carneiro" userId="038eca41cd8564ab" providerId="LiveId" clId="{D03F746D-BE5D-4789-93E6-42C6E52F57A2}" dt="2026-04-28T18:54:33.043" v="7" actId="26606"/>
-          <pc:sldLayoutMkLst>
-            <pc:docMk/>
-            <pc:sldMasterMk cId="1706574332" sldId="2147483677"/>
-            <pc:sldLayoutMk cId="1147285346" sldId="2147483683"/>
-          </pc:sldLayoutMkLst>
-        </pc:sldLayoutChg>
-        <pc:sldLayoutChg chg="add del replId">
-          <pc:chgData name="Gabriela Carneiro" userId="038eca41cd8564ab" providerId="LiveId" clId="{D03F746D-BE5D-4789-93E6-42C6E52F57A2}" dt="2026-04-28T18:54:33.043" v="7" actId="26606"/>
-          <pc:sldLayoutMkLst>
-            <pc:docMk/>
-            <pc:sldMasterMk cId="1706574332" sldId="2147483677"/>
-            <pc:sldLayoutMk cId="356839949" sldId="2147483684"/>
-          </pc:sldLayoutMkLst>
-        </pc:sldLayoutChg>
-        <pc:sldLayoutChg chg="add del replId">
-          <pc:chgData name="Gabriela Carneiro" userId="038eca41cd8564ab" providerId="LiveId" clId="{D03F746D-BE5D-4789-93E6-42C6E52F57A2}" dt="2026-04-28T18:54:33.043" v="7" actId="26606"/>
-          <pc:sldLayoutMkLst>
-            <pc:docMk/>
-            <pc:sldMasterMk cId="1706574332" sldId="2147483677"/>
-            <pc:sldLayoutMk cId="2141797413" sldId="2147483685"/>
-          </pc:sldLayoutMkLst>
-        </pc:sldLayoutChg>
-        <pc:sldLayoutChg chg="add del replId">
-          <pc:chgData name="Gabriela Carneiro" userId="038eca41cd8564ab" providerId="LiveId" clId="{D03F746D-BE5D-4789-93E6-42C6E52F57A2}" dt="2026-04-28T18:54:33.043" v="7" actId="26606"/>
-          <pc:sldLayoutMkLst>
-            <pc:docMk/>
-            <pc:sldMasterMk cId="1706574332" sldId="2147483677"/>
-            <pc:sldLayoutMk cId="3203792654" sldId="2147483686"/>
-          </pc:sldLayoutMkLst>
-        </pc:sldLayoutChg>
-        <pc:sldLayoutChg chg="add del replId">
-          <pc:chgData name="Gabriela Carneiro" userId="038eca41cd8564ab" providerId="LiveId" clId="{D03F746D-BE5D-4789-93E6-42C6E52F57A2}" dt="2026-04-28T18:54:33.043" v="7" actId="26606"/>
-          <pc:sldLayoutMkLst>
-            <pc:docMk/>
-            <pc:sldMasterMk cId="1706574332" sldId="2147483677"/>
-            <pc:sldLayoutMk cId="4255237317" sldId="2147483687"/>
-          </pc:sldLayoutMkLst>
-        </pc:sldLayoutChg>
-        <pc:sldLayoutChg chg="add del replId">
-          <pc:chgData name="Gabriela Carneiro" userId="038eca41cd8564ab" providerId="LiveId" clId="{D03F746D-BE5D-4789-93E6-42C6E52F57A2}" dt="2026-04-28T18:54:33.043" v="7" actId="26606"/>
-          <pc:sldLayoutMkLst>
-            <pc:docMk/>
-            <pc:sldMasterMk cId="1706574332" sldId="2147483677"/>
-            <pc:sldLayoutMk cId="1776009374" sldId="2147483688"/>
           </pc:sldLayoutMkLst>
         </pc:sldLayoutChg>
       </pc:sldMasterChg>
@@ -1071,7 +981,7 @@
           <a:p>
             <a:fld id="{7DA38F49-B3E2-4BF0-BEC7-C30D34ABBB8D}" type="datetime1">
               <a:rPr lang="en-US" smtClean="0"/>
-              <a:t>4/28/2026</a:t>
+              <a:t>4/29/2026</a:t>
             </a:fld>
             <a:endParaRPr lang="en-US"/>
           </a:p>
@@ -1270,7 +1180,7 @@
           <a:p>
             <a:fld id="{7DA38F49-B3E2-4BF0-BEC7-C30D34ABBB8D}" type="datetime1">
               <a:rPr lang="en-US" smtClean="0"/>
-              <a:t>4/28/2026</a:t>
+              <a:t>4/29/2026</a:t>
             </a:fld>
             <a:endParaRPr lang="en-US"/>
           </a:p>
@@ -1479,7 +1389,7 @@
           <a:p>
             <a:fld id="{7DA38F49-B3E2-4BF0-BEC7-C30D34ABBB8D}" type="datetime1">
               <a:rPr lang="en-US" smtClean="0"/>
-              <a:t>4/28/2026</a:t>
+              <a:t>4/29/2026</a:t>
             </a:fld>
             <a:endParaRPr lang="en-US"/>
           </a:p>
@@ -1678,7 +1588,7 @@
           <a:p>
             <a:fld id="{7DA38F49-B3E2-4BF0-BEC7-C30D34ABBB8D}" type="datetime1">
               <a:rPr lang="en-US" smtClean="0"/>
-              <a:t>4/28/2026</a:t>
+              <a:t>4/29/2026</a:t>
             </a:fld>
             <a:endParaRPr lang="en-US"/>
           </a:p>
@@ -1954,7 +1864,7 @@
           <a:p>
             <a:fld id="{7DA38F49-B3E2-4BF0-BEC7-C30D34ABBB8D}" type="datetime1">
               <a:rPr lang="en-US" smtClean="0"/>
-              <a:t>4/28/2026</a:t>
+              <a:t>4/29/2026</a:t>
             </a:fld>
             <a:endParaRPr lang="en-US"/>
           </a:p>
@@ -2220,7 +2130,7 @@
           <a:p>
             <a:fld id="{7DA38F49-B3E2-4BF0-BEC7-C30D34ABBB8D}" type="datetime1">
               <a:rPr lang="en-US" smtClean="0"/>
-              <a:t>4/28/2026</a:t>
+              <a:t>4/29/2026</a:t>
             </a:fld>
             <a:endParaRPr lang="en-US"/>
           </a:p>
@@ -2633,7 +2543,7 @@
           <a:p>
             <a:fld id="{7DA38F49-B3E2-4BF0-BEC7-C30D34ABBB8D}" type="datetime1">
               <a:rPr lang="en-US" smtClean="0"/>
-              <a:t>4/28/2026</a:t>
+              <a:t>4/29/2026</a:t>
             </a:fld>
             <a:endParaRPr lang="en-US"/>
           </a:p>
@@ -2775,7 +2685,7 @@
           <a:p>
             <a:fld id="{7DA38F49-B3E2-4BF0-BEC7-C30D34ABBB8D}" type="datetime1">
               <a:rPr lang="en-US" smtClean="0"/>
-              <a:t>4/28/2026</a:t>
+              <a:t>4/29/2026</a:t>
             </a:fld>
             <a:endParaRPr lang="en-US"/>
           </a:p>
@@ -2889,7 +2799,7 @@
           <a:p>
             <a:fld id="{7DA38F49-B3E2-4BF0-BEC7-C30D34ABBB8D}" type="datetime1">
               <a:rPr lang="en-US" smtClean="0"/>
-              <a:t>4/28/2026</a:t>
+              <a:t>4/29/2026</a:t>
             </a:fld>
             <a:endParaRPr lang="en-US"/>
           </a:p>
@@ -3201,7 +3111,7 @@
           <a:p>
             <a:fld id="{7DA38F49-B3E2-4BF0-BEC7-C30D34ABBB8D}" type="datetime1">
               <a:rPr lang="en-US" smtClean="0"/>
-              <a:t>4/28/2026</a:t>
+              <a:t>4/29/2026</a:t>
             </a:fld>
             <a:endParaRPr lang="en-US"/>
           </a:p>
@@ -3490,7 +3400,7 @@
           <a:p>
             <a:fld id="{7DA38F49-B3E2-4BF0-BEC7-C30D34ABBB8D}" type="datetime1">
               <a:rPr lang="en-US" smtClean="0"/>
-              <a:t>4/28/2026</a:t>
+              <a:t>4/29/2026</a:t>
             </a:fld>
             <a:endParaRPr lang="en-US"/>
           </a:p>
@@ -3732,7 +3642,7 @@
           <a:p>
             <a:fld id="{7DA38F49-B3E2-4BF0-BEC7-C30D34ABBB8D}" type="datetime1">
               <a:rPr lang="en-US" smtClean="0"/>
-              <a:t>4/28/2026</a:t>
+              <a:t>4/29/2026</a:t>
             </a:fld>
             <a:endParaRPr lang="en-US"/>
           </a:p>
@@ -4305,7 +4215,7 @@
         </p:nvSpPr>
         <p:spPr>
           <a:xfrm>
-            <a:off x="661915" y="5098408"/>
+            <a:off x="661915" y="5070699"/>
             <a:ext cx="6097136" cy="1477328"/>
           </a:xfrm>
           <a:prstGeom prst="rect">
@@ -4660,7 +4570,7 @@
           <a:p>
             <a:r>
               <a:rPr lang="pt-PT" dirty="0"/>
-              <a:t>Racional</a:t>
+              <a:t>Racional </a:t>
             </a:r>
           </a:p>
         </p:txBody>
